--- a/documentation/muinference-deck.pptx
+++ b/documentation/muinference-deck.pptx
@@ -5,23 +5,23 @@
     <p:sldMasterId id="2147483648" r:id="rId1"/>
   </p:sldMasterIdLst>
   <p:sldIdLst>
-    <p:sldId id="256" r:id="rId2"/>
-    <p:sldId id="257" r:id="rId3"/>
-    <p:sldId id="258" r:id="rId4"/>
-    <p:sldId id="259" r:id="rId5"/>
-    <p:sldId id="260" r:id="rId6"/>
-    <p:sldId id="261" r:id="rId7"/>
-    <p:sldId id="262" r:id="rId8"/>
-    <p:sldId id="263" r:id="rId9"/>
-    <p:sldId id="264" r:id="rId10"/>
-    <p:sldId id="265" r:id="rId11"/>
-    <p:sldId id="266" r:id="rId12"/>
-    <p:sldId id="267" r:id="rId13"/>
-    <p:sldId id="268" r:id="rId14"/>
-    <p:sldId id="269" r:id="rId15"/>
-    <p:sldId id="270" r:id="rId16"/>
+    <p:sldId id="256" r:id="rId7"/>
+    <p:sldId id="257" r:id="rId8"/>
+    <p:sldId id="258" r:id="rId9"/>
+    <p:sldId id="259" r:id="rId10"/>
+    <p:sldId id="260" r:id="rId11"/>
+    <p:sldId id="261" r:id="rId12"/>
+    <p:sldId id="262" r:id="rId13"/>
+    <p:sldId id="263" r:id="rId14"/>
+    <p:sldId id="264" r:id="rId15"/>
+    <p:sldId id="265" r:id="rId16"/>
+    <p:sldId id="266" r:id="rId17"/>
+    <p:sldId id="267" r:id="rId18"/>
+    <p:sldId id="268" r:id="rId19"/>
+    <p:sldId id="269" r:id="rId20"/>
+    <p:sldId id="270" r:id="rId21"/>
   </p:sldIdLst>
-  <p:sldSz cx="12192000" cy="6858000"/>
+  <p:sldSz cx="12191695" cy="6858000" type="screen4x3"/>
   <p:notesSz cx="6858000" cy="9144000"/>
   <p:defaultTextStyle>
     <a:defPPr>
@@ -118,22 +118,6 @@
       </a:defRPr>
     </a:lvl9pPr>
   </p:defaultTextStyle>
-  <p:extLst>
-    <p:ext uri="{EFAFB233-063F-42B5-8137-9DF3F51BA10A}">
-      <p15:sldGuideLst xmlns:p15="http://schemas.microsoft.com/office/powerpoint/2012/main">
-        <p15:guide id="1" orient="horz" pos="2160">
-          <p15:clr>
-            <a:srgbClr val="A4A3A4"/>
-          </p15:clr>
-        </p15:guide>
-        <p15:guide id="2" pos="2880">
-          <p15:clr>
-            <a:srgbClr val="A4A3A4"/>
-          </p15:clr>
-        </p15:guide>
-      </p15:sldGuideLst>
-    </p:ext>
-  </p:extLst>
 </p:presentation>
 </file>
 
@@ -175,9 +159,10 @@
           <a:lstStyle/>
           <a:p>
             <a:r>
-              <a:rPr lang="en-US"/>
+              <a:rPr lang="en-US" smtClean="0"/>
               <a:t>Click to edit Master title style</a:t>
             </a:r>
+            <a:endParaRPr lang="en-US"/>
           </a:p>
         </p:txBody>
       </p:sp>
@@ -293,9 +278,10 @@
           </a:lstStyle>
           <a:p>
             <a:r>
-              <a:rPr lang="en-US"/>
+              <a:rPr lang="en-US" smtClean="0"/>
               <a:t>Click to edit Master subtitle style</a:t>
             </a:r>
+            <a:endParaRPr lang="en-US"/>
           </a:p>
         </p:txBody>
       </p:sp>
@@ -316,7 +302,7 @@
           <a:p>
             <a:fld id="{5BCAD085-E8A6-8845-BD4E-CB4CCA059FC4}" type="datetimeFigureOut">
               <a:rPr lang="en-US" smtClean="0"/>
-              <a:t>7/25/26</a:t>
+              <a:t>1/27/13</a:t>
             </a:fld>
             <a:endParaRPr lang="en-US"/>
           </a:p>
@@ -410,9 +396,10 @@
           <a:lstStyle/>
           <a:p>
             <a:r>
-              <a:rPr lang="en-US"/>
+              <a:rPr lang="en-US" smtClean="0"/>
               <a:t>Click to edit Master title style</a:t>
             </a:r>
+            <a:endParaRPr lang="en-US"/>
           </a:p>
         </p:txBody>
       </p:sp>
@@ -433,37 +420,38 @@
           <a:p>
             <a:pPr lvl="0"/>
             <a:r>
-              <a:rPr lang="en-US"/>
+              <a:rPr lang="en-US" smtClean="0"/>
               <a:t>Click to edit Master text styles</a:t>
             </a:r>
           </a:p>
           <a:p>
             <a:pPr lvl="1"/>
             <a:r>
-              <a:rPr lang="en-US"/>
+              <a:rPr lang="en-US" smtClean="0"/>
               <a:t>Second level</a:t>
             </a:r>
           </a:p>
           <a:p>
             <a:pPr lvl="2"/>
             <a:r>
-              <a:rPr lang="en-US"/>
+              <a:rPr lang="en-US" smtClean="0"/>
               <a:t>Third level</a:t>
             </a:r>
           </a:p>
           <a:p>
             <a:pPr lvl="3"/>
             <a:r>
-              <a:rPr lang="en-US"/>
+              <a:rPr lang="en-US" smtClean="0"/>
               <a:t>Fourth level</a:t>
             </a:r>
           </a:p>
           <a:p>
             <a:pPr lvl="4"/>
             <a:r>
-              <a:rPr lang="en-US"/>
+              <a:rPr lang="en-US" smtClean="0"/>
               <a:t>Fifth level</a:t>
             </a:r>
+            <a:endParaRPr lang="en-US"/>
           </a:p>
         </p:txBody>
       </p:sp>
@@ -484,7 +472,7 @@
           <a:p>
             <a:fld id="{5BCAD085-E8A6-8845-BD4E-CB4CCA059FC4}" type="datetimeFigureOut">
               <a:rPr lang="en-US" smtClean="0"/>
-              <a:t>7/25/26</a:t>
+              <a:t>1/27/13</a:t>
             </a:fld>
             <a:endParaRPr lang="en-US"/>
           </a:p>
@@ -583,9 +571,10 @@
           <a:lstStyle/>
           <a:p>
             <a:r>
-              <a:rPr lang="en-US"/>
+              <a:rPr lang="en-US" smtClean="0"/>
               <a:t>Click to edit Master title style</a:t>
             </a:r>
+            <a:endParaRPr lang="en-US"/>
           </a:p>
         </p:txBody>
       </p:sp>
@@ -611,37 +600,38 @@
           <a:p>
             <a:pPr lvl="0"/>
             <a:r>
-              <a:rPr lang="en-US"/>
+              <a:rPr lang="en-US" smtClean="0"/>
               <a:t>Click to edit Master text styles</a:t>
             </a:r>
           </a:p>
           <a:p>
             <a:pPr lvl="1"/>
             <a:r>
-              <a:rPr lang="en-US"/>
+              <a:rPr lang="en-US" smtClean="0"/>
               <a:t>Second level</a:t>
             </a:r>
           </a:p>
           <a:p>
             <a:pPr lvl="2"/>
             <a:r>
-              <a:rPr lang="en-US"/>
+              <a:rPr lang="en-US" smtClean="0"/>
               <a:t>Third level</a:t>
             </a:r>
           </a:p>
           <a:p>
             <a:pPr lvl="3"/>
             <a:r>
-              <a:rPr lang="en-US"/>
+              <a:rPr lang="en-US" smtClean="0"/>
               <a:t>Fourth level</a:t>
             </a:r>
           </a:p>
           <a:p>
             <a:pPr lvl="4"/>
             <a:r>
-              <a:rPr lang="en-US"/>
+              <a:rPr lang="en-US" smtClean="0"/>
               <a:t>Fifth level</a:t>
             </a:r>
+            <a:endParaRPr lang="en-US"/>
           </a:p>
         </p:txBody>
       </p:sp>
@@ -662,7 +652,7 @@
           <a:p>
             <a:fld id="{5BCAD085-E8A6-8845-BD4E-CB4CCA059FC4}" type="datetimeFigureOut">
               <a:rPr lang="en-US" smtClean="0"/>
-              <a:t>7/25/26</a:t>
+              <a:t>1/27/13</a:t>
             </a:fld>
             <a:endParaRPr lang="en-US"/>
           </a:p>
@@ -756,9 +746,10 @@
           <a:lstStyle/>
           <a:p>
             <a:r>
-              <a:rPr lang="en-US"/>
+              <a:rPr lang="en-US" smtClean="0"/>
               <a:t>Click to edit Master title style</a:t>
             </a:r>
+            <a:endParaRPr lang="en-US"/>
           </a:p>
         </p:txBody>
       </p:sp>
@@ -779,37 +770,38 @@
           <a:p>
             <a:pPr lvl="0"/>
             <a:r>
-              <a:rPr lang="en-US"/>
+              <a:rPr lang="en-US" smtClean="0"/>
               <a:t>Click to edit Master text styles</a:t>
             </a:r>
           </a:p>
           <a:p>
             <a:pPr lvl="1"/>
             <a:r>
-              <a:rPr lang="en-US"/>
+              <a:rPr lang="en-US" smtClean="0"/>
               <a:t>Second level</a:t>
             </a:r>
           </a:p>
           <a:p>
             <a:pPr lvl="2"/>
             <a:r>
-              <a:rPr lang="en-US"/>
+              <a:rPr lang="en-US" smtClean="0"/>
               <a:t>Third level</a:t>
             </a:r>
           </a:p>
           <a:p>
             <a:pPr lvl="3"/>
             <a:r>
-              <a:rPr lang="en-US"/>
+              <a:rPr lang="en-US" smtClean="0"/>
               <a:t>Fourth level</a:t>
             </a:r>
           </a:p>
           <a:p>
             <a:pPr lvl="4"/>
             <a:r>
-              <a:rPr lang="en-US"/>
+              <a:rPr lang="en-US" smtClean="0"/>
               <a:t>Fifth level</a:t>
             </a:r>
+            <a:endParaRPr lang="en-US"/>
           </a:p>
         </p:txBody>
       </p:sp>
@@ -830,7 +822,7 @@
           <a:p>
             <a:fld id="{5BCAD085-E8A6-8845-BD4E-CB4CCA059FC4}" type="datetimeFigureOut">
               <a:rPr lang="en-US" smtClean="0"/>
-              <a:t>7/25/26</a:t>
+              <a:t>1/27/13</a:t>
             </a:fld>
             <a:endParaRPr lang="en-US"/>
           </a:p>
@@ -933,9 +925,10 @@
           </a:lstStyle>
           <a:p>
             <a:r>
-              <a:rPr lang="en-US"/>
+              <a:rPr lang="en-US" smtClean="0"/>
               <a:t>Click to edit Master title style</a:t>
             </a:r>
+            <a:endParaRPr lang="en-US"/>
           </a:p>
         </p:txBody>
       </p:sp>
@@ -1052,7 +1045,7 @@
           <a:p>
             <a:pPr lvl="0"/>
             <a:r>
-              <a:rPr lang="en-US"/>
+              <a:rPr lang="en-US" smtClean="0"/>
               <a:t>Click to edit Master text styles</a:t>
             </a:r>
           </a:p>
@@ -1075,7 +1068,7 @@
           <a:p>
             <a:fld id="{5BCAD085-E8A6-8845-BD4E-CB4CCA059FC4}" type="datetimeFigureOut">
               <a:rPr lang="en-US" smtClean="0"/>
-              <a:t>7/25/26</a:t>
+              <a:t>1/27/13</a:t>
             </a:fld>
             <a:endParaRPr lang="en-US"/>
           </a:p>
@@ -1169,9 +1162,10 @@
           <a:lstStyle/>
           <a:p>
             <a:r>
-              <a:rPr lang="en-US"/>
+              <a:rPr lang="en-US" smtClean="0"/>
               <a:t>Click to edit Master title style</a:t>
             </a:r>
+            <a:endParaRPr lang="en-US"/>
           </a:p>
         </p:txBody>
       </p:sp>
@@ -1225,37 +1219,38 @@
           <a:p>
             <a:pPr lvl="0"/>
             <a:r>
-              <a:rPr lang="en-US"/>
+              <a:rPr lang="en-US" smtClean="0"/>
               <a:t>Click to edit Master text styles</a:t>
             </a:r>
           </a:p>
           <a:p>
             <a:pPr lvl="1"/>
             <a:r>
-              <a:rPr lang="en-US"/>
+              <a:rPr lang="en-US" smtClean="0"/>
               <a:t>Second level</a:t>
             </a:r>
           </a:p>
           <a:p>
             <a:pPr lvl="2"/>
             <a:r>
-              <a:rPr lang="en-US"/>
+              <a:rPr lang="en-US" smtClean="0"/>
               <a:t>Third level</a:t>
             </a:r>
           </a:p>
           <a:p>
             <a:pPr lvl="3"/>
             <a:r>
-              <a:rPr lang="en-US"/>
+              <a:rPr lang="en-US" smtClean="0"/>
               <a:t>Fourth level</a:t>
             </a:r>
           </a:p>
           <a:p>
             <a:pPr lvl="4"/>
             <a:r>
-              <a:rPr lang="en-US"/>
+              <a:rPr lang="en-US" smtClean="0"/>
               <a:t>Fifth level</a:t>
             </a:r>
+            <a:endParaRPr lang="en-US"/>
           </a:p>
         </p:txBody>
       </p:sp>
@@ -1309,37 +1304,38 @@
           <a:p>
             <a:pPr lvl="0"/>
             <a:r>
-              <a:rPr lang="en-US"/>
+              <a:rPr lang="en-US" smtClean="0"/>
               <a:t>Click to edit Master text styles</a:t>
             </a:r>
           </a:p>
           <a:p>
             <a:pPr lvl="1"/>
             <a:r>
-              <a:rPr lang="en-US"/>
+              <a:rPr lang="en-US" smtClean="0"/>
               <a:t>Second level</a:t>
             </a:r>
           </a:p>
           <a:p>
             <a:pPr lvl="2"/>
             <a:r>
-              <a:rPr lang="en-US"/>
+              <a:rPr lang="en-US" smtClean="0"/>
               <a:t>Third level</a:t>
             </a:r>
           </a:p>
           <a:p>
             <a:pPr lvl="3"/>
             <a:r>
-              <a:rPr lang="en-US"/>
+              <a:rPr lang="en-US" smtClean="0"/>
               <a:t>Fourth level</a:t>
             </a:r>
           </a:p>
           <a:p>
             <a:pPr lvl="4"/>
             <a:r>
-              <a:rPr lang="en-US"/>
+              <a:rPr lang="en-US" smtClean="0"/>
               <a:t>Fifth level</a:t>
             </a:r>
+            <a:endParaRPr lang="en-US"/>
           </a:p>
         </p:txBody>
       </p:sp>
@@ -1360,7 +1356,7 @@
           <a:p>
             <a:fld id="{5BCAD085-E8A6-8845-BD4E-CB4CCA059FC4}" type="datetimeFigureOut">
               <a:rPr lang="en-US" smtClean="0"/>
-              <a:t>7/25/26</a:t>
+              <a:t>1/27/13</a:t>
             </a:fld>
             <a:endParaRPr lang="en-US"/>
           </a:p>
@@ -1458,9 +1454,10 @@
           </a:lstStyle>
           <a:p>
             <a:r>
-              <a:rPr lang="en-US"/>
+              <a:rPr lang="en-US" smtClean="0"/>
               <a:t>Click to edit Master title style</a:t>
             </a:r>
+            <a:endParaRPr lang="en-US"/>
           </a:p>
         </p:txBody>
       </p:sp>
@@ -1523,7 +1520,7 @@
           <a:p>
             <a:pPr lvl="0"/>
             <a:r>
-              <a:rPr lang="en-US"/>
+              <a:rPr lang="en-US" smtClean="0"/>
               <a:t>Click to edit Master text styles</a:t>
             </a:r>
           </a:p>
@@ -1579,37 +1576,38 @@
           <a:p>
             <a:pPr lvl="0"/>
             <a:r>
-              <a:rPr lang="en-US"/>
+              <a:rPr lang="en-US" smtClean="0"/>
               <a:t>Click to edit Master text styles</a:t>
             </a:r>
           </a:p>
           <a:p>
             <a:pPr lvl="1"/>
             <a:r>
-              <a:rPr lang="en-US"/>
+              <a:rPr lang="en-US" smtClean="0"/>
               <a:t>Second level</a:t>
             </a:r>
           </a:p>
           <a:p>
             <a:pPr lvl="2"/>
             <a:r>
-              <a:rPr lang="en-US"/>
+              <a:rPr lang="en-US" smtClean="0"/>
               <a:t>Third level</a:t>
             </a:r>
           </a:p>
           <a:p>
             <a:pPr lvl="3"/>
             <a:r>
-              <a:rPr lang="en-US"/>
+              <a:rPr lang="en-US" smtClean="0"/>
               <a:t>Fourth level</a:t>
             </a:r>
           </a:p>
           <a:p>
             <a:pPr lvl="4"/>
             <a:r>
-              <a:rPr lang="en-US"/>
+              <a:rPr lang="en-US" smtClean="0"/>
               <a:t>Fifth level</a:t>
             </a:r>
+            <a:endParaRPr lang="en-US"/>
           </a:p>
         </p:txBody>
       </p:sp>
@@ -1672,7 +1670,7 @@
           <a:p>
             <a:pPr lvl="0"/>
             <a:r>
-              <a:rPr lang="en-US"/>
+              <a:rPr lang="en-US" smtClean="0"/>
               <a:t>Click to edit Master text styles</a:t>
             </a:r>
           </a:p>
@@ -1728,37 +1726,38 @@
           <a:p>
             <a:pPr lvl="0"/>
             <a:r>
-              <a:rPr lang="en-US"/>
+              <a:rPr lang="en-US" smtClean="0"/>
               <a:t>Click to edit Master text styles</a:t>
             </a:r>
           </a:p>
           <a:p>
             <a:pPr lvl="1"/>
             <a:r>
-              <a:rPr lang="en-US"/>
+              <a:rPr lang="en-US" smtClean="0"/>
               <a:t>Second level</a:t>
             </a:r>
           </a:p>
           <a:p>
             <a:pPr lvl="2"/>
             <a:r>
-              <a:rPr lang="en-US"/>
+              <a:rPr lang="en-US" smtClean="0"/>
               <a:t>Third level</a:t>
             </a:r>
           </a:p>
           <a:p>
             <a:pPr lvl="3"/>
             <a:r>
-              <a:rPr lang="en-US"/>
+              <a:rPr lang="en-US" smtClean="0"/>
               <a:t>Fourth level</a:t>
             </a:r>
           </a:p>
           <a:p>
             <a:pPr lvl="4"/>
             <a:r>
-              <a:rPr lang="en-US"/>
+              <a:rPr lang="en-US" smtClean="0"/>
               <a:t>Fifth level</a:t>
             </a:r>
+            <a:endParaRPr lang="en-US"/>
           </a:p>
         </p:txBody>
       </p:sp>
@@ -1779,7 +1778,7 @@
           <a:p>
             <a:fld id="{5BCAD085-E8A6-8845-BD4E-CB4CCA059FC4}" type="datetimeFigureOut">
               <a:rPr lang="en-US" smtClean="0"/>
-              <a:t>7/25/26</a:t>
+              <a:t>1/27/13</a:t>
             </a:fld>
             <a:endParaRPr lang="en-US"/>
           </a:p>
@@ -1873,9 +1872,10 @@
           <a:lstStyle/>
           <a:p>
             <a:r>
-              <a:rPr lang="en-US"/>
+              <a:rPr lang="en-US" smtClean="0"/>
               <a:t>Click to edit Master title style</a:t>
             </a:r>
+            <a:endParaRPr lang="en-US"/>
           </a:p>
         </p:txBody>
       </p:sp>
@@ -1896,7 +1896,7 @@
           <a:p>
             <a:fld id="{5BCAD085-E8A6-8845-BD4E-CB4CCA059FC4}" type="datetimeFigureOut">
               <a:rPr lang="en-US" smtClean="0"/>
-              <a:t>7/25/26</a:t>
+              <a:t>1/27/13</a:t>
             </a:fld>
             <a:endParaRPr lang="en-US"/>
           </a:p>
@@ -1991,7 +1991,7 @@
           <a:p>
             <a:fld id="{5BCAD085-E8A6-8845-BD4E-CB4CCA059FC4}" type="datetimeFigureOut">
               <a:rPr lang="en-US" smtClean="0"/>
-              <a:t>7/25/26</a:t>
+              <a:t>1/27/13</a:t>
             </a:fld>
             <a:endParaRPr lang="en-US"/>
           </a:p>
@@ -2094,9 +2094,10 @@
           </a:lstStyle>
           <a:p>
             <a:r>
-              <a:rPr lang="en-US"/>
+              <a:rPr lang="en-US" smtClean="0"/>
               <a:t>Click to edit Master title style</a:t>
             </a:r>
+            <a:endParaRPr lang="en-US"/>
           </a:p>
         </p:txBody>
       </p:sp>
@@ -2150,37 +2151,38 @@
           <a:p>
             <a:pPr lvl="0"/>
             <a:r>
-              <a:rPr lang="en-US"/>
+              <a:rPr lang="en-US" smtClean="0"/>
               <a:t>Click to edit Master text styles</a:t>
             </a:r>
           </a:p>
           <a:p>
             <a:pPr lvl="1"/>
             <a:r>
-              <a:rPr lang="en-US"/>
+              <a:rPr lang="en-US" smtClean="0"/>
               <a:t>Second level</a:t>
             </a:r>
           </a:p>
           <a:p>
             <a:pPr lvl="2"/>
             <a:r>
-              <a:rPr lang="en-US"/>
+              <a:rPr lang="en-US" smtClean="0"/>
               <a:t>Third level</a:t>
             </a:r>
           </a:p>
           <a:p>
             <a:pPr lvl="3"/>
             <a:r>
-              <a:rPr lang="en-US"/>
+              <a:rPr lang="en-US" smtClean="0"/>
               <a:t>Fourth level</a:t>
             </a:r>
           </a:p>
           <a:p>
             <a:pPr lvl="4"/>
             <a:r>
-              <a:rPr lang="en-US"/>
+              <a:rPr lang="en-US" smtClean="0"/>
               <a:t>Fifth level</a:t>
             </a:r>
+            <a:endParaRPr lang="en-US"/>
           </a:p>
         </p:txBody>
       </p:sp>
@@ -2243,7 +2245,7 @@
           <a:p>
             <a:pPr lvl="0"/>
             <a:r>
-              <a:rPr lang="en-US"/>
+              <a:rPr lang="en-US" smtClean="0"/>
               <a:t>Click to edit Master text styles</a:t>
             </a:r>
           </a:p>
@@ -2266,7 +2268,7 @@
           <a:p>
             <a:fld id="{5BCAD085-E8A6-8845-BD4E-CB4CCA059FC4}" type="datetimeFigureOut">
               <a:rPr lang="en-US" smtClean="0"/>
-              <a:t>7/25/26</a:t>
+              <a:t>1/27/13</a:t>
             </a:fld>
             <a:endParaRPr lang="en-US"/>
           </a:p>
@@ -2369,9 +2371,10 @@
           </a:lstStyle>
           <a:p>
             <a:r>
-              <a:rPr lang="en-US"/>
+              <a:rPr lang="en-US" smtClean="0"/>
               <a:t>Click to edit Master title style</a:t>
             </a:r>
+            <a:endParaRPr lang="en-US"/>
           </a:p>
         </p:txBody>
       </p:sp>
@@ -2495,7 +2498,7 @@
           <a:p>
             <a:pPr lvl="0"/>
             <a:r>
-              <a:rPr lang="en-US"/>
+              <a:rPr lang="en-US" smtClean="0"/>
               <a:t>Click to edit Master text styles</a:t>
             </a:r>
           </a:p>
@@ -2518,7 +2521,7 @@
           <a:p>
             <a:fld id="{5BCAD085-E8A6-8845-BD4E-CB4CCA059FC4}" type="datetimeFigureOut">
               <a:rPr lang="en-US" smtClean="0"/>
-              <a:t>7/25/26</a:t>
+              <a:t>1/27/13</a:t>
             </a:fld>
             <a:endParaRPr lang="en-US"/>
           </a:p>
@@ -2627,9 +2630,10 @@
           <a:lstStyle/>
           <a:p>
             <a:r>
-              <a:rPr lang="en-US"/>
+              <a:rPr lang="en-US" smtClean="0"/>
               <a:t>Click to edit Master title style</a:t>
             </a:r>
+            <a:endParaRPr lang="en-US"/>
           </a:p>
         </p:txBody>
       </p:sp>
@@ -2660,37 +2664,38 @@
           <a:p>
             <a:pPr lvl="0"/>
             <a:r>
-              <a:rPr lang="en-US"/>
+              <a:rPr lang="en-US" smtClean="0"/>
               <a:t>Click to edit Master text styles</a:t>
             </a:r>
           </a:p>
           <a:p>
             <a:pPr lvl="1"/>
             <a:r>
-              <a:rPr lang="en-US"/>
+              <a:rPr lang="en-US" smtClean="0"/>
               <a:t>Second level</a:t>
             </a:r>
           </a:p>
           <a:p>
             <a:pPr lvl="2"/>
             <a:r>
-              <a:rPr lang="en-US"/>
+              <a:rPr lang="en-US" smtClean="0"/>
               <a:t>Third level</a:t>
             </a:r>
           </a:p>
           <a:p>
             <a:pPr lvl="3"/>
             <a:r>
-              <a:rPr lang="en-US"/>
+              <a:rPr lang="en-US" smtClean="0"/>
               <a:t>Fourth level</a:t>
             </a:r>
           </a:p>
           <a:p>
             <a:pPr lvl="4"/>
             <a:r>
-              <a:rPr lang="en-US"/>
+              <a:rPr lang="en-US" smtClean="0"/>
               <a:t>Fifth level</a:t>
             </a:r>
+            <a:endParaRPr lang="en-US"/>
           </a:p>
         </p:txBody>
       </p:sp>
@@ -2729,7 +2734,7 @@
           <a:p>
             <a:fld id="{5BCAD085-E8A6-8845-BD4E-CB4CCA059FC4}" type="datetimeFigureOut">
               <a:rPr lang="en-US" smtClean="0"/>
-              <a:t>7/25/26</a:t>
+              <a:t>1/27/13</a:t>
             </a:fld>
             <a:endParaRPr lang="en-US"/>
           </a:p>
@@ -3088,7 +3093,7 @@
 </file>
 
 <file path=ppt/slides/slide1.xml><?xml version="1.0" encoding="utf-8"?>
-<p:sld xmlns:a="http://schemas.openxmlformats.org/drawingml/2006/main" xmlns:r="http://schemas.openxmlformats.org/officeDocument/2006/relationships" xmlns:p="http://schemas.openxmlformats.org/presentationml/2006/main">
+<p:sld xmlns:a="http://schemas.openxmlformats.org/drawingml/2006/main" xmlns:p="http://schemas.openxmlformats.org/presentationml/2006/main" xmlns:r="http://schemas.openxmlformats.org/officeDocument/2006/relationships">
   <p:cSld>
     <p:spTree>
       <p:nvGrpSpPr>
@@ -3096,14 +3101,7 @@
         <p:cNvGrpSpPr/>
         <p:nvPr/>
       </p:nvGrpSpPr>
-      <p:grpSpPr>
-        <a:xfrm>
-          <a:off x="0" y="0"/>
-          <a:ext cx="0" cy="0"/>
-          <a:chOff x="0" y="0"/>
-          <a:chExt cx="0" cy="0"/>
-        </a:xfrm>
-      </p:grpSpPr>
+      <p:grpSpPr/>
       <p:sp>
         <p:nvSpPr>
           <p:cNvPr id="2" name="Rectangle 1"/>
@@ -3145,7 +3143,6 @@
           <a:lstStyle/>
           <a:p>
             <a:pPr algn="ctr"/>
-            <a:endParaRPr/>
           </a:p>
         </p:txBody>
       </p:sp>
@@ -3190,7 +3187,6 @@
           <a:lstStyle/>
           <a:p>
             <a:pPr algn="ctr"/>
-            <a:endParaRPr/>
           </a:p>
         </p:txBody>
       </p:sp>
@@ -3211,7 +3207,7 @@
           <a:noFill/>
         </p:spPr>
         <p:txBody>
-          <a:bodyPr wrap="square" lIns="0" tIns="0" rIns="0" bIns="0">
+          <a:bodyPr wrap="square" lIns="0" rIns="0" tIns="0" bIns="0">
             <a:spAutoFit/>
           </a:bodyPr>
           <a:lstStyle/>
@@ -3253,7 +3249,7 @@
           <a:noFill/>
         </p:spPr>
         <p:txBody>
-          <a:bodyPr wrap="square" lIns="0" tIns="0" rIns="0" bIns="0">
+          <a:bodyPr wrap="square" lIns="0" rIns="0" tIns="0" bIns="0">
             <a:spAutoFit/>
           </a:bodyPr>
           <a:lstStyle/>
@@ -3295,7 +3291,7 @@
           <a:noFill/>
         </p:spPr>
         <p:txBody>
-          <a:bodyPr wrap="square" lIns="0" tIns="0" rIns="0" bIns="0">
+          <a:bodyPr wrap="square" lIns="0" rIns="0" tIns="0" bIns="0">
             <a:spAutoFit/>
           </a:bodyPr>
           <a:lstStyle/>
@@ -3375,7 +3371,7 @@
           <a:noFill/>
         </p:spPr>
         <p:txBody>
-          <a:bodyPr wrap="square" lIns="0" tIns="0" rIns="0" bIns="0">
+          <a:bodyPr wrap="square" lIns="0" rIns="0" tIns="0" bIns="0">
             <a:spAutoFit/>
           </a:bodyPr>
           <a:lstStyle/>
@@ -3409,7 +3405,7 @@
 </file>
 
 <file path=ppt/slides/slide10.xml><?xml version="1.0" encoding="utf-8"?>
-<p:sld xmlns:a="http://schemas.openxmlformats.org/drawingml/2006/main" xmlns:r="http://schemas.openxmlformats.org/officeDocument/2006/relationships" xmlns:p="http://schemas.openxmlformats.org/presentationml/2006/main">
+<p:sld xmlns:a="http://schemas.openxmlformats.org/drawingml/2006/main" xmlns:p="http://schemas.openxmlformats.org/presentationml/2006/main" xmlns:r="http://schemas.openxmlformats.org/officeDocument/2006/relationships">
   <p:cSld>
     <p:spTree>
       <p:nvGrpSpPr>
@@ -3417,14 +3413,7 @@
         <p:cNvGrpSpPr/>
         <p:nvPr/>
       </p:nvGrpSpPr>
-      <p:grpSpPr>
-        <a:xfrm>
-          <a:off x="0" y="0"/>
-          <a:ext cx="0" cy="0"/>
-          <a:chOff x="0" y="0"/>
-          <a:chExt cx="0" cy="0"/>
-        </a:xfrm>
-      </p:grpSpPr>
+      <p:grpSpPr/>
       <p:sp>
         <p:nvSpPr>
           <p:cNvPr id="2" name="Rectangle 1"/>
@@ -3466,7 +3455,6 @@
           <a:lstStyle/>
           <a:p>
             <a:pPr algn="ctr"/>
-            <a:endParaRPr/>
           </a:p>
         </p:txBody>
       </p:sp>
@@ -3487,7 +3475,7 @@
           <a:noFill/>
         </p:spPr>
         <p:txBody>
-          <a:bodyPr wrap="square" lIns="0" tIns="0" rIns="0" bIns="0">
+          <a:bodyPr wrap="square" lIns="0" rIns="0" tIns="0" bIns="0">
             <a:spAutoFit/>
           </a:bodyPr>
           <a:lstStyle/>
@@ -3557,7 +3545,6 @@
           <a:lstStyle/>
           <a:p>
             <a:pPr algn="ctr"/>
-            <a:endParaRPr/>
           </a:p>
         </p:txBody>
       </p:sp>
@@ -3578,7 +3565,7 @@
           <a:noFill/>
         </p:spPr>
         <p:txBody>
-          <a:bodyPr wrap="square" lIns="0" tIns="0" rIns="0" bIns="0">
+          <a:bodyPr wrap="square" lIns="0" rIns="0" tIns="0" bIns="0">
             <a:spAutoFit/>
           </a:bodyPr>
           <a:lstStyle/>
@@ -3620,7 +3607,7 @@
           <a:noFill/>
         </p:spPr>
         <p:txBody>
-          <a:bodyPr wrap="square" lIns="0" tIns="0" rIns="0" bIns="0">
+          <a:bodyPr wrap="square" lIns="0" rIns="0" tIns="0" bIns="0">
             <a:spAutoFit/>
           </a:bodyPr>
           <a:lstStyle/>
@@ -3697,7 +3684,7 @@
                 </a:solidFill>
                 <a:latin typeface="Helvetica Neue"/>
               </a:rPr>
-              <a:t>·  Tests pass in CI</a:t>
+              <a:t>·  Proved: no memory errors (6 of 8)</a:t>
             </a:r>
           </a:p>
           <a:p>
@@ -3716,7 +3703,45 @@
                 </a:solidFill>
                 <a:latin typeface="Helvetica Neue"/>
               </a:rPr>
-              <a:t>·  Matches llama2.c output</a:t>
+              <a:t>·  Proved: the exp error bound</a:t>
+            </a:r>
+          </a:p>
+          <a:p>
+            <a:pPr algn="l">
+              <a:lnSpc>
+                <a:spcPct val="130000"/>
+              </a:lnSpc>
+              <a:spcAft>
+                <a:spcPts val="1100"/>
+              </a:spcAft>
+            </a:pPr>
+            <a:r>
+              <a:rPr sz="1300" b="0">
+                <a:solidFill>
+                  <a:srgbClr val="E8ECF1"/>
+                </a:solidFill>
+                <a:latin typeface="Helvetica Neue"/>
+              </a:rPr>
+              <a:t>·  Proved: only exact maths used</a:t>
+            </a:r>
+          </a:p>
+          <a:p>
+            <a:pPr algn="l">
+              <a:lnSpc>
+                <a:spcPct val="130000"/>
+              </a:lnSpc>
+              <a:spcAft>
+                <a:spcPts val="1100"/>
+              </a:spcAft>
+            </a:pPr>
+            <a:r>
+              <a:rPr sz="1300" b="0">
+                <a:solidFill>
+                  <a:srgbClr val="E8ECF1"/>
+                </a:solidFill>
+                <a:latin typeface="Helvetica Neue"/>
+              </a:rPr>
+              <a:t>·  All of it checked in CI</a:t>
             </a:r>
           </a:p>
         </p:txBody>
@@ -3766,7 +3791,6 @@
           <a:lstStyle/>
           <a:p>
             <a:pPr algn="ctr"/>
-            <a:endParaRPr/>
           </a:p>
         </p:txBody>
       </p:sp>
@@ -3787,7 +3811,7 @@
           <a:noFill/>
         </p:spPr>
         <p:txBody>
-          <a:bodyPr wrap="square" lIns="0" tIns="0" rIns="0" bIns="0">
+          <a:bodyPr wrap="square" lIns="0" rIns="0" tIns="0" bIns="0">
             <a:spAutoFit/>
           </a:bodyPr>
           <a:lstStyle/>
@@ -3829,7 +3853,7 @@
           <a:noFill/>
         </p:spPr>
         <p:txBody>
-          <a:bodyPr wrap="square" lIns="0" tIns="0" rIns="0" bIns="0">
+          <a:bodyPr wrap="square" lIns="0" rIns="0" tIns="0" bIns="0">
             <a:spAutoFit/>
           </a:bodyPr>
           <a:lstStyle/>
@@ -3849,7 +3873,7 @@
                 </a:solidFill>
                 <a:latin typeface="Helvetica Neue"/>
               </a:rPr>
-              <a:t>·  Prove there are no memory errors</a:t>
+              <a:t>·  Prove reproducibility (CompCert)</a:t>
             </a:r>
           </a:p>
           <a:p>
@@ -3868,26 +3892,7 @@
                 </a:solidFill>
                 <a:latin typeface="Helvetica Neue"/>
               </a:rPr>
-              <a:t>·  Prove the maths error bound</a:t>
-            </a:r>
-          </a:p>
-          <a:p>
-            <a:pPr algn="l">
-              <a:lnSpc>
-                <a:spcPct val="130000"/>
-              </a:lnSpc>
-              <a:spcAft>
-                <a:spcPts val="1100"/>
-              </a:spcAft>
-            </a:pPr>
-            <a:r>
-              <a:rPr sz="1300" b="0">
-                <a:solidFill>
-                  <a:srgbClr val="E8ECF1"/>
-                </a:solidFill>
-                <a:latin typeface="Helvetica Neue"/>
-              </a:rPr>
-              <a:t>·  Check reproducibility automatically</a:t>
+              <a:t>·  Cover the last two functions</a:t>
             </a:r>
           </a:p>
           <a:p>
@@ -3975,7 +3980,6 @@
           <a:lstStyle/>
           <a:p>
             <a:pPr algn="ctr"/>
-            <a:endParaRPr/>
           </a:p>
         </p:txBody>
       </p:sp>
@@ -3996,7 +4000,7 @@
           <a:noFill/>
         </p:spPr>
         <p:txBody>
-          <a:bodyPr wrap="square" lIns="0" tIns="0" rIns="0" bIns="0">
+          <a:bodyPr wrap="square" lIns="0" rIns="0" tIns="0" bIns="0">
             <a:spAutoFit/>
           </a:bodyPr>
           <a:lstStyle/>
@@ -4038,7 +4042,7 @@
           <a:noFill/>
         </p:spPr>
         <p:txBody>
-          <a:bodyPr wrap="square" lIns="0" tIns="0" rIns="0" bIns="0">
+          <a:bodyPr wrap="square" lIns="0" rIns="0" tIns="0" bIns="0">
             <a:spAutoFit/>
           </a:bodyPr>
           <a:lstStyle/>
@@ -4156,7 +4160,7 @@
           <a:noFill/>
         </p:spPr>
         <p:txBody>
-          <a:bodyPr wrap="square" lIns="0" tIns="0" rIns="0" bIns="0">
+          <a:bodyPr wrap="square" lIns="0" rIns="0" tIns="0" bIns="0">
             <a:spAutoFit/>
           </a:bodyPr>
           <a:lstStyle/>
@@ -4198,7 +4202,7 @@
           <a:noFill/>
         </p:spPr>
         <p:txBody>
-          <a:bodyPr wrap="square" lIns="0" tIns="0" rIns="0" bIns="0">
+          <a:bodyPr wrap="square" lIns="0" rIns="0" tIns="0" bIns="0">
             <a:spAutoFit/>
           </a:bodyPr>
           <a:lstStyle/>
@@ -4232,7 +4236,7 @@
 </file>
 
 <file path=ppt/slides/slide11.xml><?xml version="1.0" encoding="utf-8"?>
-<p:sld xmlns:a="http://schemas.openxmlformats.org/drawingml/2006/main" xmlns:r="http://schemas.openxmlformats.org/officeDocument/2006/relationships" xmlns:p="http://schemas.openxmlformats.org/presentationml/2006/main">
+<p:sld xmlns:a="http://schemas.openxmlformats.org/drawingml/2006/main" xmlns:p="http://schemas.openxmlformats.org/presentationml/2006/main" xmlns:r="http://schemas.openxmlformats.org/officeDocument/2006/relationships">
   <p:cSld>
     <p:spTree>
       <p:nvGrpSpPr>
@@ -4240,14 +4244,7 @@
         <p:cNvGrpSpPr/>
         <p:nvPr/>
       </p:nvGrpSpPr>
-      <p:grpSpPr>
-        <a:xfrm>
-          <a:off x="0" y="0"/>
-          <a:ext cx="0" cy="0"/>
-          <a:chOff x="0" y="0"/>
-          <a:chExt cx="0" cy="0"/>
-        </a:xfrm>
-      </p:grpSpPr>
+      <p:grpSpPr/>
       <p:sp>
         <p:nvSpPr>
           <p:cNvPr id="2" name="Rectangle 1"/>
@@ -4289,7 +4286,6 @@
           <a:lstStyle/>
           <a:p>
             <a:pPr algn="ctr"/>
-            <a:endParaRPr/>
           </a:p>
         </p:txBody>
       </p:sp>
@@ -4310,7 +4306,7 @@
           <a:noFill/>
         </p:spPr>
         <p:txBody>
-          <a:bodyPr wrap="square" lIns="0" tIns="0" rIns="0" bIns="0">
+          <a:bodyPr wrap="square" lIns="0" rIns="0" tIns="0" bIns="0">
             <a:spAutoFit/>
           </a:bodyPr>
           <a:lstStyle/>
@@ -4352,7 +4348,7 @@
           <a:noFill/>
         </p:spPr>
         <p:txBody>
-          <a:bodyPr wrap="square" lIns="0" tIns="0" rIns="0" bIns="0">
+          <a:bodyPr wrap="square" lIns="0" rIns="0" tIns="0" bIns="0">
             <a:spAutoFit/>
           </a:bodyPr>
           <a:lstStyle/>
@@ -4372,7 +4368,7 @@
                 </a:solidFill>
                 <a:latin typeface="Helvetica Neue"/>
               </a:rPr>
-              <a:t>Tests check some inputs. A proof covers all of them.</a:t>
+              <a:t>Tests check some inputs. A proof covers all of them. Both are now in use.</a:t>
             </a:r>
           </a:p>
         </p:txBody>
@@ -4422,7 +4418,6 @@
           <a:lstStyle/>
           <a:p>
             <a:pPr algn="ctr"/>
-            <a:endParaRPr/>
           </a:p>
         </p:txBody>
       </p:sp>
@@ -4443,7 +4438,7 @@
           <a:noFill/>
         </p:spPr>
         <p:txBody>
-          <a:bodyPr wrap="square" lIns="0" tIns="0" rIns="0" bIns="0">
+          <a:bodyPr wrap="square" lIns="0" rIns="0" tIns="0" bIns="0">
             <a:spAutoFit/>
           </a:bodyPr>
           <a:lstStyle/>
@@ -4463,7 +4458,7 @@
                 </a:solidFill>
                 <a:latin typeface="Helvetica Neue"/>
               </a:rPr>
-              <a:t>NOW</a:t>
+              <a:t>STILL TESTED ONLY</a:t>
             </a:r>
           </a:p>
         </p:txBody>
@@ -4485,7 +4480,7 @@
           <a:noFill/>
         </p:spPr>
         <p:txBody>
-          <a:bodyPr wrap="square" lIns="0" tIns="0" rIns="0" bIns="0">
+          <a:bodyPr wrap="square" lIns="0" rIns="0" tIns="0" bIns="0">
             <a:spAutoFit/>
           </a:bodyPr>
           <a:lstStyle/>
@@ -4499,13 +4494,13 @@
               </a:spcAft>
             </a:pPr>
             <a:r>
-              <a:rPr sz="1300" b="0">
+              <a:rPr sz="1250" b="0">
                 <a:solidFill>
                   <a:srgbClr val="E8ECF1"/>
                 </a:solidFill>
                 <a:latin typeface="Menlo"/>
               </a:rPr>
-              <a:t>7 systems, 1 prompt, 24 steps.</a:t>
+              <a:t>Reproducibility: 7 systems, 1 prompt.</a:t>
             </a:r>
           </a:p>
           <a:p>
@@ -4524,7 +4519,7 @@
                 </a:solidFill>
                 <a:latin typeface="Helvetica Neue"/>
               </a:rPr>
-              <a:t>A good sample.</a:t>
+              <a:t>A good sample. Still a sample.</a:t>
             </a:r>
           </a:p>
           <a:p>
@@ -4543,7 +4538,7 @@
                 </a:solidFill>
                 <a:latin typeface="Helvetica Neue"/>
               </a:rPr>
-              <a:t>Still only a sample.</a:t>
+              <a:t>CompCert would make it a proof.</a:t>
             </a:r>
           </a:p>
         </p:txBody>
@@ -4593,7 +4588,6 @@
           <a:lstStyle/>
           <a:p>
             <a:pPr algn="ctr"/>
-            <a:endParaRPr/>
           </a:p>
         </p:txBody>
       </p:sp>
@@ -4614,7 +4608,7 @@
           <a:noFill/>
         </p:spPr>
         <p:txBody>
-          <a:bodyPr wrap="square" lIns="0" tIns="0" rIns="0" bIns="0">
+          <a:bodyPr wrap="square" lIns="0" rIns="0" tIns="0" bIns="0">
             <a:spAutoFit/>
           </a:bodyPr>
           <a:lstStyle/>
@@ -4634,7 +4628,7 @@
                 </a:solidFill>
                 <a:latin typeface="Helvetica Neue"/>
               </a:rPr>
-              <a:t>GOAL</a:t>
+              <a:t>ALREADY PROVEN</a:t>
             </a:r>
           </a:p>
         </p:txBody>
@@ -4656,7 +4650,7 @@
           <a:noFill/>
         </p:spPr>
         <p:txBody>
-          <a:bodyPr wrap="square" lIns="0" tIns="0" rIns="0" bIns="0">
+          <a:bodyPr wrap="square" lIns="0" rIns="0" tIns="0" bIns="0">
             <a:spAutoFit/>
           </a:bodyPr>
           <a:lstStyle/>
@@ -4670,13 +4664,13 @@
               </a:spcAft>
             </a:pPr>
             <a:r>
-              <a:rPr sz="1300" b="0">
+              <a:rPr sz="1250" b="0">
                 <a:solidFill>
                   <a:srgbClr val="E8ECF1"/>
                 </a:solidFill>
                 <a:latin typeface="Menlo"/>
               </a:rPr>
-              <a:t>All inputs. All correct systems.</a:t>
+              <a:t>Memory safety. The exp bound.</a:t>
             </a:r>
           </a:p>
           <a:p>
@@ -4695,7 +4689,7 @@
                 </a:solidFill>
                 <a:latin typeface="Helvetica Neue"/>
               </a:rPr>
-              <a:t>Checked by machine, once.</a:t>
+              <a:t>Checked by machine, all inputs.</a:t>
             </a:r>
           </a:p>
           <a:p>
@@ -4764,7 +4758,6 @@
           <a:lstStyle/>
           <a:p>
             <a:pPr algn="ctr"/>
-            <a:endParaRPr/>
           </a:p>
         </p:txBody>
       </p:sp>
@@ -4785,7 +4778,7 @@
           <a:noFill/>
         </p:spPr>
         <p:txBody>
-          <a:bodyPr wrap="square" lIns="0" tIns="0" rIns="0" bIns="0">
+          <a:bodyPr wrap="square" lIns="0" rIns="0" tIns="0" bIns="0">
             <a:spAutoFit/>
           </a:bodyPr>
           <a:lstStyle/>
@@ -4827,7 +4820,7 @@
           <a:noFill/>
         </p:spPr>
         <p:txBody>
-          <a:bodyPr wrap="square" lIns="0" tIns="0" rIns="0" bIns="0">
+          <a:bodyPr wrap="square" lIns="0" rIns="0" tIns="0" bIns="0">
             <a:spAutoFit/>
           </a:bodyPr>
           <a:lstStyle/>
@@ -4907,7 +4900,7 @@
           <a:noFill/>
         </p:spPr>
         <p:txBody>
-          <a:bodyPr wrap="square" lIns="0" tIns="0" rIns="0" bIns="0">
+          <a:bodyPr wrap="square" lIns="0" rIns="0" tIns="0" bIns="0">
             <a:spAutoFit/>
           </a:bodyPr>
           <a:lstStyle/>
@@ -4949,7 +4942,7 @@
           <a:noFill/>
         </p:spPr>
         <p:txBody>
-          <a:bodyPr wrap="square" lIns="0" tIns="0" rIns="0" bIns="0">
+          <a:bodyPr wrap="square" lIns="0" rIns="0" tIns="0" bIns="0">
             <a:spAutoFit/>
           </a:bodyPr>
           <a:lstStyle/>
@@ -4983,7 +4976,7 @@
 </file>
 
 <file path=ppt/slides/slide12.xml><?xml version="1.0" encoding="utf-8"?>
-<p:sld xmlns:a="http://schemas.openxmlformats.org/drawingml/2006/main" xmlns:r="http://schemas.openxmlformats.org/officeDocument/2006/relationships" xmlns:p="http://schemas.openxmlformats.org/presentationml/2006/main">
+<p:sld xmlns:a="http://schemas.openxmlformats.org/drawingml/2006/main" xmlns:p="http://schemas.openxmlformats.org/presentationml/2006/main" xmlns:r="http://schemas.openxmlformats.org/officeDocument/2006/relationships">
   <p:cSld>
     <p:spTree>
       <p:nvGrpSpPr>
@@ -4991,14 +4984,7 @@
         <p:cNvGrpSpPr/>
         <p:nvPr/>
       </p:nvGrpSpPr>
-      <p:grpSpPr>
-        <a:xfrm>
-          <a:off x="0" y="0"/>
-          <a:ext cx="0" cy="0"/>
-          <a:chOff x="0" y="0"/>
-          <a:chExt cx="0" cy="0"/>
-        </a:xfrm>
-      </p:grpSpPr>
+      <p:grpSpPr/>
       <p:sp>
         <p:nvSpPr>
           <p:cNvPr id="2" name="Rectangle 1"/>
@@ -5040,7 +5026,6 @@
           <a:lstStyle/>
           <a:p>
             <a:pPr algn="ctr"/>
-            <a:endParaRPr/>
           </a:p>
         </p:txBody>
       </p:sp>
@@ -5061,7 +5046,7 @@
           <a:noFill/>
         </p:spPr>
         <p:txBody>
-          <a:bodyPr wrap="square" lIns="0" tIns="0" rIns="0" bIns="0">
+          <a:bodyPr wrap="square" lIns="0" rIns="0" tIns="0" bIns="0">
             <a:spAutoFit/>
           </a:bodyPr>
           <a:lstStyle/>
@@ -5081,7 +5066,7 @@
                 </a:solidFill>
                 <a:latin typeface="Helvetica Neue"/>
               </a:rPr>
-              <a:t>What to prove</a:t>
+              <a:t>What to prove, and what is proven</a:t>
             </a:r>
           </a:p>
         </p:txBody>
@@ -5103,7 +5088,7 @@
           <a:noFill/>
         </p:spPr>
         <p:txBody>
-          <a:bodyPr wrap="square" lIns="0" tIns="0" rIns="0" bIns="0">
+          <a:bodyPr wrap="square" lIns="0" rIns="0" tIns="0" bIns="0">
             <a:spAutoFit/>
           </a:bodyPr>
           <a:lstStyle/>
@@ -5123,7 +5108,7 @@
                 </a:solidFill>
                 <a:latin typeface="Helvetica Neue"/>
               </a:rPr>
-              <a:t>Five parts, cheapest first. Each one is a separate, checkable claim.</a:t>
+              <a:t>Run it with: make verify</a:t>
             </a:r>
           </a:p>
         </p:txBody>
@@ -5171,7 +5156,6 @@
           <a:lstStyle/>
           <a:p>
             <a:pPr algn="ctr"/>
-            <a:endParaRPr/>
           </a:p>
         </p:txBody>
       </p:sp>
@@ -5192,7 +5176,7 @@
           <a:noFill/>
         </p:spPr>
         <p:txBody>
-          <a:bodyPr wrap="square" lIns="0" tIns="0" rIns="0" bIns="0">
+          <a:bodyPr wrap="square" lIns="0" rIns="0" tIns="0" bIns="0">
             <a:spAutoFit/>
           </a:bodyPr>
           <a:lstStyle/>
@@ -5212,7 +5196,7 @@
                 </a:solidFill>
                 <a:latin typeface="Menlo"/>
               </a:rPr>
-              <a:t>S1</a:t>
+              <a:t>S2</a:t>
             </a:r>
           </a:p>
         </p:txBody>
@@ -5234,7 +5218,7 @@
           <a:noFill/>
         </p:spPr>
         <p:txBody>
-          <a:bodyPr wrap="square" lIns="0" tIns="0" rIns="0" bIns="0">
+          <a:bodyPr wrap="square" lIns="0" rIns="0" tIns="0" bIns="0">
             <a:spAutoFit/>
           </a:bodyPr>
           <a:lstStyle/>
@@ -5254,7 +5238,7 @@
                 </a:solidFill>
                 <a:latin typeface="Helvetica Neue"/>
               </a:rPr>
-              <a:t>No memory errors or crashes, for any input</a:t>
+              <a:t>Memory limit is never exceeded</a:t>
             </a:r>
           </a:p>
         </p:txBody>
@@ -5276,7 +5260,7 @@
           <a:noFill/>
         </p:spPr>
         <p:txBody>
-          <a:bodyPr wrap="square" lIns="0" tIns="0" rIns="0" bIns="0">
+          <a:bodyPr wrap="square" lIns="0" rIns="0" tIns="0" bIns="0">
             <a:spAutoFit/>
           </a:bodyPr>
           <a:lstStyle/>
@@ -5296,7 +5280,7 @@
                 </a:solidFill>
                 <a:latin typeface="Menlo"/>
               </a:rPr>
-              <a:t>Frama-C</a:t>
+              <a:t>CBMC</a:t>
             </a:r>
           </a:p>
         </p:txBody>
@@ -5318,7 +5302,7 @@
           <a:noFill/>
         </p:spPr>
         <p:txBody>
-          <a:bodyPr wrap="square" lIns="0" tIns="0" rIns="0" bIns="0">
+          <a:bodyPr wrap="square" lIns="0" rIns="0" tIns="0" bIns="0">
             <a:spAutoFit/>
           </a:bodyPr>
           <a:lstStyle/>
@@ -5338,7 +5322,7 @@
                 </a:solidFill>
                 <a:latin typeface="Helvetica Neue"/>
               </a:rPr>
-              <a:t>no proof work</a:t>
+              <a:t>DONE   3099 checks</a:t>
             </a:r>
           </a:p>
         </p:txBody>
@@ -5386,7 +5370,6 @@
           <a:lstStyle/>
           <a:p>
             <a:pPr algn="ctr"/>
-            <a:endParaRPr/>
           </a:p>
         </p:txBody>
       </p:sp>
@@ -5407,7 +5390,7 @@
           <a:noFill/>
         </p:spPr>
         <p:txBody>
-          <a:bodyPr wrap="square" lIns="0" tIns="0" rIns="0" bIns="0">
+          <a:bodyPr wrap="square" lIns="0" rIns="0" tIns="0" bIns="0">
             <a:spAutoFit/>
           </a:bodyPr>
           <a:lstStyle/>
@@ -5427,7 +5410,7 @@
                 </a:solidFill>
                 <a:latin typeface="Menlo"/>
               </a:rPr>
-              <a:t>S2</a:t>
+              <a:t>S3a</a:t>
             </a:r>
           </a:p>
         </p:txBody>
@@ -5449,7 +5432,7 @@
           <a:noFill/>
         </p:spPr>
         <p:txBody>
-          <a:bodyPr wrap="square" lIns="0" tIns="0" rIns="0" bIns="0">
+          <a:bodyPr wrap="square" lIns="0" rIns="0" tIns="0" bIns="0">
             <a:spAutoFit/>
           </a:bodyPr>
           <a:lstStyle/>
@@ -5469,7 +5452,7 @@
                 </a:solidFill>
                 <a:latin typeface="Helvetica Neue"/>
               </a:rPr>
-              <a:t>Memory use never exceeds the fixed limit</a:t>
+              <a:t>Only the exact maths operations are used</a:t>
             </a:r>
           </a:p>
         </p:txBody>
@@ -5491,7 +5474,7 @@
           <a:noFill/>
         </p:spPr>
         <p:txBody>
-          <a:bodyPr wrap="square" lIns="0" tIns="0" rIns="0" bIns="0">
+          <a:bodyPr wrap="square" lIns="0" rIns="0" tIns="0" bIns="0">
             <a:spAutoFit/>
           </a:bodyPr>
           <a:lstStyle/>
@@ -5511,7 +5494,7 @@
                 </a:solidFill>
                 <a:latin typeface="Menlo"/>
               </a:rPr>
-              <a:t>Frama-C</a:t>
+              <a:t>LLVM IR check</a:t>
             </a:r>
           </a:p>
         </p:txBody>
@@ -5533,7 +5516,7 @@
           <a:noFill/>
         </p:spPr>
         <p:txBody>
-          <a:bodyPr wrap="square" lIns="0" tIns="0" rIns="0" bIns="0">
+          <a:bodyPr wrap="square" lIns="0" rIns="0" tIns="0" bIns="0">
             <a:spAutoFit/>
           </a:bodyPr>
           <a:lstStyle/>
@@ -5553,7 +5536,7 @@
                 </a:solidFill>
                 <a:latin typeface="Helvetica Neue"/>
               </a:rPr>
-              <a:t>no proof work</a:t>
+              <a:t>DONE   5 opt levels</a:t>
             </a:r>
           </a:p>
         </p:txBody>
@@ -5601,7 +5584,6 @@
           <a:lstStyle/>
           <a:p>
             <a:pPr algn="ctr"/>
-            <a:endParaRPr/>
           </a:p>
         </p:txBody>
       </p:sp>
@@ -5622,7 +5604,7 @@
           <a:noFill/>
         </p:spPr>
         <p:txBody>
-          <a:bodyPr wrap="square" lIns="0" tIns="0" rIns="0" bIns="0">
+          <a:bodyPr wrap="square" lIns="0" rIns="0" tIns="0" bIns="0">
             <a:spAutoFit/>
           </a:bodyPr>
           <a:lstStyle/>
@@ -5642,7 +5624,7 @@
                 </a:solidFill>
                 <a:latin typeface="Menlo"/>
               </a:rPr>
-              <a:t>S3a</a:t>
+              <a:t>S4a</a:t>
             </a:r>
           </a:p>
         </p:txBody>
@@ -5664,7 +5646,7 @@
           <a:noFill/>
         </p:spPr>
         <p:txBody>
-          <a:bodyPr wrap="square" lIns="0" tIns="0" rIns="0" bIns="0">
+          <a:bodyPr wrap="square" lIns="0" rIns="0" tIns="0" bIns="0">
             <a:spAutoFit/>
           </a:bodyPr>
           <a:lstStyle/>
@@ -5684,7 +5666,7 @@
                 </a:solidFill>
                 <a:latin typeface="Helvetica Neue"/>
               </a:rPr>
-              <a:t>Only the exact maths operations are used</a:t>
+              <a:t>The exp function is within a known error</a:t>
             </a:r>
           </a:p>
         </p:txBody>
@@ -5706,7 +5688,7 @@
           <a:noFill/>
         </p:spPr>
         <p:txBody>
-          <a:bodyPr wrap="square" lIns="0" tIns="0" rIns="0" bIns="0">
+          <a:bodyPr wrap="square" lIns="0" rIns="0" tIns="0" bIns="0">
             <a:spAutoFit/>
           </a:bodyPr>
           <a:lstStyle/>
@@ -5726,7 +5708,7 @@
                 </a:solidFill>
                 <a:latin typeface="Menlo"/>
               </a:rPr>
-              <a:t>clang plugin</a:t>
+              <a:t>exhaustive</a:t>
             </a:r>
           </a:p>
         </p:txBody>
@@ -5748,7 +5730,7 @@
           <a:noFill/>
         </p:spPr>
         <p:txBody>
-          <a:bodyPr wrap="square" lIns="0" tIns="0" rIns="0" bIns="0">
+          <a:bodyPr wrap="square" lIns="0" rIns="0" tIns="0" bIns="0">
             <a:spAutoFit/>
           </a:bodyPr>
           <a:lstStyle/>
@@ -5768,7 +5750,7 @@
                 </a:solidFill>
                 <a:latin typeface="Helvetica Neue"/>
               </a:rPr>
-              <a:t>no proof work</a:t>
+              <a:t>DONE   all 2^32 inputs</a:t>
             </a:r>
           </a:p>
         </p:txBody>
@@ -5816,7 +5798,6 @@
           <a:lstStyle/>
           <a:p>
             <a:pPr algn="ctr"/>
-            <a:endParaRPr/>
           </a:p>
         </p:txBody>
       </p:sp>
@@ -5837,7 +5818,7 @@
           <a:noFill/>
         </p:spPr>
         <p:txBody>
-          <a:bodyPr wrap="square" lIns="0" tIns="0" rIns="0" bIns="0">
+          <a:bodyPr wrap="square" lIns="0" rIns="0" tIns="0" bIns="0">
             <a:spAutoFit/>
           </a:bodyPr>
           <a:lstStyle/>
@@ -5853,11 +5834,11 @@
             <a:r>
               <a:rPr sz="1300" b="1">
                 <a:solidFill>
-                  <a:srgbClr val="9B8CF0"/>
+                  <a:srgbClr val="F2B037"/>
                 </a:solidFill>
                 <a:latin typeface="Menlo"/>
               </a:rPr>
-              <a:t>S3b</a:t>
+              <a:t>S1</a:t>
             </a:r>
           </a:p>
         </p:txBody>
@@ -5879,7 +5860,7 @@
           <a:noFill/>
         </p:spPr>
         <p:txBody>
-          <a:bodyPr wrap="square" lIns="0" tIns="0" rIns="0" bIns="0">
+          <a:bodyPr wrap="square" lIns="0" rIns="0" tIns="0" bIns="0">
             <a:spAutoFit/>
           </a:bodyPr>
           <a:lstStyle/>
@@ -5899,7 +5880,7 @@
                 </a:solidFill>
                 <a:latin typeface="Helvetica Neue"/>
               </a:rPr>
-              <a:t>Output depends only on the inputs</a:t>
+              <a:t>No memory errors, for any input</a:t>
             </a:r>
           </a:p>
         </p:txBody>
@@ -5921,7 +5902,7 @@
           <a:noFill/>
         </p:spPr>
         <p:txBody>
-          <a:bodyPr wrap="square" lIns="0" tIns="0" rIns="0" bIns="0">
+          <a:bodyPr wrap="square" lIns="0" rIns="0" tIns="0" bIns="0">
             <a:spAutoFit/>
           </a:bodyPr>
           <a:lstStyle/>
@@ -5941,7 +5922,7 @@
                 </a:solidFill>
                 <a:latin typeface="Menlo"/>
               </a:rPr>
-              <a:t>CompCert</a:t>
+              <a:t>CBMC</a:t>
             </a:r>
           </a:p>
         </p:txBody>
@@ -5963,7 +5944,7 @@
           <a:noFill/>
         </p:spPr>
         <p:txBody>
-          <a:bodyPr wrap="square" lIns="0" tIns="0" rIns="0" bIns="0">
+          <a:bodyPr wrap="square" lIns="0" rIns="0" tIns="0" bIns="0">
             <a:spAutoFit/>
           </a:bodyPr>
           <a:lstStyle/>
@@ -5979,11 +5960,11 @@
             <a:r>
               <a:rPr sz="1200" b="0">
                 <a:solidFill>
-                  <a:srgbClr val="9B8CF0"/>
-                </a:solidFill>
-                <a:latin typeface="Helvetica Neue"/>
-              </a:rPr>
-              <a:t>no proof work</a:t>
+                  <a:srgbClr val="F2B037"/>
+                </a:solidFill>
+                <a:latin typeface="Helvetica Neue"/>
+              </a:rPr>
+              <a:t>6 of 8 functions</a:t>
             </a:r>
           </a:p>
         </p:txBody>
@@ -6031,7 +6012,6 @@
           <a:lstStyle/>
           <a:p>
             <a:pPr algn="ctr"/>
-            <a:endParaRPr/>
           </a:p>
         </p:txBody>
       </p:sp>
@@ -6052,7 +6032,7 @@
           <a:noFill/>
         </p:spPr>
         <p:txBody>
-          <a:bodyPr wrap="square" lIns="0" tIns="0" rIns="0" bIns="0">
+          <a:bodyPr wrap="square" lIns="0" rIns="0" tIns="0" bIns="0">
             <a:spAutoFit/>
           </a:bodyPr>
           <a:lstStyle/>
@@ -6072,7 +6052,7 @@
                 </a:solidFill>
                 <a:latin typeface="Menlo"/>
               </a:rPr>
-              <a:t>S4a</a:t>
+              <a:t>S3b</a:t>
             </a:r>
           </a:p>
         </p:txBody>
@@ -6094,7 +6074,7 @@
           <a:noFill/>
         </p:spPr>
         <p:txBody>
-          <a:bodyPr wrap="square" lIns="0" tIns="0" rIns="0" bIns="0">
+          <a:bodyPr wrap="square" lIns="0" rIns="0" tIns="0" bIns="0">
             <a:spAutoFit/>
           </a:bodyPr>
           <a:lstStyle/>
@@ -6114,7 +6094,7 @@
                 </a:solidFill>
                 <a:latin typeface="Helvetica Neue"/>
               </a:rPr>
-              <a:t>The exp function is within a known error</a:t>
+              <a:t>Output depends only on the inputs</a:t>
             </a:r>
           </a:p>
         </p:txBody>
@@ -6136,7 +6116,7 @@
           <a:noFill/>
         </p:spPr>
         <p:txBody>
-          <a:bodyPr wrap="square" lIns="0" tIns="0" rIns="0" bIns="0">
+          <a:bodyPr wrap="square" lIns="0" rIns="0" tIns="0" bIns="0">
             <a:spAutoFit/>
           </a:bodyPr>
           <a:lstStyle/>
@@ -6156,7 +6136,7 @@
                 </a:solidFill>
                 <a:latin typeface="Menlo"/>
               </a:rPr>
-              <a:t>Gappa</a:t>
+              <a:t>CompCert</a:t>
             </a:r>
           </a:p>
         </p:txBody>
@@ -6178,7 +6158,7 @@
           <a:noFill/>
         </p:spPr>
         <p:txBody>
-          <a:bodyPr wrap="square" lIns="0" tIns="0" rIns="0" bIns="0">
+          <a:bodyPr wrap="square" lIns="0" rIns="0" tIns="0" bIns="0">
             <a:spAutoFit/>
           </a:bodyPr>
           <a:lstStyle/>
@@ -6198,7 +6178,7 @@
                 </a:solidFill>
                 <a:latin typeface="Helvetica Neue"/>
               </a:rPr>
-              <a:t>proof generated</a:t>
+              <a:t>open</a:t>
             </a:r>
           </a:p>
         </p:txBody>
@@ -6246,7 +6226,6 @@
           <a:lstStyle/>
           <a:p>
             <a:pPr algn="ctr"/>
-            <a:endParaRPr/>
           </a:p>
         </p:txBody>
       </p:sp>
@@ -6267,7 +6246,7 @@
           <a:noFill/>
         </p:spPr>
         <p:txBody>
-          <a:bodyPr wrap="square" lIns="0" tIns="0" rIns="0" bIns="0">
+          <a:bodyPr wrap="square" lIns="0" rIns="0" tIns="0" bIns="0">
             <a:spAutoFit/>
           </a:bodyPr>
           <a:lstStyle/>
@@ -6283,7 +6262,7 @@
             <a:r>
               <a:rPr sz="1300" b="1">
                 <a:solidFill>
-                  <a:srgbClr val="F2B037"/>
+                  <a:srgbClr val="9B8CF0"/>
                 </a:solidFill>
                 <a:latin typeface="Menlo"/>
               </a:rPr>
@@ -6309,7 +6288,7 @@
           <a:noFill/>
         </p:spPr>
         <p:txBody>
-          <a:bodyPr wrap="square" lIns="0" tIns="0" rIns="0" bIns="0">
+          <a:bodyPr wrap="square" lIns="0" rIns="0" tIns="0" bIns="0">
             <a:spAutoFit/>
           </a:bodyPr>
           <a:lstStyle/>
@@ -6351,7 +6330,7 @@
           <a:noFill/>
         </p:spPr>
         <p:txBody>
-          <a:bodyPr wrap="square" lIns="0" tIns="0" rIns="0" bIns="0">
+          <a:bodyPr wrap="square" lIns="0" rIns="0" tIns="0" bIns="0">
             <a:spAutoFit/>
           </a:bodyPr>
           <a:lstStyle/>
@@ -6393,7 +6372,7 @@
           <a:noFill/>
         </p:spPr>
         <p:txBody>
-          <a:bodyPr wrap="square" lIns="0" tIns="0" rIns="0" bIns="0">
+          <a:bodyPr wrap="square" lIns="0" rIns="0" tIns="0" bIns="0">
             <a:spAutoFit/>
           </a:bodyPr>
           <a:lstStyle/>
@@ -6409,11 +6388,11 @@
             <a:r>
               <a:rPr sz="1200" b="0">
                 <a:solidFill>
-                  <a:srgbClr val="F2B037"/>
-                </a:solidFill>
-                <a:latin typeface="Helvetica Neue"/>
-              </a:rPr>
-              <a:t>some proof work</a:t>
+                  <a:srgbClr val="9B8CF0"/>
+                </a:solidFill>
+                <a:latin typeface="Helvetica Neue"/>
+              </a:rPr>
+              <a:t>open</a:t>
             </a:r>
           </a:p>
         </p:txBody>
@@ -6461,7 +6440,6 @@
           <a:lstStyle/>
           <a:p>
             <a:pPr algn="ctr"/>
-            <a:endParaRPr/>
           </a:p>
         </p:txBody>
       </p:sp>
@@ -6482,7 +6460,7 @@
           <a:noFill/>
         </p:spPr>
         <p:txBody>
-          <a:bodyPr wrap="square" lIns="0" tIns="0" rIns="0" bIns="0">
+          <a:bodyPr wrap="square" lIns="0" rIns="0" tIns="0" bIns="0">
             <a:spAutoFit/>
           </a:bodyPr>
           <a:lstStyle/>
@@ -6524,7 +6502,7 @@
           <a:noFill/>
         </p:spPr>
         <p:txBody>
-          <a:bodyPr wrap="square" lIns="0" tIns="0" rIns="0" bIns="0">
+          <a:bodyPr wrap="square" lIns="0" rIns="0" tIns="0" bIns="0">
             <a:spAutoFit/>
           </a:bodyPr>
           <a:lstStyle/>
@@ -6566,7 +6544,7 @@
           <a:noFill/>
         </p:spPr>
         <p:txBody>
-          <a:bodyPr wrap="square" lIns="0" tIns="0" rIns="0" bIns="0">
+          <a:bodyPr wrap="square" lIns="0" rIns="0" tIns="0" bIns="0">
             <a:spAutoFit/>
           </a:bodyPr>
           <a:lstStyle/>
@@ -6608,7 +6586,7 @@
           <a:noFill/>
         </p:spPr>
         <p:txBody>
-          <a:bodyPr wrap="square" lIns="0" tIns="0" rIns="0" bIns="0">
+          <a:bodyPr wrap="square" lIns="0" rIns="0" tIns="0" bIns="0">
             <a:spAutoFit/>
           </a:bodyPr>
           <a:lstStyle/>
@@ -6628,7 +6606,7 @@
                 </a:solidFill>
                 <a:latin typeface="Helvetica Neue"/>
               </a:rPr>
-              <a:t>proof work</a:t>
+              <a:t>open</a:t>
             </a:r>
           </a:p>
         </p:txBody>
@@ -6676,7 +6654,6 @@
           <a:lstStyle/>
           <a:p>
             <a:pPr algn="ctr"/>
-            <a:endParaRPr/>
           </a:p>
         </p:txBody>
       </p:sp>
@@ -6697,7 +6674,7 @@
           <a:noFill/>
         </p:spPr>
         <p:txBody>
-          <a:bodyPr wrap="square" lIns="0" tIns="0" rIns="0" bIns="0">
+          <a:bodyPr wrap="square" lIns="0" rIns="0" tIns="0" bIns="0">
             <a:spAutoFit/>
           </a:bodyPr>
           <a:lstStyle/>
@@ -6739,7 +6716,7 @@
           <a:noFill/>
         </p:spPr>
         <p:txBody>
-          <a:bodyPr wrap="square" lIns="0" tIns="0" rIns="0" bIns="0">
+          <a:bodyPr wrap="square" lIns="0" rIns="0" tIns="0" bIns="0">
             <a:spAutoFit/>
           </a:bodyPr>
           <a:lstStyle/>
@@ -6781,7 +6758,7 @@
           <a:noFill/>
         </p:spPr>
         <p:txBody>
-          <a:bodyPr wrap="square" lIns="0" tIns="0" rIns="0" bIns="0">
+          <a:bodyPr wrap="square" lIns="0" rIns="0" tIns="0" bIns="0">
             <a:spAutoFit/>
           </a:bodyPr>
           <a:lstStyle/>
@@ -6823,7 +6800,7 @@
           <a:noFill/>
         </p:spPr>
         <p:txBody>
-          <a:bodyPr wrap="square" lIns="0" tIns="0" rIns="0" bIns="0">
+          <a:bodyPr wrap="square" lIns="0" rIns="0" tIns="0" bIns="0">
             <a:spAutoFit/>
           </a:bodyPr>
           <a:lstStyle/>
@@ -6843,7 +6820,7 @@
                 </a:solidFill>
                 <a:latin typeface="Helvetica Neue"/>
               </a:rPr>
-              <a:t>large project</a:t>
+              <a:t>not scheduled</a:t>
             </a:r>
           </a:p>
         </p:txBody>
@@ -6865,7 +6842,7 @@
           <a:noFill/>
         </p:spPr>
         <p:txBody>
-          <a:bodyPr wrap="square" lIns="0" tIns="0" rIns="0" bIns="0">
+          <a:bodyPr wrap="square" lIns="0" rIns="0" tIns="0" bIns="0">
             <a:spAutoFit/>
           </a:bodyPr>
           <a:lstStyle/>
@@ -6885,7 +6862,7 @@
                 </a:solidFill>
                 <a:latin typeface="Helvetica Neue"/>
               </a:rPr>
-              <a:t>S1 to S4a need no hand-written proofs. Tools do the work.</a:t>
+              <a:t>9 of 9 checks pass. None of it needed a hand-written proof.</a:t>
             </a:r>
           </a:p>
         </p:txBody>
@@ -6907,7 +6884,7 @@
           <a:noFill/>
         </p:spPr>
         <p:txBody>
-          <a:bodyPr wrap="square" lIns="0" tIns="0" rIns="0" bIns="0">
+          <a:bodyPr wrap="square" lIns="0" rIns="0" tIns="0" bIns="0">
             <a:spAutoFit/>
           </a:bodyPr>
           <a:lstStyle/>
@@ -6949,7 +6926,7 @@
           <a:noFill/>
         </p:spPr>
         <p:txBody>
-          <a:bodyPr wrap="square" lIns="0" tIns="0" rIns="0" bIns="0">
+          <a:bodyPr wrap="square" lIns="0" rIns="0" tIns="0" bIns="0">
             <a:spAutoFit/>
           </a:bodyPr>
           <a:lstStyle/>
@@ -6983,7 +6960,7 @@
 </file>
 
 <file path=ppt/slides/slide13.xml><?xml version="1.0" encoding="utf-8"?>
-<p:sld xmlns:a="http://schemas.openxmlformats.org/drawingml/2006/main" xmlns:r="http://schemas.openxmlformats.org/officeDocument/2006/relationships" xmlns:p="http://schemas.openxmlformats.org/presentationml/2006/main">
+<p:sld xmlns:a="http://schemas.openxmlformats.org/drawingml/2006/main" xmlns:p="http://schemas.openxmlformats.org/presentationml/2006/main" xmlns:r="http://schemas.openxmlformats.org/officeDocument/2006/relationships">
   <p:cSld>
     <p:spTree>
       <p:nvGrpSpPr>
@@ -6991,14 +6968,7 @@
         <p:cNvGrpSpPr/>
         <p:nvPr/>
       </p:nvGrpSpPr>
-      <p:grpSpPr>
-        <a:xfrm>
-          <a:off x="0" y="0"/>
-          <a:ext cx="0" cy="0"/>
-          <a:chOff x="0" y="0"/>
-          <a:chExt cx="0" cy="0"/>
-        </a:xfrm>
-      </p:grpSpPr>
+      <p:grpSpPr/>
       <p:sp>
         <p:nvSpPr>
           <p:cNvPr id="2" name="Rectangle 1"/>
@@ -7040,7 +7010,6 @@
           <a:lstStyle/>
           <a:p>
             <a:pPr algn="ctr"/>
-            <a:endParaRPr/>
           </a:p>
         </p:txBody>
       </p:sp>
@@ -7061,7 +7030,7 @@
           <a:noFill/>
         </p:spPr>
         <p:txBody>
-          <a:bodyPr wrap="square" lIns="0" tIns="0" rIns="0" bIns="0">
+          <a:bodyPr wrap="square" lIns="0" rIns="0" tIns="0" bIns="0">
             <a:spAutoFit/>
           </a:bodyPr>
           <a:lstStyle/>
@@ -7103,7 +7072,7 @@
           <a:noFill/>
         </p:spPr>
         <p:txBody>
-          <a:bodyPr wrap="square" lIns="0" tIns="0" rIns="0" bIns="0">
+          <a:bodyPr wrap="square" lIns="0" rIns="0" tIns="0" bIns="0">
             <a:spAutoFit/>
           </a:bodyPr>
           <a:lstStyle/>
@@ -7171,7 +7140,6 @@
           <a:lstStyle/>
           <a:p>
             <a:pPr algn="ctr"/>
-            <a:endParaRPr/>
           </a:p>
         </p:txBody>
       </p:sp>
@@ -7218,7 +7186,6 @@
           <a:lstStyle/>
           <a:p>
             <a:pPr algn="ctr"/>
-            <a:endParaRPr/>
           </a:p>
         </p:txBody>
       </p:sp>
@@ -7239,7 +7206,7 @@
           <a:noFill/>
         </p:spPr>
         <p:txBody>
-          <a:bodyPr wrap="square" lIns="0" tIns="0" rIns="0" bIns="0">
+          <a:bodyPr wrap="square" lIns="0" rIns="0" tIns="0" bIns="0">
             <a:spAutoFit/>
           </a:bodyPr>
           <a:lstStyle/>
@@ -7281,7 +7248,7 @@
           <a:noFill/>
         </p:spPr>
         <p:txBody>
-          <a:bodyPr wrap="square" lIns="0" tIns="0" rIns="0" bIns="0">
+          <a:bodyPr wrap="square" lIns="0" rIns="0" tIns="0" bIns="0">
             <a:spAutoFit/>
           </a:bodyPr>
           <a:lstStyle/>
@@ -7323,7 +7290,7 @@
           <a:noFill/>
         </p:spPr>
         <p:txBody>
-          <a:bodyPr wrap="square" lIns="0" tIns="0" rIns="0" bIns="0">
+          <a:bodyPr wrap="square" lIns="0" rIns="0" tIns="0" bIns="0">
             <a:spAutoFit/>
           </a:bodyPr>
           <a:lstStyle/>
@@ -7343,7 +7310,7 @@
                 </a:solidFill>
                 <a:latin typeface="Menlo"/>
               </a:rPr>
-              <a:t>3 days</a:t>
+              <a:t>done</a:t>
             </a:r>
           </a:p>
         </p:txBody>
@@ -7365,7 +7332,7 @@
           <a:noFill/>
         </p:spPr>
         <p:txBody>
-          <a:bodyPr wrap="square" lIns="0" tIns="0" rIns="0" bIns="0">
+          <a:bodyPr wrap="square" lIns="0" rIns="0" tIns="0" bIns="0">
             <a:spAutoFit/>
           </a:bodyPr>
           <a:lstStyle/>
@@ -7385,7 +7352,7 @@
                 </a:solidFill>
                 <a:latin typeface="Helvetica Neue"/>
               </a:rPr>
-              <a:t>find problems early</a:t>
+              <a:t>no problems found</a:t>
             </a:r>
           </a:p>
         </p:txBody>
@@ -7433,7 +7400,6 @@
           <a:lstStyle/>
           <a:p>
             <a:pPr algn="ctr"/>
-            <a:endParaRPr/>
           </a:p>
         </p:txBody>
       </p:sp>
@@ -7480,7 +7446,6 @@
           <a:lstStyle/>
           <a:p>
             <a:pPr algn="ctr"/>
-            <a:endParaRPr/>
           </a:p>
         </p:txBody>
       </p:sp>
@@ -7501,7 +7466,7 @@
           <a:noFill/>
         </p:spPr>
         <p:txBody>
-          <a:bodyPr wrap="square" lIns="0" tIns="0" rIns="0" bIns="0">
+          <a:bodyPr wrap="square" lIns="0" rIns="0" tIns="0" bIns="0">
             <a:spAutoFit/>
           </a:bodyPr>
           <a:lstStyle/>
@@ -7543,7 +7508,7 @@
           <a:noFill/>
         </p:spPr>
         <p:txBody>
-          <a:bodyPr wrap="square" lIns="0" tIns="0" rIns="0" bIns="0">
+          <a:bodyPr wrap="square" lIns="0" rIns="0" tIns="0" bIns="0">
             <a:spAutoFit/>
           </a:bodyPr>
           <a:lstStyle/>
@@ -7585,7 +7550,7 @@
           <a:noFill/>
         </p:spPr>
         <p:txBody>
-          <a:bodyPr wrap="square" lIns="0" tIns="0" rIns="0" bIns="0">
+          <a:bodyPr wrap="square" lIns="0" rIns="0" tIns="0" bIns="0">
             <a:spAutoFit/>
           </a:bodyPr>
           <a:lstStyle/>
@@ -7605,7 +7570,7 @@
                 </a:solidFill>
                 <a:latin typeface="Menlo"/>
               </a:rPr>
-              <a:t>3-6 weeks</a:t>
+              <a:t>done</a:t>
             </a:r>
           </a:p>
         </p:txBody>
@@ -7627,7 +7592,7 @@
           <a:noFill/>
         </p:spPr>
         <p:txBody>
-          <a:bodyPr wrap="square" lIns="0" tIns="0" rIns="0" bIns="0">
+          <a:bodyPr wrap="square" lIns="0" rIns="0" tIns="0" bIns="0">
             <a:spAutoFit/>
           </a:bodyPr>
           <a:lstStyle/>
@@ -7647,7 +7612,7 @@
                 </a:solidFill>
                 <a:latin typeface="Helvetica Neue"/>
               </a:rPr>
-              <a:t>no crashes, any input</a:t>
+              <a:t>S2 complete, S1 6 of 8</a:t>
             </a:r>
           </a:p>
         </p:txBody>
@@ -7695,7 +7660,6 @@
           <a:lstStyle/>
           <a:p>
             <a:pPr algn="ctr"/>
-            <a:endParaRPr/>
           </a:p>
         </p:txBody>
       </p:sp>
@@ -7742,7 +7706,6 @@
           <a:lstStyle/>
           <a:p>
             <a:pPr algn="ctr"/>
-            <a:endParaRPr/>
           </a:p>
         </p:txBody>
       </p:sp>
@@ -7763,7 +7726,7 @@
           <a:noFill/>
         </p:spPr>
         <p:txBody>
-          <a:bodyPr wrap="square" lIns="0" tIns="0" rIns="0" bIns="0">
+          <a:bodyPr wrap="square" lIns="0" rIns="0" tIns="0" bIns="0">
             <a:spAutoFit/>
           </a:bodyPr>
           <a:lstStyle/>
@@ -7805,7 +7768,7 @@
           <a:noFill/>
         </p:spPr>
         <p:txBody>
-          <a:bodyPr wrap="square" lIns="0" tIns="0" rIns="0" bIns="0">
+          <a:bodyPr wrap="square" lIns="0" rIns="0" tIns="0" bIns="0">
             <a:spAutoFit/>
           </a:bodyPr>
           <a:lstStyle/>
@@ -7847,7 +7810,7 @@
           <a:noFill/>
         </p:spPr>
         <p:txBody>
-          <a:bodyPr wrap="square" lIns="0" tIns="0" rIns="0" bIns="0">
+          <a:bodyPr wrap="square" lIns="0" rIns="0" tIns="0" bIns="0">
             <a:spAutoFit/>
           </a:bodyPr>
           <a:lstStyle/>
@@ -7867,7 +7830,7 @@
                 </a:solidFill>
                 <a:latin typeface="Menlo"/>
               </a:rPr>
-              <a:t>1 week</a:t>
+              <a:t>done</a:t>
             </a:r>
           </a:p>
         </p:txBody>
@@ -7889,7 +7852,7 @@
           <a:noFill/>
         </p:spPr>
         <p:txBody>
-          <a:bodyPr wrap="square" lIns="0" tIns="0" rIns="0" bIns="0">
+          <a:bodyPr wrap="square" lIns="0" rIns="0" tIns="0" bIns="0">
             <a:spAutoFit/>
           </a:bodyPr>
           <a:lstStyle/>
@@ -7909,7 +7872,7 @@
                 </a:solidFill>
                 <a:latin typeface="Helvetica Neue"/>
               </a:rPr>
-              <a:t>checked automatically</a:t>
+              <a:t>runs at 5 opt levels</a:t>
             </a:r>
           </a:p>
         </p:txBody>
@@ -7957,7 +7920,6 @@
           <a:lstStyle/>
           <a:p>
             <a:pPr algn="ctr"/>
-            <a:endParaRPr/>
           </a:p>
         </p:txBody>
       </p:sp>
@@ -7970,6 +7932,266 @@
         <p:spPr>
           <a:xfrm>
             <a:off x="914400" y="3392424"/>
+            <a:ext cx="310896" cy="310896"/>
+          </a:xfrm>
+          <a:prstGeom prst="roundRect">
+            <a:avLst>
+              <a:gd name="adj" fmla="val 6000"/>
+            </a:avLst>
+          </a:prstGeom>
+          <a:solidFill>
+            <a:srgbClr val="36D3C4"/>
+          </a:solidFill>
+          <a:ln>
+            <a:noFill/>
+          </a:ln>
+          <a:effectLst/>
+        </p:spPr>
+        <p:style>
+          <a:lnRef idx="1">
+            <a:schemeClr val="accent1"/>
+          </a:lnRef>
+          <a:fillRef idx="3">
+            <a:schemeClr val="accent1"/>
+          </a:fillRef>
+          <a:effectRef idx="2">
+            <a:schemeClr val="accent1"/>
+          </a:effectRef>
+          <a:fontRef idx="minor">
+            <a:schemeClr val="lt1"/>
+          </a:fontRef>
+        </p:style>
+        <p:txBody>
+          <a:bodyPr rtlCol="0" anchor="ctr"/>
+          <a:lstStyle/>
+          <a:p>
+            <a:pPr algn="ctr"/>
+          </a:p>
+        </p:txBody>
+      </p:sp>
+      <p:sp>
+        <p:nvSpPr>
+          <p:cNvPr id="25" name="TextBox 24"/>
+          <p:cNvSpPr txBox="1"/>
+          <p:nvPr/>
+        </p:nvSpPr>
+        <p:spPr>
+          <a:xfrm>
+            <a:off x="914400" y="3429000"/>
+            <a:ext cx="310896" cy="274320"/>
+          </a:xfrm>
+          <a:prstGeom prst="rect">
+            <a:avLst/>
+          </a:prstGeom>
+          <a:noFill/>
+        </p:spPr>
+        <p:txBody>
+          <a:bodyPr wrap="square" lIns="0" rIns="0" tIns="0" bIns="0">
+            <a:spAutoFit/>
+          </a:bodyPr>
+          <a:lstStyle/>
+          <a:p>
+            <a:pPr algn="ctr">
+              <a:lnSpc>
+                <a:spcPct val="125000"/>
+              </a:lnSpc>
+              <a:spcAft>
+                <a:spcPts val="600"/>
+              </a:spcAft>
+            </a:pPr>
+            <a:r>
+              <a:rPr sz="1300" b="1">
+                <a:solidFill>
+                  <a:srgbClr val="11161D"/>
+                </a:solidFill>
+                <a:latin typeface="Helvetica Neue"/>
+              </a:rPr>
+              <a:t>3</a:t>
+            </a:r>
+          </a:p>
+        </p:txBody>
+      </p:sp>
+      <p:sp>
+        <p:nvSpPr>
+          <p:cNvPr id="26" name="TextBox 25"/>
+          <p:cNvSpPr txBox="1"/>
+          <p:nvPr/>
+        </p:nvSpPr>
+        <p:spPr>
+          <a:xfrm>
+            <a:off x="1417320" y="3429000"/>
+            <a:ext cx="4754880" cy="274320"/>
+          </a:xfrm>
+          <a:prstGeom prst="rect">
+            <a:avLst/>
+          </a:prstGeom>
+          <a:noFill/>
+        </p:spPr>
+        <p:txBody>
+          <a:bodyPr wrap="square" lIns="0" rIns="0" tIns="0" bIns="0">
+            <a:spAutoFit/>
+          </a:bodyPr>
+          <a:lstStyle/>
+          <a:p>
+            <a:pPr algn="l">
+              <a:lnSpc>
+                <a:spcPct val="125000"/>
+              </a:lnSpc>
+              <a:spcAft>
+                <a:spcPts val="600"/>
+              </a:spcAft>
+            </a:pPr>
+            <a:r>
+              <a:rPr sz="1300" b="0">
+                <a:solidFill>
+                  <a:srgbClr val="E8ECF1"/>
+                </a:solidFill>
+                <a:latin typeface="Helvetica Neue"/>
+              </a:rPr>
+              <a:t>Prove the exp error bound (S4a)</a:t>
+            </a:r>
+          </a:p>
+        </p:txBody>
+      </p:sp>
+      <p:sp>
+        <p:nvSpPr>
+          <p:cNvPr id="27" name="TextBox 26"/>
+          <p:cNvSpPr txBox="1"/>
+          <p:nvPr/>
+        </p:nvSpPr>
+        <p:spPr>
+          <a:xfrm>
+            <a:off x="6309360" y="3429000"/>
+            <a:ext cx="1463040" cy="274320"/>
+          </a:xfrm>
+          <a:prstGeom prst="rect">
+            <a:avLst/>
+          </a:prstGeom>
+          <a:noFill/>
+        </p:spPr>
+        <p:txBody>
+          <a:bodyPr wrap="square" lIns="0" rIns="0" tIns="0" bIns="0">
+            <a:spAutoFit/>
+          </a:bodyPr>
+          <a:lstStyle/>
+          <a:p>
+            <a:pPr algn="l">
+              <a:lnSpc>
+                <a:spcPct val="125000"/>
+              </a:lnSpc>
+              <a:spcAft>
+                <a:spcPts val="600"/>
+              </a:spcAft>
+            </a:pPr>
+            <a:r>
+              <a:rPr sz="1200" b="0">
+                <a:solidFill>
+                  <a:srgbClr val="8B99A8"/>
+                </a:solidFill>
+                <a:latin typeface="Menlo"/>
+              </a:rPr>
+              <a:t>done</a:t>
+            </a:r>
+          </a:p>
+        </p:txBody>
+      </p:sp>
+      <p:sp>
+        <p:nvSpPr>
+          <p:cNvPr id="28" name="TextBox 27"/>
+          <p:cNvSpPr txBox="1"/>
+          <p:nvPr/>
+        </p:nvSpPr>
+        <p:spPr>
+          <a:xfrm>
+            <a:off x="7955279" y="3429000"/>
+            <a:ext cx="3291840" cy="274320"/>
+          </a:xfrm>
+          <a:prstGeom prst="rect">
+            <a:avLst/>
+          </a:prstGeom>
+          <a:noFill/>
+        </p:spPr>
+        <p:txBody>
+          <a:bodyPr wrap="square" lIns="0" rIns="0" tIns="0" bIns="0">
+            <a:spAutoFit/>
+          </a:bodyPr>
+          <a:lstStyle/>
+          <a:p>
+            <a:pPr algn="l">
+              <a:lnSpc>
+                <a:spcPct val="125000"/>
+              </a:lnSpc>
+              <a:spcAft>
+                <a:spcPts val="600"/>
+              </a:spcAft>
+            </a:pPr>
+            <a:r>
+              <a:rPr sz="1200" b="0">
+                <a:solidFill>
+                  <a:srgbClr val="36D3C4"/>
+                </a:solidFill>
+                <a:latin typeface="Helvetica Neue"/>
+              </a:rPr>
+              <a:t>all 2^32 inputs, 3.4 s</a:t>
+            </a:r>
+          </a:p>
+        </p:txBody>
+      </p:sp>
+      <p:sp>
+        <p:nvSpPr>
+          <p:cNvPr id="29" name="Rounded Rectangle 28"/>
+          <p:cNvSpPr/>
+          <p:nvPr/>
+        </p:nvSpPr>
+        <p:spPr>
+          <a:xfrm>
+            <a:off x="777240" y="3831336"/>
+            <a:ext cx="10607040" cy="457200"/>
+          </a:xfrm>
+          <a:prstGeom prst="roundRect">
+            <a:avLst>
+              <a:gd name="adj" fmla="val 6000"/>
+            </a:avLst>
+          </a:prstGeom>
+          <a:solidFill>
+            <a:srgbClr val="1A212B"/>
+          </a:solidFill>
+          <a:ln>
+            <a:noFill/>
+          </a:ln>
+          <a:effectLst/>
+        </p:spPr>
+        <p:style>
+          <a:lnRef idx="1">
+            <a:schemeClr val="accent1"/>
+          </a:lnRef>
+          <a:fillRef idx="3">
+            <a:schemeClr val="accent1"/>
+          </a:fillRef>
+          <a:effectRef idx="2">
+            <a:schemeClr val="accent1"/>
+          </a:effectRef>
+          <a:fontRef idx="minor">
+            <a:schemeClr val="lt1"/>
+          </a:fontRef>
+        </p:style>
+        <p:txBody>
+          <a:bodyPr rtlCol="0" anchor="ctr"/>
+          <a:lstStyle/>
+          <a:p>
+            <a:pPr algn="ctr"/>
+          </a:p>
+        </p:txBody>
+      </p:sp>
+      <p:sp>
+        <p:nvSpPr>
+          <p:cNvPr id="30" name="Rounded Rectangle 29"/>
+          <p:cNvSpPr/>
+          <p:nvPr/>
+        </p:nvSpPr>
+        <p:spPr>
+          <a:xfrm>
+            <a:off x="914400" y="3904488"/>
             <a:ext cx="310896" cy="310896"/>
           </a:xfrm>
           <a:prstGeom prst="roundRect">
@@ -8004,19 +8226,18 @@
           <a:lstStyle/>
           <a:p>
             <a:pPr algn="ctr"/>
-            <a:endParaRPr/>
-          </a:p>
-        </p:txBody>
-      </p:sp>
-      <p:sp>
-        <p:nvSpPr>
-          <p:cNvPr id="25" name="TextBox 24"/>
-          <p:cNvSpPr txBox="1"/>
-          <p:nvPr/>
-        </p:nvSpPr>
-        <p:spPr>
-          <a:xfrm>
-            <a:off x="914400" y="3429000"/>
+          </a:p>
+        </p:txBody>
+      </p:sp>
+      <p:sp>
+        <p:nvSpPr>
+          <p:cNvPr id="31" name="TextBox 30"/>
+          <p:cNvSpPr txBox="1"/>
+          <p:nvPr/>
+        </p:nvSpPr>
+        <p:spPr>
+          <a:xfrm>
+            <a:off x="914400" y="3941064"/>
             <a:ext cx="310896" cy="274320"/>
           </a:xfrm>
           <a:prstGeom prst="rect">
@@ -8025,7 +8246,7 @@
           <a:noFill/>
         </p:spPr>
         <p:txBody>
-          <a:bodyPr wrap="square" lIns="0" tIns="0" rIns="0" bIns="0">
+          <a:bodyPr wrap="square" lIns="0" rIns="0" tIns="0" bIns="0">
             <a:spAutoFit/>
           </a:bodyPr>
           <a:lstStyle/>
@@ -8045,20 +8266,20 @@
                 </a:solidFill>
                 <a:latin typeface="Helvetica Neue"/>
               </a:rPr>
-              <a:t>3</a:t>
-            </a:r>
-          </a:p>
-        </p:txBody>
-      </p:sp>
-      <p:sp>
-        <p:nvSpPr>
-          <p:cNvPr id="26" name="TextBox 25"/>
-          <p:cNvSpPr txBox="1"/>
-          <p:nvPr/>
-        </p:nvSpPr>
-        <p:spPr>
-          <a:xfrm>
-            <a:off x="1417320" y="3429000"/>
+              <a:t>4</a:t>
+            </a:r>
+          </a:p>
+        </p:txBody>
+      </p:sp>
+      <p:sp>
+        <p:nvSpPr>
+          <p:cNvPr id="32" name="TextBox 31"/>
+          <p:cNvSpPr txBox="1"/>
+          <p:nvPr/>
+        </p:nvSpPr>
+        <p:spPr>
+          <a:xfrm>
+            <a:off x="1417320" y="3941064"/>
             <a:ext cx="4754880" cy="274320"/>
           </a:xfrm>
           <a:prstGeom prst="rect">
@@ -8067,7 +8288,7 @@
           <a:noFill/>
         </p:spPr>
         <p:txBody>
-          <a:bodyPr wrap="square" lIns="0" tIns="0" rIns="0" bIns="0">
+          <a:bodyPr wrap="square" lIns="0" rIns="0" tIns="0" bIns="0">
             <a:spAutoFit/>
           </a:bodyPr>
           <a:lstStyle/>
@@ -8087,20 +8308,20 @@
                 </a:solidFill>
                 <a:latin typeface="Helvetica Neue"/>
               </a:rPr>
-              <a:t>Prove the exp error bound (S4a)</a:t>
-            </a:r>
-          </a:p>
-        </p:txBody>
-      </p:sp>
-      <p:sp>
-        <p:nvSpPr>
-          <p:cNvPr id="27" name="TextBox 26"/>
-          <p:cNvSpPr txBox="1"/>
-          <p:nvPr/>
-        </p:nvSpPr>
-        <p:spPr>
-          <a:xfrm>
-            <a:off x="6309360" y="3429000"/>
+              <a:t>Build with CompCert (S3b)</a:t>
+            </a:r>
+          </a:p>
+        </p:txBody>
+      </p:sp>
+      <p:sp>
+        <p:nvSpPr>
+          <p:cNvPr id="33" name="TextBox 32"/>
+          <p:cNvSpPr txBox="1"/>
+          <p:nvPr/>
+        </p:nvSpPr>
+        <p:spPr>
+          <a:xfrm>
+            <a:off x="6309360" y="3941064"/>
             <a:ext cx="1463040" cy="274320"/>
           </a:xfrm>
           <a:prstGeom prst="rect">
@@ -8109,7 +8330,7 @@
           <a:noFill/>
         </p:spPr>
         <p:txBody>
-          <a:bodyPr wrap="square" lIns="0" tIns="0" rIns="0" bIns="0">
+          <a:bodyPr wrap="square" lIns="0" rIns="0" tIns="0" bIns="0">
             <a:spAutoFit/>
           </a:bodyPr>
           <a:lstStyle/>
@@ -8136,13 +8357,13 @@
       </p:sp>
       <p:sp>
         <p:nvSpPr>
-          <p:cNvPr id="28" name="TextBox 27"/>
-          <p:cNvSpPr txBox="1"/>
-          <p:nvPr/>
-        </p:nvSpPr>
-        <p:spPr>
-          <a:xfrm>
-            <a:off x="7955279" y="3429000"/>
+          <p:cNvPr id="34" name="TextBox 33"/>
+          <p:cNvSpPr txBox="1"/>
+          <p:nvPr/>
+        </p:nvSpPr>
+        <p:spPr>
+          <a:xfrm>
+            <a:off x="7955279" y="3941064"/>
             <a:ext cx="3291840" cy="274320"/>
           </a:xfrm>
           <a:prstGeom prst="rect">
@@ -8151,7 +8372,7 @@
           <a:noFill/>
         </p:spPr>
         <p:txBody>
-          <a:bodyPr wrap="square" lIns="0" tIns="0" rIns="0" bIns="0">
+          <a:bodyPr wrap="square" lIns="0" rIns="0" tIns="0" bIns="0">
             <a:spAutoFit/>
           </a:bodyPr>
           <a:lstStyle/>
@@ -8171,20 +8392,20 @@
                 </a:solidFill>
                 <a:latin typeface="Helvetica Neue"/>
               </a:rPr>
-              <a:t>known maths error</a:t>
-            </a:r>
-          </a:p>
-        </p:txBody>
-      </p:sp>
-      <p:sp>
-        <p:nvSpPr>
-          <p:cNvPr id="29" name="Rounded Rectangle 28"/>
+              <a:t>REPRODUCIBILITY PROVEN</a:t>
+            </a:r>
+          </a:p>
+        </p:txBody>
+      </p:sp>
+      <p:sp>
+        <p:nvSpPr>
+          <p:cNvPr id="35" name="Rounded Rectangle 34"/>
           <p:cNvSpPr/>
           <p:nvPr/>
         </p:nvSpPr>
         <p:spPr>
           <a:xfrm>
-            <a:off x="777240" y="3831336"/>
+            <a:off x="777240" y="4343400"/>
             <a:ext cx="10607040" cy="457200"/>
           </a:xfrm>
           <a:prstGeom prst="roundRect">
@@ -8219,19 +8440,18 @@
           <a:lstStyle/>
           <a:p>
             <a:pPr algn="ctr"/>
-            <a:endParaRPr/>
-          </a:p>
-        </p:txBody>
-      </p:sp>
-      <p:sp>
-        <p:nvSpPr>
-          <p:cNvPr id="30" name="Rounded Rectangle 29"/>
+          </a:p>
+        </p:txBody>
+      </p:sp>
+      <p:sp>
+        <p:nvSpPr>
+          <p:cNvPr id="36" name="Rounded Rectangle 35"/>
           <p:cNvSpPr/>
           <p:nvPr/>
         </p:nvSpPr>
         <p:spPr>
           <a:xfrm>
-            <a:off x="914400" y="3904488"/>
+            <a:off x="914400" y="4416552"/>
             <a:ext cx="310896" cy="310896"/>
           </a:xfrm>
           <a:prstGeom prst="roundRect">
@@ -8266,19 +8486,18 @@
           <a:lstStyle/>
           <a:p>
             <a:pPr algn="ctr"/>
-            <a:endParaRPr/>
-          </a:p>
-        </p:txBody>
-      </p:sp>
-      <p:sp>
-        <p:nvSpPr>
-          <p:cNvPr id="31" name="TextBox 30"/>
-          <p:cNvSpPr txBox="1"/>
-          <p:nvPr/>
-        </p:nvSpPr>
-        <p:spPr>
-          <a:xfrm>
-            <a:off x="914400" y="3941064"/>
+          </a:p>
+        </p:txBody>
+      </p:sp>
+      <p:sp>
+        <p:nvSpPr>
+          <p:cNvPr id="37" name="TextBox 36"/>
+          <p:cNvSpPr txBox="1"/>
+          <p:nvPr/>
+        </p:nvSpPr>
+        <p:spPr>
+          <a:xfrm>
+            <a:off x="914400" y="4453128"/>
             <a:ext cx="310896" cy="274320"/>
           </a:xfrm>
           <a:prstGeom prst="rect">
@@ -8287,7 +8506,7 @@
           <a:noFill/>
         </p:spPr>
         <p:txBody>
-          <a:bodyPr wrap="square" lIns="0" tIns="0" rIns="0" bIns="0">
+          <a:bodyPr wrap="square" lIns="0" rIns="0" tIns="0" bIns="0">
             <a:spAutoFit/>
           </a:bodyPr>
           <a:lstStyle/>
@@ -8307,20 +8526,20 @@
                 </a:solidFill>
                 <a:latin typeface="Helvetica Neue"/>
               </a:rPr>
-              <a:t>4</a:t>
-            </a:r>
-          </a:p>
-        </p:txBody>
-      </p:sp>
-      <p:sp>
-        <p:nvSpPr>
-          <p:cNvPr id="32" name="TextBox 31"/>
-          <p:cNvSpPr txBox="1"/>
-          <p:nvPr/>
-        </p:nvSpPr>
-        <p:spPr>
-          <a:xfrm>
-            <a:off x="1417320" y="3941064"/>
+              <a:t>5</a:t>
+            </a:r>
+          </a:p>
+        </p:txBody>
+      </p:sp>
+      <p:sp>
+        <p:nvSpPr>
+          <p:cNvPr id="38" name="TextBox 37"/>
+          <p:cNvSpPr txBox="1"/>
+          <p:nvPr/>
+        </p:nvSpPr>
+        <p:spPr>
+          <a:xfrm>
+            <a:off x="1417320" y="4453128"/>
             <a:ext cx="4754880" cy="274320"/>
           </a:xfrm>
           <a:prstGeom prst="rect">
@@ -8329,7 +8548,7 @@
           <a:noFill/>
         </p:spPr>
         <p:txBody>
-          <a:bodyPr wrap="square" lIns="0" tIns="0" rIns="0" bIns="0">
+          <a:bodyPr wrap="square" lIns="0" rIns="0" tIns="0" bIns="0">
             <a:spAutoFit/>
           </a:bodyPr>
           <a:lstStyle/>
@@ -8349,20 +8568,20 @@
                 </a:solidFill>
                 <a:latin typeface="Helvetica Neue"/>
               </a:rPr>
-              <a:t>Prove the matrix multiply bound (S4b)</a:t>
-            </a:r>
-          </a:p>
-        </p:txBody>
-      </p:sp>
-      <p:sp>
-        <p:nvSpPr>
-          <p:cNvPr id="33" name="TextBox 32"/>
-          <p:cNvSpPr txBox="1"/>
-          <p:nvPr/>
-        </p:nvSpPr>
-        <p:spPr>
-          <a:xfrm>
-            <a:off x="6309360" y="3941064"/>
+              <a:t>Cover the last two functions (S1)</a:t>
+            </a:r>
+          </a:p>
+        </p:txBody>
+      </p:sp>
+      <p:sp>
+        <p:nvSpPr>
+          <p:cNvPr id="39" name="TextBox 38"/>
+          <p:cNvSpPr txBox="1"/>
+          <p:nvPr/>
+        </p:nvSpPr>
+        <p:spPr>
+          <a:xfrm>
+            <a:off x="6309360" y="4453128"/>
             <a:ext cx="1463040" cy="274320"/>
           </a:xfrm>
           <a:prstGeom prst="rect">
@@ -8371,7 +8590,7 @@
           <a:noFill/>
         </p:spPr>
         <p:txBody>
-          <a:bodyPr wrap="square" lIns="0" tIns="0" rIns="0" bIns="0">
+          <a:bodyPr wrap="square" lIns="0" rIns="0" tIns="0" bIns="0">
             <a:spAutoFit/>
           </a:bodyPr>
           <a:lstStyle/>
@@ -8391,20 +8610,20 @@
                 </a:solidFill>
                 <a:latin typeface="Menlo"/>
               </a:rPr>
-              <a:t>1-2 months</a:t>
-            </a:r>
-          </a:p>
-        </p:txBody>
-      </p:sp>
-      <p:sp>
-        <p:nvSpPr>
-          <p:cNvPr id="34" name="TextBox 33"/>
-          <p:cNvSpPr txBox="1"/>
-          <p:nvPr/>
-        </p:nvSpPr>
-        <p:spPr>
-          <a:xfrm>
-            <a:off x="7955279" y="3941064"/>
+              <a:t>weeks</a:t>
+            </a:r>
+          </a:p>
+        </p:txBody>
+      </p:sp>
+      <p:sp>
+        <p:nvSpPr>
+          <p:cNvPr id="40" name="TextBox 39"/>
+          <p:cNvSpPr txBox="1"/>
+          <p:nvPr/>
+        </p:nvSpPr>
+        <p:spPr>
+          <a:xfrm>
+            <a:off x="7955279" y="4453128"/>
             <a:ext cx="3291840" cy="274320"/>
           </a:xfrm>
           <a:prstGeom prst="rect">
@@ -8413,7 +8632,7 @@
           <a:noFill/>
         </p:spPr>
         <p:txBody>
-          <a:bodyPr wrap="square" lIns="0" tIns="0" rIns="0" bIns="0">
+          <a:bodyPr wrap="square" lIns="0" rIns="0" tIns="0" bIns="0">
             <a:spAutoFit/>
           </a:bodyPr>
           <a:lstStyle/>
@@ -8433,20 +8652,20 @@
                 </a:solidFill>
                 <a:latin typeface="Helvetica Neue"/>
               </a:rPr>
-              <a:t>known matmul error</a:t>
-            </a:r>
-          </a:p>
-        </p:txBody>
-      </p:sp>
-      <p:sp>
-        <p:nvSpPr>
-          <p:cNvPr id="35" name="Rounded Rectangle 34"/>
+              <a:t>needs Frama-C</a:t>
+            </a:r>
+          </a:p>
+        </p:txBody>
+      </p:sp>
+      <p:sp>
+        <p:nvSpPr>
+          <p:cNvPr id="41" name="Rounded Rectangle 40"/>
           <p:cNvSpPr/>
           <p:nvPr/>
         </p:nvSpPr>
         <p:spPr>
           <a:xfrm>
-            <a:off x="777240" y="4343400"/>
+            <a:off x="777240" y="4855464"/>
             <a:ext cx="10607040" cy="457200"/>
           </a:xfrm>
           <a:prstGeom prst="roundRect">
@@ -8481,19 +8700,18 @@
           <a:lstStyle/>
           <a:p>
             <a:pPr algn="ctr"/>
-            <a:endParaRPr/>
-          </a:p>
-        </p:txBody>
-      </p:sp>
-      <p:sp>
-        <p:nvSpPr>
-          <p:cNvPr id="36" name="Rounded Rectangle 35"/>
+          </a:p>
+        </p:txBody>
+      </p:sp>
+      <p:sp>
+        <p:nvSpPr>
+          <p:cNvPr id="42" name="Rounded Rectangle 41"/>
           <p:cNvSpPr/>
           <p:nvPr/>
         </p:nvSpPr>
         <p:spPr>
           <a:xfrm>
-            <a:off x="914400" y="4416552"/>
+            <a:off x="914400" y="4928616"/>
             <a:ext cx="310896" cy="310896"/>
           </a:xfrm>
           <a:prstGeom prst="roundRect">
@@ -8502,7 +8720,7 @@
             </a:avLst>
           </a:prstGeom>
           <a:solidFill>
-            <a:srgbClr val="9B8CF0"/>
+            <a:srgbClr val="F2B037"/>
           </a:solidFill>
           <a:ln>
             <a:noFill/>
@@ -8528,19 +8746,18 @@
           <a:lstStyle/>
           <a:p>
             <a:pPr algn="ctr"/>
-            <a:endParaRPr/>
-          </a:p>
-        </p:txBody>
-      </p:sp>
-      <p:sp>
-        <p:nvSpPr>
-          <p:cNvPr id="37" name="TextBox 36"/>
-          <p:cNvSpPr txBox="1"/>
-          <p:nvPr/>
-        </p:nvSpPr>
-        <p:spPr>
-          <a:xfrm>
-            <a:off x="914400" y="4453128"/>
+          </a:p>
+        </p:txBody>
+      </p:sp>
+      <p:sp>
+        <p:nvSpPr>
+          <p:cNvPr id="43" name="TextBox 42"/>
+          <p:cNvSpPr txBox="1"/>
+          <p:nvPr/>
+        </p:nvSpPr>
+        <p:spPr>
+          <a:xfrm>
+            <a:off x="914400" y="4965192"/>
             <a:ext cx="310896" cy="274320"/>
           </a:xfrm>
           <a:prstGeom prst="rect">
@@ -8549,7 +8766,7 @@
           <a:noFill/>
         </p:spPr>
         <p:txBody>
-          <a:bodyPr wrap="square" lIns="0" tIns="0" rIns="0" bIns="0">
+          <a:bodyPr wrap="square" lIns="0" rIns="0" tIns="0" bIns="0">
             <a:spAutoFit/>
           </a:bodyPr>
           <a:lstStyle/>
@@ -8569,20 +8786,20 @@
                 </a:solidFill>
                 <a:latin typeface="Helvetica Neue"/>
               </a:rPr>
-              <a:t>5</a:t>
-            </a:r>
-          </a:p>
-        </p:txBody>
-      </p:sp>
-      <p:sp>
-        <p:nvSpPr>
-          <p:cNvPr id="38" name="TextBox 37"/>
-          <p:cNvSpPr txBox="1"/>
-          <p:nvPr/>
-        </p:nvSpPr>
-        <p:spPr>
-          <a:xfrm>
-            <a:off x="1417320" y="4453128"/>
+              <a:t>6</a:t>
+            </a:r>
+          </a:p>
+        </p:txBody>
+      </p:sp>
+      <p:sp>
+        <p:nvSpPr>
+          <p:cNvPr id="44" name="TextBox 43"/>
+          <p:cNvSpPr txBox="1"/>
+          <p:nvPr/>
+        </p:nvSpPr>
+        <p:spPr>
+          <a:xfrm>
+            <a:off x="1417320" y="4965192"/>
             <a:ext cx="4754880" cy="274320"/>
           </a:xfrm>
           <a:prstGeom prst="rect">
@@ -8591,7 +8808,7 @@
           <a:noFill/>
         </p:spPr>
         <p:txBody>
-          <a:bodyPr wrap="square" lIns="0" tIns="0" rIns="0" bIns="0">
+          <a:bodyPr wrap="square" lIns="0" rIns="0" tIns="0" bIns="0">
             <a:spAutoFit/>
           </a:bodyPr>
           <a:lstStyle/>
@@ -8611,20 +8828,20 @@
                 </a:solidFill>
                 <a:latin typeface="Helvetica Neue"/>
               </a:rPr>
-              <a:t>Build with CompCert (S3b)</a:t>
-            </a:r>
-          </a:p>
-        </p:txBody>
-      </p:sp>
-      <p:sp>
-        <p:nvSpPr>
-          <p:cNvPr id="39" name="TextBox 38"/>
-          <p:cNvSpPr txBox="1"/>
-          <p:nvPr/>
-        </p:nvSpPr>
-        <p:spPr>
-          <a:xfrm>
-            <a:off x="6309360" y="4453128"/>
+              <a:t>Matrix multiply bound (S4b)</a:t>
+            </a:r>
+          </a:p>
+        </p:txBody>
+      </p:sp>
+      <p:sp>
+        <p:nvSpPr>
+          <p:cNvPr id="45" name="TextBox 44"/>
+          <p:cNvSpPr txBox="1"/>
+          <p:nvPr/>
+        </p:nvSpPr>
+        <p:spPr>
+          <a:xfrm>
+            <a:off x="6309360" y="4965192"/>
             <a:ext cx="1463040" cy="274320"/>
           </a:xfrm>
           <a:prstGeom prst="rect">
@@ -8633,7 +8850,7 @@
           <a:noFill/>
         </p:spPr>
         <p:txBody>
-          <a:bodyPr wrap="square" lIns="0" tIns="0" rIns="0" bIns="0">
+          <a:bodyPr wrap="square" lIns="0" rIns="0" tIns="0" bIns="0">
             <a:spAutoFit/>
           </a:bodyPr>
           <a:lstStyle/>
@@ -8653,20 +8870,20 @@
                 </a:solidFill>
                 <a:latin typeface="Menlo"/>
               </a:rPr>
-              <a:t>2-4 weeks</a:t>
-            </a:r>
-          </a:p>
-        </p:txBody>
-      </p:sp>
-      <p:sp>
-        <p:nvSpPr>
-          <p:cNvPr id="40" name="TextBox 39"/>
-          <p:cNvSpPr txBox="1"/>
-          <p:nvPr/>
-        </p:nvSpPr>
-        <p:spPr>
-          <a:xfrm>
-            <a:off x="7955279" y="4453128"/>
+              <a:t>1-2 months</a:t>
+            </a:r>
+          </a:p>
+        </p:txBody>
+      </p:sp>
+      <p:sp>
+        <p:nvSpPr>
+          <p:cNvPr id="46" name="TextBox 45"/>
+          <p:cNvSpPr txBox="1"/>
+          <p:nvPr/>
+        </p:nvSpPr>
+        <p:spPr>
+          <a:xfrm>
+            <a:off x="7955279" y="4965192"/>
             <a:ext cx="3291840" cy="274320"/>
           </a:xfrm>
           <a:prstGeom prst="rect">
@@ -8675,7 +8892,7 @@
           <a:noFill/>
         </p:spPr>
         <p:txBody>
-          <a:bodyPr wrap="square" lIns="0" tIns="0" rIns="0" bIns="0">
+          <a:bodyPr wrap="square" lIns="0" rIns="0" tIns="0" bIns="0">
             <a:spAutoFit/>
           </a:bodyPr>
           <a:lstStyle/>
@@ -8691,24 +8908,24 @@
             <a:r>
               <a:rPr sz="1200" b="0">
                 <a:solidFill>
-                  <a:srgbClr val="9B8CF0"/>
-                </a:solidFill>
-                <a:latin typeface="Helvetica Neue"/>
-              </a:rPr>
-              <a:t>reproducibility proven</a:t>
-            </a:r>
-          </a:p>
-        </p:txBody>
-      </p:sp>
-      <p:sp>
-        <p:nvSpPr>
-          <p:cNvPr id="41" name="Rounded Rectangle 40"/>
+                  <a:srgbClr val="F2B037"/>
+                </a:solidFill>
+                <a:latin typeface="Helvetica Neue"/>
+              </a:rPr>
+              <a:t>needs LAProof</a:t>
+            </a:r>
+          </a:p>
+        </p:txBody>
+      </p:sp>
+      <p:sp>
+        <p:nvSpPr>
+          <p:cNvPr id="47" name="Rounded Rectangle 46"/>
           <p:cNvSpPr/>
           <p:nvPr/>
         </p:nvSpPr>
         <p:spPr>
           <a:xfrm>
-            <a:off x="777240" y="4855464"/>
+            <a:off x="777240" y="5367528"/>
             <a:ext cx="10607040" cy="457200"/>
           </a:xfrm>
           <a:prstGeom prst="roundRect">
@@ -8743,269 +8960,6 @@
           <a:lstStyle/>
           <a:p>
             <a:pPr algn="ctr"/>
-            <a:endParaRPr/>
-          </a:p>
-        </p:txBody>
-      </p:sp>
-      <p:sp>
-        <p:nvSpPr>
-          <p:cNvPr id="42" name="Rounded Rectangle 41"/>
-          <p:cNvSpPr/>
-          <p:nvPr/>
-        </p:nvSpPr>
-        <p:spPr>
-          <a:xfrm>
-            <a:off x="914400" y="4928616"/>
-            <a:ext cx="310896" cy="310896"/>
-          </a:xfrm>
-          <a:prstGeom prst="roundRect">
-            <a:avLst>
-              <a:gd name="adj" fmla="val 6000"/>
-            </a:avLst>
-          </a:prstGeom>
-          <a:solidFill>
-            <a:srgbClr val="F2B037"/>
-          </a:solidFill>
-          <a:ln>
-            <a:noFill/>
-          </a:ln>
-          <a:effectLst/>
-        </p:spPr>
-        <p:style>
-          <a:lnRef idx="1">
-            <a:schemeClr val="accent1"/>
-          </a:lnRef>
-          <a:fillRef idx="3">
-            <a:schemeClr val="accent1"/>
-          </a:fillRef>
-          <a:effectRef idx="2">
-            <a:schemeClr val="accent1"/>
-          </a:effectRef>
-          <a:fontRef idx="minor">
-            <a:schemeClr val="lt1"/>
-          </a:fontRef>
-        </p:style>
-        <p:txBody>
-          <a:bodyPr rtlCol="0" anchor="ctr"/>
-          <a:lstStyle/>
-          <a:p>
-            <a:pPr algn="ctr"/>
-            <a:endParaRPr/>
-          </a:p>
-        </p:txBody>
-      </p:sp>
-      <p:sp>
-        <p:nvSpPr>
-          <p:cNvPr id="43" name="TextBox 42"/>
-          <p:cNvSpPr txBox="1"/>
-          <p:nvPr/>
-        </p:nvSpPr>
-        <p:spPr>
-          <a:xfrm>
-            <a:off x="914400" y="4965192"/>
-            <a:ext cx="310896" cy="274320"/>
-          </a:xfrm>
-          <a:prstGeom prst="rect">
-            <a:avLst/>
-          </a:prstGeom>
-          <a:noFill/>
-        </p:spPr>
-        <p:txBody>
-          <a:bodyPr wrap="square" lIns="0" tIns="0" rIns="0" bIns="0">
-            <a:spAutoFit/>
-          </a:bodyPr>
-          <a:lstStyle/>
-          <a:p>
-            <a:pPr algn="ctr">
-              <a:lnSpc>
-                <a:spcPct val="125000"/>
-              </a:lnSpc>
-              <a:spcAft>
-                <a:spcPts val="600"/>
-              </a:spcAft>
-            </a:pPr>
-            <a:r>
-              <a:rPr sz="1300" b="1">
-                <a:solidFill>
-                  <a:srgbClr val="11161D"/>
-                </a:solidFill>
-                <a:latin typeface="Helvetica Neue"/>
-              </a:rPr>
-              <a:t>6</a:t>
-            </a:r>
-          </a:p>
-        </p:txBody>
-      </p:sp>
-      <p:sp>
-        <p:nvSpPr>
-          <p:cNvPr id="44" name="TextBox 43"/>
-          <p:cNvSpPr txBox="1"/>
-          <p:nvPr/>
-        </p:nvSpPr>
-        <p:spPr>
-          <a:xfrm>
-            <a:off x="1417320" y="4965192"/>
-            <a:ext cx="4754880" cy="274320"/>
-          </a:xfrm>
-          <a:prstGeom prst="rect">
-            <a:avLst/>
-          </a:prstGeom>
-          <a:noFill/>
-        </p:spPr>
-        <p:txBody>
-          <a:bodyPr wrap="square" lIns="0" tIns="0" rIns="0" bIns="0">
-            <a:spAutoFit/>
-          </a:bodyPr>
-          <a:lstStyle/>
-          <a:p>
-            <a:pPr algn="l">
-              <a:lnSpc>
-                <a:spcPct val="125000"/>
-              </a:lnSpc>
-              <a:spcAft>
-                <a:spcPts val="600"/>
-              </a:spcAft>
-            </a:pPr>
-            <a:r>
-              <a:rPr sz="1300" b="0">
-                <a:solidFill>
-                  <a:srgbClr val="E8ECF1"/>
-                </a:solidFill>
-                <a:latin typeface="Helvetica Neue"/>
-              </a:rPr>
-              <a:t>Combine the error bounds (S4c)</a:t>
-            </a:r>
-          </a:p>
-        </p:txBody>
-      </p:sp>
-      <p:sp>
-        <p:nvSpPr>
-          <p:cNvPr id="45" name="TextBox 44"/>
-          <p:cNvSpPr txBox="1"/>
-          <p:nvPr/>
-        </p:nvSpPr>
-        <p:spPr>
-          <a:xfrm>
-            <a:off x="6309360" y="4965192"/>
-            <a:ext cx="1463040" cy="274320"/>
-          </a:xfrm>
-          <a:prstGeom prst="rect">
-            <a:avLst/>
-          </a:prstGeom>
-          <a:noFill/>
-        </p:spPr>
-        <p:txBody>
-          <a:bodyPr wrap="square" lIns="0" tIns="0" rIns="0" bIns="0">
-            <a:spAutoFit/>
-          </a:bodyPr>
-          <a:lstStyle/>
-          <a:p>
-            <a:pPr algn="l">
-              <a:lnSpc>
-                <a:spcPct val="125000"/>
-              </a:lnSpc>
-              <a:spcAft>
-                <a:spcPts val="600"/>
-              </a:spcAft>
-            </a:pPr>
-            <a:r>
-              <a:rPr sz="1200" b="0">
-                <a:solidFill>
-                  <a:srgbClr val="8B99A8"/>
-                </a:solidFill>
-                <a:latin typeface="Menlo"/>
-              </a:rPr>
-              <a:t>months</a:t>
-            </a:r>
-          </a:p>
-        </p:txBody>
-      </p:sp>
-      <p:sp>
-        <p:nvSpPr>
-          <p:cNvPr id="46" name="TextBox 45"/>
-          <p:cNvSpPr txBox="1"/>
-          <p:nvPr/>
-        </p:nvSpPr>
-        <p:spPr>
-          <a:xfrm>
-            <a:off x="7955279" y="4965192"/>
-            <a:ext cx="3291840" cy="274320"/>
-          </a:xfrm>
-          <a:prstGeom prst="rect">
-            <a:avLst/>
-          </a:prstGeom>
-          <a:noFill/>
-        </p:spPr>
-        <p:txBody>
-          <a:bodyPr wrap="square" lIns="0" tIns="0" rIns="0" bIns="0">
-            <a:spAutoFit/>
-          </a:bodyPr>
-          <a:lstStyle/>
-          <a:p>
-            <a:pPr algn="l">
-              <a:lnSpc>
-                <a:spcPct val="125000"/>
-              </a:lnSpc>
-              <a:spcAft>
-                <a:spcPts val="600"/>
-              </a:spcAft>
-            </a:pPr>
-            <a:r>
-              <a:rPr sz="1200" b="0">
-                <a:solidFill>
-                  <a:srgbClr val="F2B037"/>
-                </a:solidFill>
-                <a:latin typeface="Helvetica Neue"/>
-              </a:rPr>
-              <a:t>total error known</a:t>
-            </a:r>
-          </a:p>
-        </p:txBody>
-      </p:sp>
-      <p:sp>
-        <p:nvSpPr>
-          <p:cNvPr id="47" name="Rounded Rectangle 46"/>
-          <p:cNvSpPr/>
-          <p:nvPr/>
-        </p:nvSpPr>
-        <p:spPr>
-          <a:xfrm>
-            <a:off x="777240" y="5367528"/>
-            <a:ext cx="10607040" cy="457200"/>
-          </a:xfrm>
-          <a:prstGeom prst="roundRect">
-            <a:avLst>
-              <a:gd name="adj" fmla="val 6000"/>
-            </a:avLst>
-          </a:prstGeom>
-          <a:solidFill>
-            <a:srgbClr val="1A212B"/>
-          </a:solidFill>
-          <a:ln>
-            <a:noFill/>
-          </a:ln>
-          <a:effectLst/>
-        </p:spPr>
-        <p:style>
-          <a:lnRef idx="1">
-            <a:schemeClr val="accent1"/>
-          </a:lnRef>
-          <a:fillRef idx="3">
-            <a:schemeClr val="accent1"/>
-          </a:fillRef>
-          <a:effectRef idx="2">
-            <a:schemeClr val="accent1"/>
-          </a:effectRef>
-          <a:fontRef idx="minor">
-            <a:schemeClr val="lt1"/>
-          </a:fontRef>
-        </p:style>
-        <p:txBody>
-          <a:bodyPr rtlCol="0" anchor="ctr"/>
-          <a:lstStyle/>
-          <a:p>
-            <a:pPr algn="ctr"/>
-            <a:endParaRPr/>
           </a:p>
         </p:txBody>
       </p:sp>
@@ -9052,7 +9006,6 @@
           <a:lstStyle/>
           <a:p>
             <a:pPr algn="ctr"/>
-            <a:endParaRPr/>
           </a:p>
         </p:txBody>
       </p:sp>
@@ -9073,7 +9026,7 @@
           <a:noFill/>
         </p:spPr>
         <p:txBody>
-          <a:bodyPr wrap="square" lIns="0" tIns="0" rIns="0" bIns="0">
+          <a:bodyPr wrap="square" lIns="0" rIns="0" tIns="0" bIns="0">
             <a:spAutoFit/>
           </a:bodyPr>
           <a:lstStyle/>
@@ -9115,7 +9068,7 @@
           <a:noFill/>
         </p:spPr>
         <p:txBody>
-          <a:bodyPr wrap="square" lIns="0" tIns="0" rIns="0" bIns="0">
+          <a:bodyPr wrap="square" lIns="0" rIns="0" tIns="0" bIns="0">
             <a:spAutoFit/>
           </a:bodyPr>
           <a:lstStyle/>
@@ -9135,7 +9088,7 @@
                 </a:solidFill>
                 <a:latin typeface="Helvetica Neue"/>
               </a:rPr>
-              <a:t>Prove full correctness (S5)</a:t>
+              <a:t>Full correctness (S5)</a:t>
             </a:r>
           </a:p>
         </p:txBody>
@@ -9157,7 +9110,7 @@
           <a:noFill/>
         </p:spPr>
         <p:txBody>
-          <a:bodyPr wrap="square" lIns="0" tIns="0" rIns="0" bIns="0">
+          <a:bodyPr wrap="square" lIns="0" rIns="0" tIns="0" bIns="0">
             <a:spAutoFit/>
           </a:bodyPr>
           <a:lstStyle/>
@@ -9199,7 +9152,7 @@
           <a:noFill/>
         </p:spPr>
         <p:txBody>
-          <a:bodyPr wrap="square" lIns="0" tIns="0" rIns="0" bIns="0">
+          <a:bodyPr wrap="square" lIns="0" rIns="0" tIns="0" bIns="0">
             <a:spAutoFit/>
           </a:bodyPr>
           <a:lstStyle/>
@@ -9269,7 +9222,6 @@
           <a:lstStyle/>
           <a:p>
             <a:pPr algn="ctr"/>
-            <a:endParaRPr/>
           </a:p>
         </p:txBody>
       </p:sp>
@@ -9290,7 +9242,7 @@
           <a:noFill/>
         </p:spPr>
         <p:txBody>
-          <a:bodyPr wrap="square" lIns="0" tIns="0" rIns="0" bIns="0">
+          <a:bodyPr wrap="square" lIns="0" rIns="0" tIns="0" bIns="0">
             <a:spAutoFit/>
           </a:bodyPr>
           <a:lstStyle/>
@@ -9310,7 +9262,7 @@
                 </a:solidFill>
                 <a:latin typeface="Helvetica Neue"/>
               </a:rPr>
-              <a:t>Steps 0 to 3 take about two months and use existing tools.</a:t>
+              <a:t>Steps 0 to 3 are finished. They took one session, not two months.</a:t>
             </a:r>
           </a:p>
         </p:txBody>
@@ -9332,7 +9284,7 @@
           <a:noFill/>
         </p:spPr>
         <p:txBody>
-          <a:bodyPr wrap="square" lIns="0" tIns="0" rIns="0" bIns="0">
+          <a:bodyPr wrap="square" lIns="0" rIns="0" tIns="0" bIns="0">
             <a:spAutoFit/>
           </a:bodyPr>
           <a:lstStyle/>
@@ -9374,7 +9326,7 @@
           <a:noFill/>
         </p:spPr>
         <p:txBody>
-          <a:bodyPr wrap="square" lIns="0" tIns="0" rIns="0" bIns="0">
+          <a:bodyPr wrap="square" lIns="0" rIns="0" tIns="0" bIns="0">
             <a:spAutoFit/>
           </a:bodyPr>
           <a:lstStyle/>
@@ -9408,7 +9360,7 @@
 </file>
 
 <file path=ppt/slides/slide14.xml><?xml version="1.0" encoding="utf-8"?>
-<p:sld xmlns:a="http://schemas.openxmlformats.org/drawingml/2006/main" xmlns:r="http://schemas.openxmlformats.org/officeDocument/2006/relationships" xmlns:p="http://schemas.openxmlformats.org/presentationml/2006/main">
+<p:sld xmlns:a="http://schemas.openxmlformats.org/drawingml/2006/main" xmlns:p="http://schemas.openxmlformats.org/presentationml/2006/main" xmlns:r="http://schemas.openxmlformats.org/officeDocument/2006/relationships">
   <p:cSld>
     <p:spTree>
       <p:nvGrpSpPr>
@@ -9416,14 +9368,7 @@
         <p:cNvGrpSpPr/>
         <p:nvPr/>
       </p:nvGrpSpPr>
-      <p:grpSpPr>
-        <a:xfrm>
-          <a:off x="0" y="0"/>
-          <a:ext cx="0" cy="0"/>
-          <a:chOff x="0" y="0"/>
-          <a:chExt cx="0" cy="0"/>
-        </a:xfrm>
-      </p:grpSpPr>
+      <p:grpSpPr/>
       <p:sp>
         <p:nvSpPr>
           <p:cNvPr id="2" name="Rectangle 1"/>
@@ -9465,7 +9410,6 @@
           <a:lstStyle/>
           <a:p>
             <a:pPr algn="ctr"/>
-            <a:endParaRPr/>
           </a:p>
         </p:txBody>
       </p:sp>
@@ -9486,7 +9430,7 @@
           <a:noFill/>
         </p:spPr>
         <p:txBody>
-          <a:bodyPr wrap="square" lIns="0" tIns="0" rIns="0" bIns="0">
+          <a:bodyPr wrap="square" lIns="0" rIns="0" tIns="0" bIns="0">
             <a:spAutoFit/>
           </a:bodyPr>
           <a:lstStyle/>
@@ -9528,7 +9472,7 @@
           <a:noFill/>
         </p:spPr>
         <p:txBody>
-          <a:bodyPr wrap="square" lIns="0" tIns="0" rIns="0" bIns="0">
+          <a:bodyPr wrap="square" lIns="0" rIns="0" tIns="0" bIns="0">
             <a:spAutoFit/>
           </a:bodyPr>
           <a:lstStyle/>
@@ -9570,7 +9514,7 @@
           <a:noFill/>
         </p:spPr>
         <p:txBody>
-          <a:bodyPr wrap="square" lIns="0" tIns="0" rIns="0" bIns="0">
+          <a:bodyPr wrap="square" lIns="0" rIns="0" tIns="0" bIns="0">
             <a:spAutoFit/>
           </a:bodyPr>
           <a:lstStyle/>
@@ -9636,7 +9580,6 @@
           <a:lstStyle/>
           <a:p>
             <a:pPr algn="ctr"/>
-            <a:endParaRPr/>
           </a:p>
         </p:txBody>
       </p:sp>
@@ -9681,7 +9624,6 @@
           <a:lstStyle/>
           <a:p>
             <a:pPr algn="ctr"/>
-            <a:endParaRPr/>
           </a:p>
         </p:txBody>
       </p:sp>
@@ -9702,7 +9644,7 @@
           <a:noFill/>
         </p:spPr>
         <p:txBody>
-          <a:bodyPr wrap="square" lIns="0" tIns="0" rIns="0" bIns="0">
+          <a:bodyPr wrap="square" lIns="0" rIns="0" tIns="0" bIns="0">
             <a:spAutoFit/>
           </a:bodyPr>
           <a:lstStyle/>
@@ -9744,7 +9686,7 @@
           <a:noFill/>
         </p:spPr>
         <p:txBody>
-          <a:bodyPr wrap="square" lIns="0" tIns="0" rIns="0" bIns="0">
+          <a:bodyPr wrap="square" lIns="0" rIns="0" tIns="0" bIns="0">
             <a:spAutoFit/>
           </a:bodyPr>
           <a:lstStyle/>
@@ -9810,7 +9752,6 @@
           <a:lstStyle/>
           <a:p>
             <a:pPr algn="ctr"/>
-            <a:endParaRPr/>
           </a:p>
         </p:txBody>
       </p:sp>
@@ -9855,7 +9796,6 @@
           <a:lstStyle/>
           <a:p>
             <a:pPr algn="ctr"/>
-            <a:endParaRPr/>
           </a:p>
         </p:txBody>
       </p:sp>
@@ -9876,7 +9816,7 @@
           <a:noFill/>
         </p:spPr>
         <p:txBody>
-          <a:bodyPr wrap="square" lIns="0" tIns="0" rIns="0" bIns="0">
+          <a:bodyPr wrap="square" lIns="0" rIns="0" tIns="0" bIns="0">
             <a:spAutoFit/>
           </a:bodyPr>
           <a:lstStyle/>
@@ -9918,7 +9858,7 @@
           <a:noFill/>
         </p:spPr>
         <p:txBody>
-          <a:bodyPr wrap="square" lIns="0" tIns="0" rIns="0" bIns="0">
+          <a:bodyPr wrap="square" lIns="0" rIns="0" tIns="0" bIns="0">
             <a:spAutoFit/>
           </a:bodyPr>
           <a:lstStyle/>
@@ -9984,7 +9924,6 @@
           <a:lstStyle/>
           <a:p>
             <a:pPr algn="ctr"/>
-            <a:endParaRPr/>
           </a:p>
         </p:txBody>
       </p:sp>
@@ -10029,7 +9968,6 @@
           <a:lstStyle/>
           <a:p>
             <a:pPr algn="ctr"/>
-            <a:endParaRPr/>
           </a:p>
         </p:txBody>
       </p:sp>
@@ -10050,7 +9988,7 @@
           <a:noFill/>
         </p:spPr>
         <p:txBody>
-          <a:bodyPr wrap="square" lIns="0" tIns="0" rIns="0" bIns="0">
+          <a:bodyPr wrap="square" lIns="0" rIns="0" tIns="0" bIns="0">
             <a:spAutoFit/>
           </a:bodyPr>
           <a:lstStyle/>
@@ -10120,7 +10058,6 @@
           <a:lstStyle/>
           <a:p>
             <a:pPr algn="ctr"/>
-            <a:endParaRPr/>
           </a:p>
         </p:txBody>
       </p:sp>
@@ -10141,7 +10078,7 @@
           <a:noFill/>
         </p:spPr>
         <p:txBody>
-          <a:bodyPr wrap="square" lIns="0" tIns="0" rIns="0" bIns="0">
+          <a:bodyPr wrap="square" lIns="0" rIns="0" tIns="0" bIns="0">
             <a:spAutoFit/>
           </a:bodyPr>
           <a:lstStyle/>
@@ -10183,7 +10120,7 @@
           <a:noFill/>
         </p:spPr>
         <p:txBody>
-          <a:bodyPr wrap="square" lIns="0" tIns="0" rIns="0" bIns="0">
+          <a:bodyPr wrap="square" lIns="0" rIns="0" tIns="0" bIns="0">
             <a:spAutoFit/>
           </a:bodyPr>
           <a:lstStyle/>
@@ -10253,7 +10190,6 @@
           <a:lstStyle/>
           <a:p>
             <a:pPr algn="ctr"/>
-            <a:endParaRPr/>
           </a:p>
         </p:txBody>
       </p:sp>
@@ -10274,7 +10210,7 @@
           <a:noFill/>
         </p:spPr>
         <p:txBody>
-          <a:bodyPr wrap="square" lIns="0" tIns="0" rIns="0" bIns="0">
+          <a:bodyPr wrap="square" lIns="0" rIns="0" tIns="0" bIns="0">
             <a:spAutoFit/>
           </a:bodyPr>
           <a:lstStyle/>
@@ -10316,7 +10252,7 @@
           <a:noFill/>
         </p:spPr>
         <p:txBody>
-          <a:bodyPr wrap="square" lIns="0" tIns="0" rIns="0" bIns="0">
+          <a:bodyPr wrap="square" lIns="0" rIns="0" tIns="0" bIns="0">
             <a:spAutoFit/>
           </a:bodyPr>
           <a:lstStyle/>
@@ -10358,7 +10294,7 @@
           <a:noFill/>
         </p:spPr>
         <p:txBody>
-          <a:bodyPr wrap="square" lIns="0" tIns="0" rIns="0" bIns="0">
+          <a:bodyPr wrap="square" lIns="0" rIns="0" tIns="0" bIns="0">
             <a:spAutoFit/>
           </a:bodyPr>
           <a:lstStyle/>
@@ -10400,7 +10336,7 @@
           <a:noFill/>
         </p:spPr>
         <p:txBody>
-          <a:bodyPr wrap="square" lIns="0" tIns="0" rIns="0" bIns="0">
+          <a:bodyPr wrap="square" lIns="0" rIns="0" tIns="0" bIns="0">
             <a:spAutoFit/>
           </a:bodyPr>
           <a:lstStyle/>
@@ -10434,7 +10370,7 @@
 </file>
 
 <file path=ppt/slides/slide15.xml><?xml version="1.0" encoding="utf-8"?>
-<p:sld xmlns:a="http://schemas.openxmlformats.org/drawingml/2006/main" xmlns:r="http://schemas.openxmlformats.org/officeDocument/2006/relationships" xmlns:p="http://schemas.openxmlformats.org/presentationml/2006/main">
+<p:sld xmlns:a="http://schemas.openxmlformats.org/drawingml/2006/main" xmlns:p="http://schemas.openxmlformats.org/presentationml/2006/main" xmlns:r="http://schemas.openxmlformats.org/officeDocument/2006/relationships">
   <p:cSld>
     <p:spTree>
       <p:nvGrpSpPr>
@@ -10442,14 +10378,7 @@
         <p:cNvGrpSpPr/>
         <p:nvPr/>
       </p:nvGrpSpPr>
-      <p:grpSpPr>
-        <a:xfrm>
-          <a:off x="0" y="0"/>
-          <a:ext cx="0" cy="0"/>
-          <a:chOff x="0" y="0"/>
-          <a:chExt cx="0" cy="0"/>
-        </a:xfrm>
-      </p:grpSpPr>
+      <p:grpSpPr/>
       <p:sp>
         <p:nvSpPr>
           <p:cNvPr id="2" name="Rectangle 1"/>
@@ -10491,7 +10420,6 @@
           <a:lstStyle/>
           <a:p>
             <a:pPr algn="ctr"/>
-            <a:endParaRPr/>
           </a:p>
         </p:txBody>
       </p:sp>
@@ -10512,7 +10440,7 @@
           <a:noFill/>
         </p:spPr>
         <p:txBody>
-          <a:bodyPr wrap="square" lIns="0" tIns="0" rIns="0" bIns="0">
+          <a:bodyPr wrap="square" lIns="0" rIns="0" tIns="0" bIns="0">
             <a:spAutoFit/>
           </a:bodyPr>
           <a:lstStyle/>
@@ -10582,7 +10510,6 @@
           <a:lstStyle/>
           <a:p>
             <a:pPr algn="ctr"/>
-            <a:endParaRPr/>
           </a:p>
         </p:txBody>
       </p:sp>
@@ -10629,7 +10556,6 @@
           <a:lstStyle/>
           <a:p>
             <a:pPr algn="ctr"/>
-            <a:endParaRPr/>
           </a:p>
         </p:txBody>
       </p:sp>
@@ -10650,7 +10576,7 @@
           <a:noFill/>
         </p:spPr>
         <p:txBody>
-          <a:bodyPr wrap="square" lIns="0" tIns="0" rIns="0" bIns="0">
+          <a:bodyPr wrap="square" lIns="0" rIns="0" tIns="0" bIns="0">
             <a:spAutoFit/>
           </a:bodyPr>
           <a:lstStyle/>
@@ -10692,7 +10618,7 @@
           <a:noFill/>
         </p:spPr>
         <p:txBody>
-          <a:bodyPr wrap="square" lIns="0" tIns="0" rIns="0" bIns="0">
+          <a:bodyPr wrap="square" lIns="0" rIns="0" tIns="0" bIns="0">
             <a:spAutoFit/>
           </a:bodyPr>
           <a:lstStyle/>
@@ -10712,7 +10638,7 @@
                 </a:solidFill>
                 <a:latin typeface="Helvetica Neue"/>
               </a:rPr>
-              <a:t>Approve steps 0 to 3</a:t>
+              <a:t>Approve step 4: CompCert</a:t>
             </a:r>
           </a:p>
         </p:txBody>
@@ -10734,7 +10660,7 @@
           <a:noFill/>
         </p:spPr>
         <p:txBody>
-          <a:bodyPr wrap="square" lIns="0" tIns="0" rIns="0" bIns="0">
+          <a:bodyPr wrap="square" lIns="0" rIns="0" tIns="0" bIns="0">
             <a:spAutoFit/>
           </a:bodyPr>
           <a:lstStyle/>
@@ -10754,7 +10680,7 @@
                 </a:solidFill>
                 <a:latin typeface="Helvetica Neue"/>
               </a:rPr>
-              <a:t>About two months. Existing tools. No hand-written proofs. Result: no memory errors, and a known maths error bound.</a:t>
+              <a:t>Two to four weeks. Turns reproducibility from something tested on 7 systems into something proven for all of them. This is the publishable one.</a:t>
             </a:r>
           </a:p>
         </p:txBody>
@@ -10804,7 +10730,6 @@
           <a:lstStyle/>
           <a:p>
             <a:pPr algn="ctr"/>
-            <a:endParaRPr/>
           </a:p>
         </p:txBody>
       </p:sp>
@@ -10851,7 +10776,6 @@
           <a:lstStyle/>
           <a:p>
             <a:pPr algn="ctr"/>
-            <a:endParaRPr/>
           </a:p>
         </p:txBody>
       </p:sp>
@@ -10872,7 +10796,7 @@
           <a:noFill/>
         </p:spPr>
         <p:txBody>
-          <a:bodyPr wrap="square" lIns="0" tIns="0" rIns="0" bIns="0">
+          <a:bodyPr wrap="square" lIns="0" rIns="0" tIns="0" bIns="0">
             <a:spAutoFit/>
           </a:bodyPr>
           <a:lstStyle/>
@@ -10914,7 +10838,7 @@
           <a:noFill/>
         </p:spPr>
         <p:txBody>
-          <a:bodyPr wrap="square" lIns="0" tIns="0" rIns="0" bIns="0">
+          <a:bodyPr wrap="square" lIns="0" rIns="0" tIns="0" bIns="0">
             <a:spAutoFit/>
           </a:bodyPr>
           <a:lstStyle/>
@@ -10956,7 +10880,7 @@
           <a:noFill/>
         </p:spPr>
         <p:txBody>
-          <a:bodyPr wrap="square" lIns="0" tIns="0" rIns="0" bIns="0">
+          <a:bodyPr wrap="square" lIns="0" rIns="0" tIns="0" bIns="0">
             <a:spAutoFit/>
           </a:bodyPr>
           <a:lstStyle/>
@@ -11026,7 +10950,6 @@
           <a:lstStyle/>
           <a:p>
             <a:pPr algn="ctr"/>
-            <a:endParaRPr/>
           </a:p>
         </p:txBody>
       </p:sp>
@@ -11073,7 +10996,6 @@
           <a:lstStyle/>
           <a:p>
             <a:pPr algn="ctr"/>
-            <a:endParaRPr/>
           </a:p>
         </p:txBody>
       </p:sp>
@@ -11094,7 +11016,7 @@
           <a:noFill/>
         </p:spPr>
         <p:txBody>
-          <a:bodyPr wrap="square" lIns="0" tIns="0" rIns="0" bIns="0">
+          <a:bodyPr wrap="square" lIns="0" rIns="0" tIns="0" bIns="0">
             <a:spAutoFit/>
           </a:bodyPr>
           <a:lstStyle/>
@@ -11136,7 +11058,7 @@
           <a:noFill/>
         </p:spPr>
         <p:txBody>
-          <a:bodyPr wrap="square" lIns="0" tIns="0" rIns="0" bIns="0">
+          <a:bodyPr wrap="square" lIns="0" rIns="0" tIns="0" bIns="0">
             <a:spAutoFit/>
           </a:bodyPr>
           <a:lstStyle/>
@@ -11178,7 +11100,7 @@
           <a:noFill/>
         </p:spPr>
         <p:txBody>
-          <a:bodyPr wrap="square" lIns="0" tIns="0" rIns="0" bIns="0">
+          <a:bodyPr wrap="square" lIns="0" rIns="0" tIns="0" bIns="0">
             <a:spAutoFit/>
           </a:bodyPr>
           <a:lstStyle/>
@@ -11246,7 +11168,6 @@
           <a:lstStyle/>
           <a:p>
             <a:pPr algn="ctr"/>
-            <a:endParaRPr/>
           </a:p>
         </p:txBody>
       </p:sp>
@@ -11267,7 +11188,7 @@
           <a:noFill/>
         </p:spPr>
         <p:txBody>
-          <a:bodyPr wrap="square" lIns="0" tIns="0" rIns="0" bIns="0">
+          <a:bodyPr wrap="square" lIns="0" rIns="0" tIns="0" bIns="0">
             <a:spAutoFit/>
           </a:bodyPr>
           <a:lstStyle/>
@@ -11309,7 +11230,7 @@
           <a:noFill/>
         </p:spPr>
         <p:txBody>
-          <a:bodyPr wrap="square" lIns="0" tIns="0" rIns="0" bIns="0">
+          <a:bodyPr wrap="square" lIns="0" rIns="0" tIns="0" bIns="0">
             <a:spAutoFit/>
           </a:bodyPr>
           <a:lstStyle/>
@@ -11351,7 +11272,7 @@
           <a:noFill/>
         </p:spPr>
         <p:txBody>
-          <a:bodyPr wrap="square" lIns="0" tIns="0" rIns="0" bIns="0">
+          <a:bodyPr wrap="square" lIns="0" rIns="0" tIns="0" bIns="0">
             <a:spAutoFit/>
           </a:bodyPr>
           <a:lstStyle/>
@@ -11385,7 +11306,7 @@
 </file>
 
 <file path=ppt/slides/slide2.xml><?xml version="1.0" encoding="utf-8"?>
-<p:sld xmlns:a="http://schemas.openxmlformats.org/drawingml/2006/main" xmlns:r="http://schemas.openxmlformats.org/officeDocument/2006/relationships" xmlns:p="http://schemas.openxmlformats.org/presentationml/2006/main">
+<p:sld xmlns:a="http://schemas.openxmlformats.org/drawingml/2006/main" xmlns:p="http://schemas.openxmlformats.org/presentationml/2006/main" xmlns:r="http://schemas.openxmlformats.org/officeDocument/2006/relationships">
   <p:cSld>
     <p:spTree>
       <p:nvGrpSpPr>
@@ -11393,14 +11314,7 @@
         <p:cNvGrpSpPr/>
         <p:nvPr/>
       </p:nvGrpSpPr>
-      <p:grpSpPr>
-        <a:xfrm>
-          <a:off x="0" y="0"/>
-          <a:ext cx="0" cy="0"/>
-          <a:chOff x="0" y="0"/>
-          <a:chExt cx="0" cy="0"/>
-        </a:xfrm>
-      </p:grpSpPr>
+      <p:grpSpPr/>
       <p:sp>
         <p:nvSpPr>
           <p:cNvPr id="2" name="Rectangle 1"/>
@@ -11442,7 +11356,6 @@
           <a:lstStyle/>
           <a:p>
             <a:pPr algn="ctr"/>
-            <a:endParaRPr/>
           </a:p>
         </p:txBody>
       </p:sp>
@@ -11463,7 +11376,7 @@
           <a:noFill/>
         </p:spPr>
         <p:txBody>
-          <a:bodyPr wrap="square" lIns="0" tIns="0" rIns="0" bIns="0">
+          <a:bodyPr wrap="square" lIns="0" rIns="0" tIns="0" bIns="0">
             <a:spAutoFit/>
           </a:bodyPr>
           <a:lstStyle/>
@@ -11505,7 +11418,7 @@
           <a:noFill/>
         </p:spPr>
         <p:txBody>
-          <a:bodyPr wrap="square" lIns="0" tIns="0" rIns="0" bIns="0">
+          <a:bodyPr wrap="square" lIns="0" rIns="0" tIns="0" bIns="0">
             <a:spAutoFit/>
           </a:bodyPr>
           <a:lstStyle/>
@@ -11575,7 +11488,6 @@
           <a:lstStyle/>
           <a:p>
             <a:pPr algn="ctr"/>
-            <a:endParaRPr/>
           </a:p>
         </p:txBody>
       </p:sp>
@@ -11596,7 +11508,7 @@
           <a:noFill/>
         </p:spPr>
         <p:txBody>
-          <a:bodyPr wrap="square" lIns="0" tIns="0" rIns="0" bIns="0">
+          <a:bodyPr wrap="square" lIns="0" rIns="0" tIns="0" bIns="0">
             <a:spAutoFit/>
           </a:bodyPr>
           <a:lstStyle/>
@@ -11638,7 +11550,7 @@
           <a:noFill/>
         </p:spPr>
         <p:txBody>
-          <a:bodyPr wrap="square" lIns="0" tIns="0" rIns="0" bIns="0">
+          <a:bodyPr wrap="square" lIns="0" rIns="0" tIns="0" bIns="0">
             <a:spAutoFit/>
           </a:bodyPr>
           <a:lstStyle/>
@@ -11709,7 +11621,6 @@
           <a:lstStyle/>
           <a:p>
             <a:pPr algn="ctr"/>
-            <a:endParaRPr/>
           </a:p>
         </p:txBody>
       </p:sp>
@@ -11730,7 +11641,7 @@
           <a:noFill/>
         </p:spPr>
         <p:txBody>
-          <a:bodyPr wrap="square" lIns="0" tIns="0" rIns="0" bIns="0">
+          <a:bodyPr wrap="square" lIns="0" rIns="0" tIns="0" bIns="0">
             <a:spAutoFit/>
           </a:bodyPr>
           <a:lstStyle/>
@@ -11772,7 +11683,7 @@
           <a:noFill/>
         </p:spPr>
         <p:txBody>
-          <a:bodyPr wrap="square" lIns="0" tIns="0" rIns="0" bIns="0">
+          <a:bodyPr wrap="square" lIns="0" rIns="0" tIns="0" bIns="0">
             <a:spAutoFit/>
           </a:bodyPr>
           <a:lstStyle/>
@@ -11843,7 +11754,6 @@
           <a:lstStyle/>
           <a:p>
             <a:pPr algn="ctr"/>
-            <a:endParaRPr/>
           </a:p>
         </p:txBody>
       </p:sp>
@@ -11864,7 +11774,7 @@
           <a:noFill/>
         </p:spPr>
         <p:txBody>
-          <a:bodyPr wrap="square" lIns="0" tIns="0" rIns="0" bIns="0">
+          <a:bodyPr wrap="square" lIns="0" rIns="0" tIns="0" bIns="0">
             <a:spAutoFit/>
           </a:bodyPr>
           <a:lstStyle/>
@@ -11906,7 +11816,7 @@
           <a:noFill/>
         </p:spPr>
         <p:txBody>
-          <a:bodyPr wrap="square" lIns="0" tIns="0" rIns="0" bIns="0">
+          <a:bodyPr wrap="square" lIns="0" rIns="0" tIns="0" bIns="0">
             <a:spAutoFit/>
           </a:bodyPr>
           <a:lstStyle/>
@@ -11977,7 +11887,6 @@
           <a:lstStyle/>
           <a:p>
             <a:pPr algn="ctr"/>
-            <a:endParaRPr/>
           </a:p>
         </p:txBody>
       </p:sp>
@@ -11998,7 +11907,7 @@
           <a:noFill/>
         </p:spPr>
         <p:txBody>
-          <a:bodyPr wrap="square" lIns="0" tIns="0" rIns="0" bIns="0">
+          <a:bodyPr wrap="square" lIns="0" rIns="0" tIns="0" bIns="0">
             <a:spAutoFit/>
           </a:bodyPr>
           <a:lstStyle/>
@@ -12040,7 +11949,7 @@
           <a:noFill/>
         </p:spPr>
         <p:txBody>
-          <a:bodyPr wrap="square" lIns="0" tIns="0" rIns="0" bIns="0">
+          <a:bodyPr wrap="square" lIns="0" rIns="0" tIns="0" bIns="0">
             <a:spAutoFit/>
           </a:bodyPr>
           <a:lstStyle/>
@@ -12109,7 +12018,6 @@
           <a:lstStyle/>
           <a:p>
             <a:pPr algn="ctr"/>
-            <a:endParaRPr/>
           </a:p>
         </p:txBody>
       </p:sp>
@@ -12130,7 +12038,7 @@
           <a:noFill/>
         </p:spPr>
         <p:txBody>
-          <a:bodyPr wrap="square" lIns="0" tIns="0" rIns="0" bIns="0">
+          <a:bodyPr wrap="square" lIns="0" rIns="0" tIns="0" bIns="0">
             <a:spAutoFit/>
           </a:bodyPr>
           <a:lstStyle/>
@@ -12172,7 +12080,7 @@
           <a:noFill/>
         </p:spPr>
         <p:txBody>
-          <a:bodyPr wrap="square" lIns="0" tIns="0" rIns="0" bIns="0">
+          <a:bodyPr wrap="square" lIns="0" rIns="0" tIns="0" bIns="0">
             <a:spAutoFit/>
           </a:bodyPr>
           <a:lstStyle/>
@@ -12252,7 +12160,7 @@
           <a:noFill/>
         </p:spPr>
         <p:txBody>
-          <a:bodyPr wrap="square" lIns="0" tIns="0" rIns="0" bIns="0">
+          <a:bodyPr wrap="square" lIns="0" rIns="0" tIns="0" bIns="0">
             <a:spAutoFit/>
           </a:bodyPr>
           <a:lstStyle/>
@@ -12294,7 +12202,7 @@
           <a:noFill/>
         </p:spPr>
         <p:txBody>
-          <a:bodyPr wrap="square" lIns="0" tIns="0" rIns="0" bIns="0">
+          <a:bodyPr wrap="square" lIns="0" rIns="0" tIns="0" bIns="0">
             <a:spAutoFit/>
           </a:bodyPr>
           <a:lstStyle/>
@@ -12328,7 +12236,7 @@
 </file>
 
 <file path=ppt/slides/slide3.xml><?xml version="1.0" encoding="utf-8"?>
-<p:sld xmlns:a="http://schemas.openxmlformats.org/drawingml/2006/main" xmlns:r="http://schemas.openxmlformats.org/officeDocument/2006/relationships" xmlns:p="http://schemas.openxmlformats.org/presentationml/2006/main">
+<p:sld xmlns:a="http://schemas.openxmlformats.org/drawingml/2006/main" xmlns:p="http://schemas.openxmlformats.org/presentationml/2006/main" xmlns:r="http://schemas.openxmlformats.org/officeDocument/2006/relationships">
   <p:cSld>
     <p:spTree>
       <p:nvGrpSpPr>
@@ -12336,14 +12244,7 @@
         <p:cNvGrpSpPr/>
         <p:nvPr/>
       </p:nvGrpSpPr>
-      <p:grpSpPr>
-        <a:xfrm>
-          <a:off x="0" y="0"/>
-          <a:ext cx="0" cy="0"/>
-          <a:chOff x="0" y="0"/>
-          <a:chExt cx="0" cy="0"/>
-        </a:xfrm>
-      </p:grpSpPr>
+      <p:grpSpPr/>
       <p:sp>
         <p:nvSpPr>
           <p:cNvPr id="2" name="Rectangle 1"/>
@@ -12385,7 +12286,6 @@
           <a:lstStyle/>
           <a:p>
             <a:pPr algn="ctr"/>
-            <a:endParaRPr/>
           </a:p>
         </p:txBody>
       </p:sp>
@@ -12406,7 +12306,7 @@
           <a:noFill/>
         </p:spPr>
         <p:txBody>
-          <a:bodyPr wrap="square" lIns="0" tIns="0" rIns="0" bIns="0">
+          <a:bodyPr wrap="square" lIns="0" rIns="0" tIns="0" bIns="0">
             <a:spAutoFit/>
           </a:bodyPr>
           <a:lstStyle/>
@@ -12448,7 +12348,7 @@
           <a:noFill/>
         </p:spPr>
         <p:txBody>
-          <a:bodyPr wrap="square" lIns="0" tIns="0" rIns="0" bIns="0">
+          <a:bodyPr wrap="square" lIns="0" rIns="0" tIns="0" bIns="0">
             <a:spAutoFit/>
           </a:bodyPr>
           <a:lstStyle/>
@@ -12518,7 +12418,6 @@
           <a:lstStyle/>
           <a:p>
             <a:pPr algn="ctr"/>
-            <a:endParaRPr/>
           </a:p>
         </p:txBody>
       </p:sp>
@@ -12539,7 +12438,7 @@
           <a:noFill/>
         </p:spPr>
         <p:txBody>
-          <a:bodyPr wrap="square" lIns="0" tIns="0" rIns="0" bIns="0">
+          <a:bodyPr wrap="square" lIns="0" rIns="0" tIns="0" bIns="0">
             <a:spAutoFit/>
           </a:bodyPr>
           <a:lstStyle/>
@@ -12581,7 +12480,7 @@
           <a:noFill/>
         </p:spPr>
         <p:txBody>
-          <a:bodyPr wrap="square" lIns="0" tIns="0" rIns="0" bIns="0">
+          <a:bodyPr wrap="square" lIns="0" rIns="0" tIns="0" bIns="0">
             <a:spAutoFit/>
           </a:bodyPr>
           <a:lstStyle/>
@@ -12727,7 +12626,6 @@
           <a:lstStyle/>
           <a:p>
             <a:pPr algn="ctr"/>
-            <a:endParaRPr/>
           </a:p>
         </p:txBody>
       </p:sp>
@@ -12748,7 +12646,7 @@
           <a:noFill/>
         </p:spPr>
         <p:txBody>
-          <a:bodyPr wrap="square" lIns="0" tIns="0" rIns="0" bIns="0">
+          <a:bodyPr wrap="square" lIns="0" rIns="0" tIns="0" bIns="0">
             <a:spAutoFit/>
           </a:bodyPr>
           <a:lstStyle/>
@@ -12790,7 +12688,7 @@
           <a:noFill/>
         </p:spPr>
         <p:txBody>
-          <a:bodyPr wrap="square" lIns="0" tIns="0" rIns="0" bIns="0">
+          <a:bodyPr wrap="square" lIns="0" rIns="0" tIns="0" bIns="0">
             <a:spAutoFit/>
           </a:bodyPr>
           <a:lstStyle/>
@@ -12934,7 +12832,6 @@
           <a:lstStyle/>
           <a:p>
             <a:pPr algn="ctr"/>
-            <a:endParaRPr/>
           </a:p>
         </p:txBody>
       </p:sp>
@@ -12955,7 +12852,7 @@
           <a:noFill/>
         </p:spPr>
         <p:txBody>
-          <a:bodyPr wrap="square" lIns="0" tIns="0" rIns="0" bIns="0">
+          <a:bodyPr wrap="square" lIns="0" rIns="0" tIns="0" bIns="0">
             <a:spAutoFit/>
           </a:bodyPr>
           <a:lstStyle/>
@@ -12997,7 +12894,7 @@
           <a:noFill/>
         </p:spPr>
         <p:txBody>
-          <a:bodyPr wrap="square" lIns="0" tIns="0" rIns="0" bIns="0">
+          <a:bodyPr wrap="square" lIns="0" rIns="0" tIns="0" bIns="0">
             <a:spAutoFit/>
           </a:bodyPr>
           <a:lstStyle/>
@@ -13039,7 +12936,7 @@
           <a:noFill/>
         </p:spPr>
         <p:txBody>
-          <a:bodyPr wrap="square" lIns="0" tIns="0" rIns="0" bIns="0">
+          <a:bodyPr wrap="square" lIns="0" rIns="0" tIns="0" bIns="0">
             <a:spAutoFit/>
           </a:bodyPr>
           <a:lstStyle/>
@@ -13081,7 +12978,7 @@
           <a:noFill/>
         </p:spPr>
         <p:txBody>
-          <a:bodyPr wrap="square" lIns="0" tIns="0" rIns="0" bIns="0">
+          <a:bodyPr wrap="square" lIns="0" rIns="0" tIns="0" bIns="0">
             <a:spAutoFit/>
           </a:bodyPr>
           <a:lstStyle/>
@@ -13115,7 +13012,7 @@
 </file>
 
 <file path=ppt/slides/slide4.xml><?xml version="1.0" encoding="utf-8"?>
-<p:sld xmlns:a="http://schemas.openxmlformats.org/drawingml/2006/main" xmlns:r="http://schemas.openxmlformats.org/officeDocument/2006/relationships" xmlns:p="http://schemas.openxmlformats.org/presentationml/2006/main">
+<p:sld xmlns:a="http://schemas.openxmlformats.org/drawingml/2006/main" xmlns:p="http://schemas.openxmlformats.org/presentationml/2006/main" xmlns:r="http://schemas.openxmlformats.org/officeDocument/2006/relationships">
   <p:cSld>
     <p:spTree>
       <p:nvGrpSpPr>
@@ -13123,14 +13020,7 @@
         <p:cNvGrpSpPr/>
         <p:nvPr/>
       </p:nvGrpSpPr>
-      <p:grpSpPr>
-        <a:xfrm>
-          <a:off x="0" y="0"/>
-          <a:ext cx="0" cy="0"/>
-          <a:chOff x="0" y="0"/>
-          <a:chExt cx="0" cy="0"/>
-        </a:xfrm>
-      </p:grpSpPr>
+      <p:grpSpPr/>
       <p:sp>
         <p:nvSpPr>
           <p:cNvPr id="2" name="Rectangle 1"/>
@@ -13172,7 +13062,6 @@
           <a:lstStyle/>
           <a:p>
             <a:pPr algn="ctr"/>
-            <a:endParaRPr/>
           </a:p>
         </p:txBody>
       </p:sp>
@@ -13193,7 +13082,7 @@
           <a:noFill/>
         </p:spPr>
         <p:txBody>
-          <a:bodyPr wrap="square" lIns="0" tIns="0" rIns="0" bIns="0">
+          <a:bodyPr wrap="square" lIns="0" rIns="0" tIns="0" bIns="0">
             <a:spAutoFit/>
           </a:bodyPr>
           <a:lstStyle/>
@@ -13235,7 +13124,7 @@
           <a:noFill/>
         </p:spPr>
         <p:txBody>
-          <a:bodyPr wrap="square" lIns="0" tIns="0" rIns="0" bIns="0">
+          <a:bodyPr wrap="square" lIns="0" rIns="0" tIns="0" bIns="0">
             <a:spAutoFit/>
           </a:bodyPr>
           <a:lstStyle/>
@@ -13305,7 +13194,6 @@
           <a:lstStyle/>
           <a:p>
             <a:pPr algn="ctr"/>
-            <a:endParaRPr/>
           </a:p>
         </p:txBody>
       </p:sp>
@@ -13326,7 +13214,7 @@
           <a:noFill/>
         </p:spPr>
         <p:txBody>
-          <a:bodyPr wrap="square" lIns="0" tIns="0" rIns="0" bIns="0">
+          <a:bodyPr wrap="square" lIns="0" rIns="0" tIns="0" bIns="0">
             <a:spAutoFit/>
           </a:bodyPr>
           <a:lstStyle/>
@@ -13368,7 +13256,7 @@
           <a:noFill/>
         </p:spPr>
         <p:txBody>
-          <a:bodyPr wrap="square" lIns="0" tIns="0" rIns="0" bIns="0">
+          <a:bodyPr wrap="square" lIns="0" rIns="0" tIns="0" bIns="0">
             <a:spAutoFit/>
           </a:bodyPr>
           <a:lstStyle/>
@@ -13410,7 +13298,7 @@
           <a:noFill/>
         </p:spPr>
         <p:txBody>
-          <a:bodyPr wrap="square" lIns="0" tIns="0" rIns="0" bIns="0">
+          <a:bodyPr wrap="square" lIns="0" rIns="0" tIns="0" bIns="0">
             <a:spAutoFit/>
           </a:bodyPr>
           <a:lstStyle/>
@@ -13480,7 +13368,6 @@
           <a:lstStyle/>
           <a:p>
             <a:pPr algn="ctr"/>
-            <a:endParaRPr/>
           </a:p>
         </p:txBody>
       </p:sp>
@@ -13501,7 +13388,7 @@
           <a:noFill/>
         </p:spPr>
         <p:txBody>
-          <a:bodyPr wrap="square" lIns="0" tIns="0" rIns="0" bIns="0">
+          <a:bodyPr wrap="square" lIns="0" rIns="0" tIns="0" bIns="0">
             <a:spAutoFit/>
           </a:bodyPr>
           <a:lstStyle/>
@@ -13543,7 +13430,7 @@
           <a:noFill/>
         </p:spPr>
         <p:txBody>
-          <a:bodyPr wrap="square" lIns="0" tIns="0" rIns="0" bIns="0">
+          <a:bodyPr wrap="square" lIns="0" rIns="0" tIns="0" bIns="0">
             <a:spAutoFit/>
           </a:bodyPr>
           <a:lstStyle/>
@@ -13585,7 +13472,7 @@
           <a:noFill/>
         </p:spPr>
         <p:txBody>
-          <a:bodyPr wrap="square" lIns="0" tIns="0" rIns="0" bIns="0">
+          <a:bodyPr wrap="square" lIns="0" rIns="0" tIns="0" bIns="0">
             <a:spAutoFit/>
           </a:bodyPr>
           <a:lstStyle/>
@@ -13627,7 +13514,7 @@
           <a:noFill/>
         </p:spPr>
         <p:txBody>
-          <a:bodyPr wrap="square" lIns="0" tIns="0" rIns="0" bIns="0">
+          <a:bodyPr wrap="square" lIns="0" rIns="0" tIns="0" bIns="0">
             <a:spAutoFit/>
           </a:bodyPr>
           <a:lstStyle/>
@@ -13695,7 +13582,6 @@
           <a:lstStyle/>
           <a:p>
             <a:pPr algn="ctr"/>
-            <a:endParaRPr/>
           </a:p>
         </p:txBody>
       </p:sp>
@@ -13716,7 +13602,7 @@
           <a:noFill/>
         </p:spPr>
         <p:txBody>
-          <a:bodyPr wrap="square" lIns="0" tIns="0" rIns="0" bIns="0">
+          <a:bodyPr wrap="square" lIns="0" rIns="0" tIns="0" bIns="0">
             <a:spAutoFit/>
           </a:bodyPr>
           <a:lstStyle/>
@@ -13758,7 +13644,7 @@
           <a:noFill/>
         </p:spPr>
         <p:txBody>
-          <a:bodyPr wrap="square" lIns="0" tIns="0" rIns="0" bIns="0">
+          <a:bodyPr wrap="square" lIns="0" rIns="0" tIns="0" bIns="0">
             <a:spAutoFit/>
           </a:bodyPr>
           <a:lstStyle/>
@@ -13800,7 +13686,7 @@
           <a:noFill/>
         </p:spPr>
         <p:txBody>
-          <a:bodyPr wrap="square" lIns="0" tIns="0" rIns="0" bIns="0">
+          <a:bodyPr wrap="square" lIns="0" rIns="0" tIns="0" bIns="0">
             <a:spAutoFit/>
           </a:bodyPr>
           <a:lstStyle/>
@@ -13842,7 +13728,7 @@
           <a:noFill/>
         </p:spPr>
         <p:txBody>
-          <a:bodyPr wrap="square" lIns="0" tIns="0" rIns="0" bIns="0">
+          <a:bodyPr wrap="square" lIns="0" rIns="0" tIns="0" bIns="0">
             <a:spAutoFit/>
           </a:bodyPr>
           <a:lstStyle/>
@@ -13910,7 +13796,6 @@
           <a:lstStyle/>
           <a:p>
             <a:pPr algn="ctr"/>
-            <a:endParaRPr/>
           </a:p>
         </p:txBody>
       </p:sp>
@@ -13931,7 +13816,7 @@
           <a:noFill/>
         </p:spPr>
         <p:txBody>
-          <a:bodyPr wrap="square" lIns="0" tIns="0" rIns="0" bIns="0">
+          <a:bodyPr wrap="square" lIns="0" rIns="0" tIns="0" bIns="0">
             <a:spAutoFit/>
           </a:bodyPr>
           <a:lstStyle/>
@@ -13973,7 +13858,7 @@
           <a:noFill/>
         </p:spPr>
         <p:txBody>
-          <a:bodyPr wrap="square" lIns="0" tIns="0" rIns="0" bIns="0">
+          <a:bodyPr wrap="square" lIns="0" rIns="0" tIns="0" bIns="0">
             <a:spAutoFit/>
           </a:bodyPr>
           <a:lstStyle/>
@@ -14015,7 +13900,7 @@
           <a:noFill/>
         </p:spPr>
         <p:txBody>
-          <a:bodyPr wrap="square" lIns="0" tIns="0" rIns="0" bIns="0">
+          <a:bodyPr wrap="square" lIns="0" rIns="0" tIns="0" bIns="0">
             <a:spAutoFit/>
           </a:bodyPr>
           <a:lstStyle/>
@@ -14057,7 +13942,7 @@
           <a:noFill/>
         </p:spPr>
         <p:txBody>
-          <a:bodyPr wrap="square" lIns="0" tIns="0" rIns="0" bIns="0">
+          <a:bodyPr wrap="square" lIns="0" rIns="0" tIns="0" bIns="0">
             <a:spAutoFit/>
           </a:bodyPr>
           <a:lstStyle/>
@@ -14125,7 +14010,6 @@
           <a:lstStyle/>
           <a:p>
             <a:pPr algn="ctr"/>
-            <a:endParaRPr/>
           </a:p>
         </p:txBody>
       </p:sp>
@@ -14146,7 +14030,7 @@
           <a:noFill/>
         </p:spPr>
         <p:txBody>
-          <a:bodyPr wrap="square" lIns="0" tIns="0" rIns="0" bIns="0">
+          <a:bodyPr wrap="square" lIns="0" rIns="0" tIns="0" bIns="0">
             <a:spAutoFit/>
           </a:bodyPr>
           <a:lstStyle/>
@@ -14188,7 +14072,7 @@
           <a:noFill/>
         </p:spPr>
         <p:txBody>
-          <a:bodyPr wrap="square" lIns="0" tIns="0" rIns="0" bIns="0">
+          <a:bodyPr wrap="square" lIns="0" rIns="0" tIns="0" bIns="0">
             <a:spAutoFit/>
           </a:bodyPr>
           <a:lstStyle/>
@@ -14230,7 +14114,7 @@
           <a:noFill/>
         </p:spPr>
         <p:txBody>
-          <a:bodyPr wrap="square" lIns="0" tIns="0" rIns="0" bIns="0">
+          <a:bodyPr wrap="square" lIns="0" rIns="0" tIns="0" bIns="0">
             <a:spAutoFit/>
           </a:bodyPr>
           <a:lstStyle/>
@@ -14272,7 +14156,7 @@
           <a:noFill/>
         </p:spPr>
         <p:txBody>
-          <a:bodyPr wrap="square" lIns="0" tIns="0" rIns="0" bIns="0">
+          <a:bodyPr wrap="square" lIns="0" rIns="0" tIns="0" bIns="0">
             <a:spAutoFit/>
           </a:bodyPr>
           <a:lstStyle/>
@@ -14340,7 +14224,6 @@
           <a:lstStyle/>
           <a:p>
             <a:pPr algn="ctr"/>
-            <a:endParaRPr/>
           </a:p>
         </p:txBody>
       </p:sp>
@@ -14361,7 +14244,7 @@
           <a:noFill/>
         </p:spPr>
         <p:txBody>
-          <a:bodyPr wrap="square" lIns="0" tIns="0" rIns="0" bIns="0">
+          <a:bodyPr wrap="square" lIns="0" rIns="0" tIns="0" bIns="0">
             <a:spAutoFit/>
           </a:bodyPr>
           <a:lstStyle/>
@@ -14403,7 +14286,7 @@
           <a:noFill/>
         </p:spPr>
         <p:txBody>
-          <a:bodyPr wrap="square" lIns="0" tIns="0" rIns="0" bIns="0">
+          <a:bodyPr wrap="square" lIns="0" rIns="0" tIns="0" bIns="0">
             <a:spAutoFit/>
           </a:bodyPr>
           <a:lstStyle/>
@@ -14445,7 +14328,7 @@
           <a:noFill/>
         </p:spPr>
         <p:txBody>
-          <a:bodyPr wrap="square" lIns="0" tIns="0" rIns="0" bIns="0">
+          <a:bodyPr wrap="square" lIns="0" rIns="0" tIns="0" bIns="0">
             <a:spAutoFit/>
           </a:bodyPr>
           <a:lstStyle/>
@@ -14487,7 +14370,7 @@
           <a:noFill/>
         </p:spPr>
         <p:txBody>
-          <a:bodyPr wrap="square" lIns="0" tIns="0" rIns="0" bIns="0">
+          <a:bodyPr wrap="square" lIns="0" rIns="0" tIns="0" bIns="0">
             <a:spAutoFit/>
           </a:bodyPr>
           <a:lstStyle/>
@@ -14529,7 +14412,7 @@
           <a:noFill/>
         </p:spPr>
         <p:txBody>
-          <a:bodyPr wrap="square" lIns="0" tIns="0" rIns="0" bIns="0">
+          <a:bodyPr wrap="square" lIns="0" rIns="0" tIns="0" bIns="0">
             <a:spAutoFit/>
           </a:bodyPr>
           <a:lstStyle/>
@@ -14571,7 +14454,7 @@
           <a:noFill/>
         </p:spPr>
         <p:txBody>
-          <a:bodyPr wrap="square" lIns="0" tIns="0" rIns="0" bIns="0">
+          <a:bodyPr wrap="square" lIns="0" rIns="0" tIns="0" bIns="0">
             <a:spAutoFit/>
           </a:bodyPr>
           <a:lstStyle/>
@@ -14605,7 +14488,7 @@
 </file>
 
 <file path=ppt/slides/slide5.xml><?xml version="1.0" encoding="utf-8"?>
-<p:sld xmlns:a="http://schemas.openxmlformats.org/drawingml/2006/main" xmlns:r="http://schemas.openxmlformats.org/officeDocument/2006/relationships" xmlns:p="http://schemas.openxmlformats.org/presentationml/2006/main">
+<p:sld xmlns:a="http://schemas.openxmlformats.org/drawingml/2006/main" xmlns:p="http://schemas.openxmlformats.org/presentationml/2006/main" xmlns:r="http://schemas.openxmlformats.org/officeDocument/2006/relationships">
   <p:cSld>
     <p:spTree>
       <p:nvGrpSpPr>
@@ -14613,14 +14496,7 @@
         <p:cNvGrpSpPr/>
         <p:nvPr/>
       </p:nvGrpSpPr>
-      <p:grpSpPr>
-        <a:xfrm>
-          <a:off x="0" y="0"/>
-          <a:ext cx="0" cy="0"/>
-          <a:chOff x="0" y="0"/>
-          <a:chExt cx="0" cy="0"/>
-        </a:xfrm>
-      </p:grpSpPr>
+      <p:grpSpPr/>
       <p:sp>
         <p:nvSpPr>
           <p:cNvPr id="2" name="Rectangle 1"/>
@@ -14662,7 +14538,6 @@
           <a:lstStyle/>
           <a:p>
             <a:pPr algn="ctr"/>
-            <a:endParaRPr/>
           </a:p>
         </p:txBody>
       </p:sp>
@@ -14683,7 +14558,7 @@
           <a:noFill/>
         </p:spPr>
         <p:txBody>
-          <a:bodyPr wrap="square" lIns="0" tIns="0" rIns="0" bIns="0">
+          <a:bodyPr wrap="square" lIns="0" rIns="0" tIns="0" bIns="0">
             <a:spAutoFit/>
           </a:bodyPr>
           <a:lstStyle/>
@@ -14725,7 +14600,7 @@
           <a:noFill/>
         </p:spPr>
         <p:txBody>
-          <a:bodyPr wrap="square" lIns="0" tIns="0" rIns="0" bIns="0">
+          <a:bodyPr wrap="square" lIns="0" rIns="0" tIns="0" bIns="0">
             <a:spAutoFit/>
           </a:bodyPr>
           <a:lstStyle/>
@@ -14795,7 +14670,6 @@
           <a:lstStyle/>
           <a:p>
             <a:pPr algn="ctr"/>
-            <a:endParaRPr/>
           </a:p>
         </p:txBody>
       </p:sp>
@@ -14816,7 +14690,7 @@
           <a:noFill/>
         </p:spPr>
         <p:txBody>
-          <a:bodyPr wrap="square" lIns="0" tIns="0" rIns="0" bIns="0">
+          <a:bodyPr wrap="square" lIns="0" rIns="0" tIns="0" bIns="0">
             <a:spAutoFit/>
           </a:bodyPr>
           <a:lstStyle/>
@@ -14858,7 +14732,7 @@
           <a:noFill/>
         </p:spPr>
         <p:txBody>
-          <a:bodyPr wrap="square" lIns="0" tIns="0" rIns="0" bIns="0">
+          <a:bodyPr wrap="square" lIns="0" rIns="0" tIns="0" bIns="0">
             <a:spAutoFit/>
           </a:bodyPr>
           <a:lstStyle/>
@@ -14938,7 +14812,7 @@
           <a:noFill/>
         </p:spPr>
         <p:txBody>
-          <a:bodyPr wrap="square" lIns="0" tIns="0" rIns="0" bIns="0">
+          <a:bodyPr wrap="square" lIns="0" rIns="0" tIns="0" bIns="0">
             <a:spAutoFit/>
           </a:bodyPr>
           <a:lstStyle/>
@@ -15009,7 +14883,6 @@
           <a:lstStyle/>
           <a:p>
             <a:pPr algn="ctr"/>
-            <a:endParaRPr/>
           </a:p>
         </p:txBody>
       </p:sp>
@@ -15030,7 +14903,7 @@
           <a:noFill/>
         </p:spPr>
         <p:txBody>
-          <a:bodyPr wrap="square" lIns="0" tIns="0" rIns="0" bIns="0">
+          <a:bodyPr wrap="square" lIns="0" rIns="0" tIns="0" bIns="0">
             <a:spAutoFit/>
           </a:bodyPr>
           <a:lstStyle/>
@@ -15072,7 +14945,7 @@
           <a:noFill/>
         </p:spPr>
         <p:txBody>
-          <a:bodyPr wrap="square" lIns="0" tIns="0" rIns="0" bIns="0">
+          <a:bodyPr wrap="square" lIns="0" rIns="0" tIns="0" bIns="0">
             <a:spAutoFit/>
           </a:bodyPr>
           <a:lstStyle/>
@@ -15115,7 +14988,7 @@
           <a:noFill/>
         </p:spPr>
         <p:txBody>
-          <a:bodyPr wrap="square" lIns="0" tIns="0" rIns="0" bIns="0">
+          <a:bodyPr wrap="square" lIns="0" rIns="0" tIns="0" bIns="0">
             <a:spAutoFit/>
           </a:bodyPr>
           <a:lstStyle/>
@@ -15185,7 +15058,6 @@
           <a:lstStyle/>
           <a:p>
             <a:pPr algn="ctr"/>
-            <a:endParaRPr/>
           </a:p>
         </p:txBody>
       </p:sp>
@@ -15206,7 +15078,7 @@
           <a:noFill/>
         </p:spPr>
         <p:txBody>
-          <a:bodyPr wrap="square" lIns="0" tIns="0" rIns="0" bIns="0">
+          <a:bodyPr wrap="square" lIns="0" rIns="0" tIns="0" bIns="0">
             <a:spAutoFit/>
           </a:bodyPr>
           <a:lstStyle/>
@@ -15248,7 +15120,7 @@
           <a:noFill/>
         </p:spPr>
         <p:txBody>
-          <a:bodyPr wrap="square" lIns="0" tIns="0" rIns="0" bIns="0">
+          <a:bodyPr wrap="square" lIns="0" rIns="0" tIns="0" bIns="0">
             <a:spAutoFit/>
           </a:bodyPr>
           <a:lstStyle/>
@@ -15291,7 +15163,7 @@
           <a:noFill/>
         </p:spPr>
         <p:txBody>
-          <a:bodyPr wrap="square" lIns="0" tIns="0" rIns="0" bIns="0">
+          <a:bodyPr wrap="square" lIns="0" rIns="0" tIns="0" bIns="0">
             <a:spAutoFit/>
           </a:bodyPr>
           <a:lstStyle/>
@@ -15361,7 +15233,6 @@
           <a:lstStyle/>
           <a:p>
             <a:pPr algn="ctr"/>
-            <a:endParaRPr/>
           </a:p>
         </p:txBody>
       </p:sp>
@@ -15382,7 +15253,7 @@
           <a:noFill/>
         </p:spPr>
         <p:txBody>
-          <a:bodyPr wrap="square" lIns="0" tIns="0" rIns="0" bIns="0">
+          <a:bodyPr wrap="square" lIns="0" rIns="0" tIns="0" bIns="0">
             <a:spAutoFit/>
           </a:bodyPr>
           <a:lstStyle/>
@@ -15424,7 +15295,7 @@
           <a:noFill/>
         </p:spPr>
         <p:txBody>
-          <a:bodyPr wrap="square" lIns="0" tIns="0" rIns="0" bIns="0">
+          <a:bodyPr wrap="square" lIns="0" rIns="0" tIns="0" bIns="0">
             <a:spAutoFit/>
           </a:bodyPr>
           <a:lstStyle/>
@@ -15467,7 +15338,7 @@
           <a:noFill/>
         </p:spPr>
         <p:txBody>
-          <a:bodyPr wrap="square" lIns="0" tIns="0" rIns="0" bIns="0">
+          <a:bodyPr wrap="square" lIns="0" rIns="0" tIns="0" bIns="0">
             <a:spAutoFit/>
           </a:bodyPr>
           <a:lstStyle/>
@@ -15537,7 +15408,6 @@
           <a:lstStyle/>
           <a:p>
             <a:pPr algn="ctr"/>
-            <a:endParaRPr/>
           </a:p>
         </p:txBody>
       </p:sp>
@@ -15558,7 +15428,7 @@
           <a:noFill/>
         </p:spPr>
         <p:txBody>
-          <a:bodyPr wrap="square" lIns="0" tIns="0" rIns="0" bIns="0">
+          <a:bodyPr wrap="square" lIns="0" rIns="0" tIns="0" bIns="0">
             <a:spAutoFit/>
           </a:bodyPr>
           <a:lstStyle/>
@@ -15600,7 +15470,7 @@
           <a:noFill/>
         </p:spPr>
         <p:txBody>
-          <a:bodyPr wrap="square" lIns="0" tIns="0" rIns="0" bIns="0">
+          <a:bodyPr wrap="square" lIns="0" rIns="0" tIns="0" bIns="0">
             <a:spAutoFit/>
           </a:bodyPr>
           <a:lstStyle/>
@@ -15643,7 +15513,7 @@
           <a:noFill/>
         </p:spPr>
         <p:txBody>
-          <a:bodyPr wrap="square" lIns="0" tIns="0" rIns="0" bIns="0">
+          <a:bodyPr wrap="square" lIns="0" rIns="0" tIns="0" bIns="0">
             <a:spAutoFit/>
           </a:bodyPr>
           <a:lstStyle/>
@@ -15711,7 +15581,6 @@
           <a:lstStyle/>
           <a:p>
             <a:pPr algn="ctr"/>
-            <a:endParaRPr/>
           </a:p>
         </p:txBody>
       </p:sp>
@@ -15732,7 +15601,7 @@
           <a:noFill/>
         </p:spPr>
         <p:txBody>
-          <a:bodyPr wrap="square" lIns="0" tIns="0" rIns="0" bIns="0">
+          <a:bodyPr wrap="square" lIns="0" rIns="0" tIns="0" bIns="0">
             <a:spAutoFit/>
           </a:bodyPr>
           <a:lstStyle/>
@@ -15774,7 +15643,7 @@
           <a:noFill/>
         </p:spPr>
         <p:txBody>
-          <a:bodyPr wrap="square" lIns="0" tIns="0" rIns="0" bIns="0">
+          <a:bodyPr wrap="square" lIns="0" rIns="0" tIns="0" bIns="0">
             <a:spAutoFit/>
           </a:bodyPr>
           <a:lstStyle/>
@@ -15816,7 +15685,7 @@
           <a:noFill/>
         </p:spPr>
         <p:txBody>
-          <a:bodyPr wrap="square" lIns="0" tIns="0" rIns="0" bIns="0">
+          <a:bodyPr wrap="square" lIns="0" rIns="0" tIns="0" bIns="0">
             <a:spAutoFit/>
           </a:bodyPr>
           <a:lstStyle/>
@@ -15850,7 +15719,7 @@
 </file>
 
 <file path=ppt/slides/slide6.xml><?xml version="1.0" encoding="utf-8"?>
-<p:sld xmlns:a="http://schemas.openxmlformats.org/drawingml/2006/main" xmlns:r="http://schemas.openxmlformats.org/officeDocument/2006/relationships" xmlns:p="http://schemas.openxmlformats.org/presentationml/2006/main">
+<p:sld xmlns:a="http://schemas.openxmlformats.org/drawingml/2006/main" xmlns:p="http://schemas.openxmlformats.org/presentationml/2006/main" xmlns:r="http://schemas.openxmlformats.org/officeDocument/2006/relationships">
   <p:cSld>
     <p:spTree>
       <p:nvGrpSpPr>
@@ -15858,14 +15727,7 @@
         <p:cNvGrpSpPr/>
         <p:nvPr/>
       </p:nvGrpSpPr>
-      <p:grpSpPr>
-        <a:xfrm>
-          <a:off x="0" y="0"/>
-          <a:ext cx="0" cy="0"/>
-          <a:chOff x="0" y="0"/>
-          <a:chExt cx="0" cy="0"/>
-        </a:xfrm>
-      </p:grpSpPr>
+      <p:grpSpPr/>
       <p:sp>
         <p:nvSpPr>
           <p:cNvPr id="2" name="Rectangle 1"/>
@@ -15907,7 +15769,6 @@
           <a:lstStyle/>
           <a:p>
             <a:pPr algn="ctr"/>
-            <a:endParaRPr/>
           </a:p>
         </p:txBody>
       </p:sp>
@@ -15928,7 +15789,7 @@
           <a:noFill/>
         </p:spPr>
         <p:txBody>
-          <a:bodyPr wrap="square" lIns="0" tIns="0" rIns="0" bIns="0">
+          <a:bodyPr wrap="square" lIns="0" rIns="0" tIns="0" bIns="0">
             <a:spAutoFit/>
           </a:bodyPr>
           <a:lstStyle/>
@@ -15970,7 +15831,7 @@
           <a:noFill/>
         </p:spPr>
         <p:txBody>
-          <a:bodyPr wrap="square" lIns="0" tIns="0" rIns="0" bIns="0">
+          <a:bodyPr wrap="square" lIns="0" rIns="0" tIns="0" bIns="0">
             <a:spAutoFit/>
           </a:bodyPr>
           <a:lstStyle/>
@@ -16040,7 +15901,6 @@
           <a:lstStyle/>
           <a:p>
             <a:pPr algn="ctr"/>
-            <a:endParaRPr/>
           </a:p>
         </p:txBody>
       </p:sp>
@@ -16061,7 +15921,7 @@
           <a:noFill/>
         </p:spPr>
         <p:txBody>
-          <a:bodyPr wrap="square" lIns="0" tIns="0" rIns="0" bIns="0">
+          <a:bodyPr wrap="square" lIns="0" rIns="0" tIns="0" bIns="0">
             <a:spAutoFit/>
           </a:bodyPr>
           <a:lstStyle/>
@@ -16129,7 +15989,6 @@
           <a:lstStyle/>
           <a:p>
             <a:pPr algn="ctr"/>
-            <a:endParaRPr/>
           </a:p>
         </p:txBody>
       </p:sp>
@@ -16150,7 +16009,7 @@
           <a:noFill/>
         </p:spPr>
         <p:txBody>
-          <a:bodyPr wrap="square" lIns="0" tIns="0" rIns="0" bIns="0">
+          <a:bodyPr wrap="square" lIns="0" rIns="0" tIns="0" bIns="0">
             <a:spAutoFit/>
           </a:bodyPr>
           <a:lstStyle/>
@@ -16192,7 +16051,7 @@
           <a:noFill/>
         </p:spPr>
         <p:txBody>
-          <a:bodyPr wrap="square" lIns="0" tIns="0" rIns="0" bIns="0">
+          <a:bodyPr wrap="square" lIns="0" rIns="0" tIns="0" bIns="0">
             <a:spAutoFit/>
           </a:bodyPr>
           <a:lstStyle/>
@@ -16234,7 +16093,7 @@
           <a:noFill/>
         </p:spPr>
         <p:txBody>
-          <a:bodyPr wrap="square" lIns="0" tIns="0" rIns="0" bIns="0">
+          <a:bodyPr wrap="square" lIns="0" rIns="0" tIns="0" bIns="0">
             <a:spAutoFit/>
           </a:bodyPr>
           <a:lstStyle/>
@@ -16276,20 +16135,28 @@
           <a:noFill/>
         </p:spPr>
         <p:txBody>
-          <a:bodyPr wrap="square" lIns="0" tIns="0" rIns="0" bIns="0">
-            <a:spAutoFit/>
-          </a:bodyPr>
-          <a:lstStyle/>
-          <a:p>
-            <a:pPr algn="l">
-              <a:lnSpc>
-                <a:spcPct val="125000"/>
-              </a:lnSpc>
-              <a:spcAft>
-                <a:spcPts val="600"/>
-              </a:spcAft>
-            </a:pPr>
-            <a:endParaRPr/>
+          <a:bodyPr wrap="square" lIns="0" rIns="0" tIns="0" bIns="0">
+            <a:spAutoFit/>
+          </a:bodyPr>
+          <a:lstStyle/>
+          <a:p>
+            <a:pPr algn="l">
+              <a:lnSpc>
+                <a:spcPct val="125000"/>
+              </a:lnSpc>
+              <a:spcAft>
+                <a:spcPts val="600"/>
+              </a:spcAft>
+            </a:pPr>
+            <a:r>
+              <a:rPr sz="1200" b="0">
+                <a:solidFill>
+                  <a:srgbClr val="8B99A8"/>
+                </a:solidFill>
+                <a:latin typeface="Helvetica Neue"/>
+              </a:rPr>
+              <a:t/>
+            </a:r>
           </a:p>
         </p:txBody>
       </p:sp>
@@ -16336,7 +16203,6 @@
           <a:lstStyle/>
           <a:p>
             <a:pPr algn="ctr"/>
-            <a:endParaRPr/>
           </a:p>
         </p:txBody>
       </p:sp>
@@ -16357,7 +16223,7 @@
           <a:noFill/>
         </p:spPr>
         <p:txBody>
-          <a:bodyPr wrap="square" lIns="0" tIns="0" rIns="0" bIns="0">
+          <a:bodyPr wrap="square" lIns="0" rIns="0" tIns="0" bIns="0">
             <a:spAutoFit/>
           </a:bodyPr>
           <a:lstStyle/>
@@ -16399,7 +16265,7 @@
           <a:noFill/>
         </p:spPr>
         <p:txBody>
-          <a:bodyPr wrap="square" lIns="0" tIns="0" rIns="0" bIns="0">
+          <a:bodyPr wrap="square" lIns="0" rIns="0" tIns="0" bIns="0">
             <a:spAutoFit/>
           </a:bodyPr>
           <a:lstStyle/>
@@ -16441,7 +16307,7 @@
           <a:noFill/>
         </p:spPr>
         <p:txBody>
-          <a:bodyPr wrap="square" lIns="0" tIns="0" rIns="0" bIns="0">
+          <a:bodyPr wrap="square" lIns="0" rIns="0" tIns="0" bIns="0">
             <a:spAutoFit/>
           </a:bodyPr>
           <a:lstStyle/>
@@ -16483,7 +16349,7 @@
           <a:noFill/>
         </p:spPr>
         <p:txBody>
-          <a:bodyPr wrap="square" lIns="0" tIns="0" rIns="0" bIns="0">
+          <a:bodyPr wrap="square" lIns="0" rIns="0" tIns="0" bIns="0">
             <a:spAutoFit/>
           </a:bodyPr>
           <a:lstStyle/>
@@ -16551,7 +16417,6 @@
           <a:lstStyle/>
           <a:p>
             <a:pPr algn="ctr"/>
-            <a:endParaRPr/>
           </a:p>
         </p:txBody>
       </p:sp>
@@ -16572,7 +16437,7 @@
           <a:noFill/>
         </p:spPr>
         <p:txBody>
-          <a:bodyPr wrap="square" lIns="0" tIns="0" rIns="0" bIns="0">
+          <a:bodyPr wrap="square" lIns="0" rIns="0" tIns="0" bIns="0">
             <a:spAutoFit/>
           </a:bodyPr>
           <a:lstStyle/>
@@ -16614,7 +16479,7 @@
           <a:noFill/>
         </p:spPr>
         <p:txBody>
-          <a:bodyPr wrap="square" lIns="0" tIns="0" rIns="0" bIns="0">
+          <a:bodyPr wrap="square" lIns="0" rIns="0" tIns="0" bIns="0">
             <a:spAutoFit/>
           </a:bodyPr>
           <a:lstStyle/>
@@ -16656,7 +16521,7 @@
           <a:noFill/>
         </p:spPr>
         <p:txBody>
-          <a:bodyPr wrap="square" lIns="0" tIns="0" rIns="0" bIns="0">
+          <a:bodyPr wrap="square" lIns="0" rIns="0" tIns="0" bIns="0">
             <a:spAutoFit/>
           </a:bodyPr>
           <a:lstStyle/>
@@ -16698,7 +16563,7 @@
           <a:noFill/>
         </p:spPr>
         <p:txBody>
-          <a:bodyPr wrap="square" lIns="0" tIns="0" rIns="0" bIns="0">
+          <a:bodyPr wrap="square" lIns="0" rIns="0" tIns="0" bIns="0">
             <a:spAutoFit/>
           </a:bodyPr>
           <a:lstStyle/>
@@ -16766,7 +16631,6 @@
           <a:lstStyle/>
           <a:p>
             <a:pPr algn="ctr"/>
-            <a:endParaRPr/>
           </a:p>
         </p:txBody>
       </p:sp>
@@ -16787,7 +16651,7 @@
           <a:noFill/>
         </p:spPr>
         <p:txBody>
-          <a:bodyPr wrap="square" lIns="0" tIns="0" rIns="0" bIns="0">
+          <a:bodyPr wrap="square" lIns="0" rIns="0" tIns="0" bIns="0">
             <a:spAutoFit/>
           </a:bodyPr>
           <a:lstStyle/>
@@ -16829,7 +16693,7 @@
           <a:noFill/>
         </p:spPr>
         <p:txBody>
-          <a:bodyPr wrap="square" lIns="0" tIns="0" rIns="0" bIns="0">
+          <a:bodyPr wrap="square" lIns="0" rIns="0" tIns="0" bIns="0">
             <a:spAutoFit/>
           </a:bodyPr>
           <a:lstStyle/>
@@ -16871,7 +16735,7 @@
           <a:noFill/>
         </p:spPr>
         <p:txBody>
-          <a:bodyPr wrap="square" lIns="0" tIns="0" rIns="0" bIns="0">
+          <a:bodyPr wrap="square" lIns="0" rIns="0" tIns="0" bIns="0">
             <a:spAutoFit/>
           </a:bodyPr>
           <a:lstStyle/>
@@ -16913,7 +16777,7 @@
           <a:noFill/>
         </p:spPr>
         <p:txBody>
-          <a:bodyPr wrap="square" lIns="0" tIns="0" rIns="0" bIns="0">
+          <a:bodyPr wrap="square" lIns="0" rIns="0" tIns="0" bIns="0">
             <a:spAutoFit/>
           </a:bodyPr>
           <a:lstStyle/>
@@ -16981,7 +16845,6 @@
           <a:lstStyle/>
           <a:p>
             <a:pPr algn="ctr"/>
-            <a:endParaRPr/>
           </a:p>
         </p:txBody>
       </p:sp>
@@ -17002,7 +16865,7 @@
           <a:noFill/>
         </p:spPr>
         <p:txBody>
-          <a:bodyPr wrap="square" lIns="0" tIns="0" rIns="0" bIns="0">
+          <a:bodyPr wrap="square" lIns="0" rIns="0" tIns="0" bIns="0">
             <a:spAutoFit/>
           </a:bodyPr>
           <a:lstStyle/>
@@ -17044,7 +16907,7 @@
           <a:noFill/>
         </p:spPr>
         <p:txBody>
-          <a:bodyPr wrap="square" lIns="0" tIns="0" rIns="0" bIns="0">
+          <a:bodyPr wrap="square" lIns="0" rIns="0" tIns="0" bIns="0">
             <a:spAutoFit/>
           </a:bodyPr>
           <a:lstStyle/>
@@ -17086,7 +16949,7 @@
           <a:noFill/>
         </p:spPr>
         <p:txBody>
-          <a:bodyPr wrap="square" lIns="0" tIns="0" rIns="0" bIns="0">
+          <a:bodyPr wrap="square" lIns="0" rIns="0" tIns="0" bIns="0">
             <a:spAutoFit/>
           </a:bodyPr>
           <a:lstStyle/>
@@ -17128,7 +16991,7 @@
           <a:noFill/>
         </p:spPr>
         <p:txBody>
-          <a:bodyPr wrap="square" lIns="0" tIns="0" rIns="0" bIns="0">
+          <a:bodyPr wrap="square" lIns="0" rIns="0" tIns="0" bIns="0">
             <a:spAutoFit/>
           </a:bodyPr>
           <a:lstStyle/>
@@ -17196,7 +17059,6 @@
           <a:lstStyle/>
           <a:p>
             <a:pPr algn="ctr"/>
-            <a:endParaRPr/>
           </a:p>
         </p:txBody>
       </p:sp>
@@ -17217,7 +17079,7 @@
           <a:noFill/>
         </p:spPr>
         <p:txBody>
-          <a:bodyPr wrap="square" lIns="0" tIns="0" rIns="0" bIns="0">
+          <a:bodyPr wrap="square" lIns="0" rIns="0" tIns="0" bIns="0">
             <a:spAutoFit/>
           </a:bodyPr>
           <a:lstStyle/>
@@ -17259,7 +17121,7 @@
           <a:noFill/>
         </p:spPr>
         <p:txBody>
-          <a:bodyPr wrap="square" lIns="0" tIns="0" rIns="0" bIns="0">
+          <a:bodyPr wrap="square" lIns="0" rIns="0" tIns="0" bIns="0">
             <a:spAutoFit/>
           </a:bodyPr>
           <a:lstStyle/>
@@ -17301,7 +17163,7 @@
           <a:noFill/>
         </p:spPr>
         <p:txBody>
-          <a:bodyPr wrap="square" lIns="0" tIns="0" rIns="0" bIns="0">
+          <a:bodyPr wrap="square" lIns="0" rIns="0" tIns="0" bIns="0">
             <a:spAutoFit/>
           </a:bodyPr>
           <a:lstStyle/>
@@ -17343,7 +17205,7 @@
           <a:noFill/>
         </p:spPr>
         <p:txBody>
-          <a:bodyPr wrap="square" lIns="0" tIns="0" rIns="0" bIns="0">
+          <a:bodyPr wrap="square" lIns="0" rIns="0" tIns="0" bIns="0">
             <a:spAutoFit/>
           </a:bodyPr>
           <a:lstStyle/>
@@ -17411,7 +17273,6 @@
           <a:lstStyle/>
           <a:p>
             <a:pPr algn="ctr"/>
-            <a:endParaRPr/>
           </a:p>
         </p:txBody>
       </p:sp>
@@ -17432,7 +17293,7 @@
           <a:noFill/>
         </p:spPr>
         <p:txBody>
-          <a:bodyPr wrap="square" lIns="0" tIns="0" rIns="0" bIns="0">
+          <a:bodyPr wrap="square" lIns="0" rIns="0" tIns="0" bIns="0">
             <a:spAutoFit/>
           </a:bodyPr>
           <a:lstStyle/>
@@ -17474,7 +17335,7 @@
           <a:noFill/>
         </p:spPr>
         <p:txBody>
-          <a:bodyPr wrap="square" lIns="0" tIns="0" rIns="0" bIns="0">
+          <a:bodyPr wrap="square" lIns="0" rIns="0" tIns="0" bIns="0">
             <a:spAutoFit/>
           </a:bodyPr>
           <a:lstStyle/>
@@ -17516,7 +17377,7 @@
           <a:noFill/>
         </p:spPr>
         <p:txBody>
-          <a:bodyPr wrap="square" lIns="0" tIns="0" rIns="0" bIns="0">
+          <a:bodyPr wrap="square" lIns="0" rIns="0" tIns="0" bIns="0">
             <a:spAutoFit/>
           </a:bodyPr>
           <a:lstStyle/>
@@ -17558,7 +17419,7 @@
           <a:noFill/>
         </p:spPr>
         <p:txBody>
-          <a:bodyPr wrap="square" lIns="0" tIns="0" rIns="0" bIns="0">
+          <a:bodyPr wrap="square" lIns="0" rIns="0" tIns="0" bIns="0">
             <a:spAutoFit/>
           </a:bodyPr>
           <a:lstStyle/>
@@ -17626,7 +17487,6 @@
           <a:lstStyle/>
           <a:p>
             <a:pPr algn="ctr"/>
-            <a:endParaRPr/>
           </a:p>
         </p:txBody>
       </p:sp>
@@ -17647,7 +17507,7 @@
           <a:noFill/>
         </p:spPr>
         <p:txBody>
-          <a:bodyPr wrap="square" lIns="0" tIns="0" rIns="0" bIns="0">
+          <a:bodyPr wrap="square" lIns="0" rIns="0" tIns="0" bIns="0">
             <a:spAutoFit/>
           </a:bodyPr>
           <a:lstStyle/>
@@ -17689,7 +17549,7 @@
           <a:noFill/>
         </p:spPr>
         <p:txBody>
-          <a:bodyPr wrap="square" lIns="0" tIns="0" rIns="0" bIns="0">
+          <a:bodyPr wrap="square" lIns="0" rIns="0" tIns="0" bIns="0">
             <a:spAutoFit/>
           </a:bodyPr>
           <a:lstStyle/>
@@ -17731,7 +17591,7 @@
           <a:noFill/>
         </p:spPr>
         <p:txBody>
-          <a:bodyPr wrap="square" lIns="0" tIns="0" rIns="0" bIns="0">
+          <a:bodyPr wrap="square" lIns="0" rIns="0" tIns="0" bIns="0">
             <a:spAutoFit/>
           </a:bodyPr>
           <a:lstStyle/>
@@ -17773,7 +17633,7 @@
           <a:noFill/>
         </p:spPr>
         <p:txBody>
-          <a:bodyPr wrap="square" lIns="0" tIns="0" rIns="0" bIns="0">
+          <a:bodyPr wrap="square" lIns="0" rIns="0" tIns="0" bIns="0">
             <a:spAutoFit/>
           </a:bodyPr>
           <a:lstStyle/>
@@ -17815,7 +17675,7 @@
           <a:noFill/>
         </p:spPr>
         <p:txBody>
-          <a:bodyPr wrap="square" lIns="0" tIns="0" rIns="0" bIns="0">
+          <a:bodyPr wrap="square" lIns="0" rIns="0" tIns="0" bIns="0">
             <a:spAutoFit/>
           </a:bodyPr>
           <a:lstStyle/>
@@ -17857,7 +17717,7 @@
           <a:noFill/>
         </p:spPr>
         <p:txBody>
-          <a:bodyPr wrap="square" lIns="0" tIns="0" rIns="0" bIns="0">
+          <a:bodyPr wrap="square" lIns="0" rIns="0" tIns="0" bIns="0">
             <a:spAutoFit/>
           </a:bodyPr>
           <a:lstStyle/>
@@ -17891,7 +17751,7 @@
 </file>
 
 <file path=ppt/slides/slide7.xml><?xml version="1.0" encoding="utf-8"?>
-<p:sld xmlns:a="http://schemas.openxmlformats.org/drawingml/2006/main" xmlns:r="http://schemas.openxmlformats.org/officeDocument/2006/relationships" xmlns:p="http://schemas.openxmlformats.org/presentationml/2006/main">
+<p:sld xmlns:a="http://schemas.openxmlformats.org/drawingml/2006/main" xmlns:p="http://schemas.openxmlformats.org/presentationml/2006/main" xmlns:r="http://schemas.openxmlformats.org/officeDocument/2006/relationships">
   <p:cSld>
     <p:spTree>
       <p:nvGrpSpPr>
@@ -17899,14 +17759,7 @@
         <p:cNvGrpSpPr/>
         <p:nvPr/>
       </p:nvGrpSpPr>
-      <p:grpSpPr>
-        <a:xfrm>
-          <a:off x="0" y="0"/>
-          <a:ext cx="0" cy="0"/>
-          <a:chOff x="0" y="0"/>
-          <a:chExt cx="0" cy="0"/>
-        </a:xfrm>
-      </p:grpSpPr>
+      <p:grpSpPr/>
       <p:sp>
         <p:nvSpPr>
           <p:cNvPr id="2" name="Rectangle 1"/>
@@ -17948,7 +17801,6 @@
           <a:lstStyle/>
           <a:p>
             <a:pPr algn="ctr"/>
-            <a:endParaRPr/>
           </a:p>
         </p:txBody>
       </p:sp>
@@ -17969,7 +17821,7 @@
           <a:noFill/>
         </p:spPr>
         <p:txBody>
-          <a:bodyPr wrap="square" lIns="0" tIns="0" rIns="0" bIns="0">
+          <a:bodyPr wrap="square" lIns="0" rIns="0" tIns="0" bIns="0">
             <a:spAutoFit/>
           </a:bodyPr>
           <a:lstStyle/>
@@ -18011,7 +17863,7 @@
           <a:noFill/>
         </p:spPr>
         <p:txBody>
-          <a:bodyPr wrap="square" lIns="0" tIns="0" rIns="0" bIns="0">
+          <a:bodyPr wrap="square" lIns="0" rIns="0" tIns="0" bIns="0">
             <a:spAutoFit/>
           </a:bodyPr>
           <a:lstStyle/>
@@ -18081,7 +17933,6 @@
           <a:lstStyle/>
           <a:p>
             <a:pPr algn="ctr"/>
-            <a:endParaRPr/>
           </a:p>
         </p:txBody>
       </p:sp>
@@ -18102,7 +17953,7 @@
           <a:noFill/>
         </p:spPr>
         <p:txBody>
-          <a:bodyPr wrap="square" lIns="0" tIns="0" rIns="0" bIns="0">
+          <a:bodyPr wrap="square" lIns="0" rIns="0" tIns="0" bIns="0">
             <a:spAutoFit/>
           </a:bodyPr>
           <a:lstStyle/>
@@ -18144,7 +17995,7 @@
           <a:noFill/>
         </p:spPr>
         <p:txBody>
-          <a:bodyPr wrap="square" lIns="0" tIns="0" rIns="0" bIns="0">
+          <a:bodyPr wrap="square" lIns="0" rIns="0" tIns="0" bIns="0">
             <a:spAutoFit/>
           </a:bodyPr>
           <a:lstStyle/>
@@ -18187,7 +18038,7 @@
           <a:noFill/>
         </p:spPr>
         <p:txBody>
-          <a:bodyPr wrap="square" lIns="0" tIns="0" rIns="0" bIns="0">
+          <a:bodyPr wrap="square" lIns="0" rIns="0" tIns="0" bIns="0">
             <a:spAutoFit/>
           </a:bodyPr>
           <a:lstStyle/>
@@ -18229,7 +18080,7 @@
           <a:noFill/>
         </p:spPr>
         <p:txBody>
-          <a:bodyPr wrap="square" lIns="0" tIns="0" rIns="0" bIns="0">
+          <a:bodyPr wrap="square" lIns="0" rIns="0" tIns="0" bIns="0">
             <a:spAutoFit/>
           </a:bodyPr>
           <a:lstStyle/>
@@ -18299,7 +18150,6 @@
           <a:lstStyle/>
           <a:p>
             <a:pPr algn="ctr"/>
-            <a:endParaRPr/>
           </a:p>
         </p:txBody>
       </p:sp>
@@ -18320,7 +18170,7 @@
           <a:noFill/>
         </p:spPr>
         <p:txBody>
-          <a:bodyPr wrap="square" lIns="0" tIns="0" rIns="0" bIns="0">
+          <a:bodyPr wrap="square" lIns="0" rIns="0" tIns="0" bIns="0">
             <a:spAutoFit/>
           </a:bodyPr>
           <a:lstStyle/>
@@ -18362,7 +18212,7 @@
           <a:noFill/>
         </p:spPr>
         <p:txBody>
-          <a:bodyPr wrap="square" lIns="0" tIns="0" rIns="0" bIns="0">
+          <a:bodyPr wrap="square" lIns="0" rIns="0" tIns="0" bIns="0">
             <a:spAutoFit/>
           </a:bodyPr>
           <a:lstStyle/>
@@ -18405,7 +18255,7 @@
           <a:noFill/>
         </p:spPr>
         <p:txBody>
-          <a:bodyPr wrap="square" lIns="0" tIns="0" rIns="0" bIns="0">
+          <a:bodyPr wrap="square" lIns="0" rIns="0" tIns="0" bIns="0">
             <a:spAutoFit/>
           </a:bodyPr>
           <a:lstStyle/>
@@ -18447,7 +18297,7 @@
           <a:noFill/>
         </p:spPr>
         <p:txBody>
-          <a:bodyPr wrap="square" lIns="0" tIns="0" rIns="0" bIns="0">
+          <a:bodyPr wrap="square" lIns="0" rIns="0" tIns="0" bIns="0">
             <a:spAutoFit/>
           </a:bodyPr>
           <a:lstStyle/>
@@ -18515,7 +18365,6 @@
           <a:lstStyle/>
           <a:p>
             <a:pPr algn="ctr"/>
-            <a:endParaRPr/>
           </a:p>
         </p:txBody>
       </p:sp>
@@ -18536,7 +18385,7 @@
           <a:noFill/>
         </p:spPr>
         <p:txBody>
-          <a:bodyPr wrap="square" lIns="0" tIns="0" rIns="0" bIns="0">
+          <a:bodyPr wrap="square" lIns="0" rIns="0" tIns="0" bIns="0">
             <a:spAutoFit/>
           </a:bodyPr>
           <a:lstStyle/>
@@ -18578,7 +18427,7 @@
           <a:noFill/>
         </p:spPr>
         <p:txBody>
-          <a:bodyPr wrap="square" lIns="0" tIns="0" rIns="0" bIns="0">
+          <a:bodyPr wrap="square" lIns="0" rIns="0" tIns="0" bIns="0">
             <a:spAutoFit/>
           </a:bodyPr>
           <a:lstStyle/>
@@ -18639,7 +18488,7 @@
           <a:noFill/>
         </p:spPr>
         <p:txBody>
-          <a:bodyPr wrap="square" lIns="0" tIns="0" rIns="0" bIns="0">
+          <a:bodyPr wrap="square" lIns="0" rIns="0" tIns="0" bIns="0">
             <a:spAutoFit/>
           </a:bodyPr>
           <a:lstStyle/>
@@ -18681,7 +18530,7 @@
           <a:noFill/>
         </p:spPr>
         <p:txBody>
-          <a:bodyPr wrap="square" lIns="0" tIns="0" rIns="0" bIns="0">
+          <a:bodyPr wrap="square" lIns="0" rIns="0" tIns="0" bIns="0">
             <a:spAutoFit/>
           </a:bodyPr>
           <a:lstStyle/>
@@ -18715,7 +18564,7 @@
 </file>
 
 <file path=ppt/slides/slide8.xml><?xml version="1.0" encoding="utf-8"?>
-<p:sld xmlns:a="http://schemas.openxmlformats.org/drawingml/2006/main" xmlns:r="http://schemas.openxmlformats.org/officeDocument/2006/relationships" xmlns:p="http://schemas.openxmlformats.org/presentationml/2006/main">
+<p:sld xmlns:a="http://schemas.openxmlformats.org/drawingml/2006/main" xmlns:p="http://schemas.openxmlformats.org/presentationml/2006/main" xmlns:r="http://schemas.openxmlformats.org/officeDocument/2006/relationships">
   <p:cSld>
     <p:spTree>
       <p:nvGrpSpPr>
@@ -18723,14 +18572,7 @@
         <p:cNvGrpSpPr/>
         <p:nvPr/>
       </p:nvGrpSpPr>
-      <p:grpSpPr>
-        <a:xfrm>
-          <a:off x="0" y="0"/>
-          <a:ext cx="0" cy="0"/>
-          <a:chOff x="0" y="0"/>
-          <a:chExt cx="0" cy="0"/>
-        </a:xfrm>
-      </p:grpSpPr>
+      <p:grpSpPr/>
       <p:sp>
         <p:nvSpPr>
           <p:cNvPr id="2" name="Rectangle 1"/>
@@ -18772,7 +18614,6 @@
           <a:lstStyle/>
           <a:p>
             <a:pPr algn="ctr"/>
-            <a:endParaRPr/>
           </a:p>
         </p:txBody>
       </p:sp>
@@ -18793,7 +18634,7 @@
           <a:noFill/>
         </p:spPr>
         <p:txBody>
-          <a:bodyPr wrap="square" lIns="0" tIns="0" rIns="0" bIns="0">
+          <a:bodyPr wrap="square" lIns="0" rIns="0" tIns="0" bIns="0">
             <a:spAutoFit/>
           </a:bodyPr>
           <a:lstStyle/>
@@ -18835,7 +18676,7 @@
           <a:noFill/>
         </p:spPr>
         <p:txBody>
-          <a:bodyPr wrap="square" lIns="0" tIns="0" rIns="0" bIns="0">
+          <a:bodyPr wrap="square" lIns="0" rIns="0" tIns="0" bIns="0">
             <a:spAutoFit/>
           </a:bodyPr>
           <a:lstStyle/>
@@ -18905,7 +18746,6 @@
           <a:lstStyle/>
           <a:p>
             <a:pPr algn="ctr"/>
-            <a:endParaRPr/>
           </a:p>
         </p:txBody>
       </p:sp>
@@ -18926,7 +18766,7 @@
           <a:noFill/>
         </p:spPr>
         <p:txBody>
-          <a:bodyPr wrap="square" lIns="0" tIns="0" rIns="0" bIns="0">
+          <a:bodyPr wrap="square" lIns="0" rIns="0" tIns="0" bIns="0">
             <a:spAutoFit/>
           </a:bodyPr>
           <a:lstStyle/>
@@ -18968,7 +18808,7 @@
           <a:noFill/>
         </p:spPr>
         <p:txBody>
-          <a:bodyPr wrap="square" lIns="0" tIns="0" rIns="0" bIns="0">
+          <a:bodyPr wrap="square" lIns="0" rIns="0" tIns="0" bIns="0">
             <a:spAutoFit/>
           </a:bodyPr>
           <a:lstStyle/>
@@ -19010,7 +18850,7 @@
           <a:noFill/>
         </p:spPr>
         <p:txBody>
-          <a:bodyPr wrap="square" lIns="0" tIns="0" rIns="0" bIns="0">
+          <a:bodyPr wrap="square" lIns="0" rIns="0" tIns="0" bIns="0">
             <a:spAutoFit/>
           </a:bodyPr>
           <a:lstStyle/>
@@ -19081,7 +18921,6 @@
           <a:lstStyle/>
           <a:p>
             <a:pPr algn="ctr"/>
-            <a:endParaRPr/>
           </a:p>
         </p:txBody>
       </p:sp>
@@ -19102,7 +18941,7 @@
           <a:noFill/>
         </p:spPr>
         <p:txBody>
-          <a:bodyPr wrap="square" lIns="0" tIns="0" rIns="0" bIns="0">
+          <a:bodyPr wrap="square" lIns="0" rIns="0" tIns="0" bIns="0">
             <a:spAutoFit/>
           </a:bodyPr>
           <a:lstStyle/>
@@ -19144,7 +18983,7 @@
           <a:noFill/>
         </p:spPr>
         <p:txBody>
-          <a:bodyPr wrap="square" lIns="0" tIns="0" rIns="0" bIns="0">
+          <a:bodyPr wrap="square" lIns="0" rIns="0" tIns="0" bIns="0">
             <a:spAutoFit/>
           </a:bodyPr>
           <a:lstStyle/>
@@ -19186,7 +19025,7 @@
           <a:noFill/>
         </p:spPr>
         <p:txBody>
-          <a:bodyPr wrap="square" lIns="0" tIns="0" rIns="0" bIns="0">
+          <a:bodyPr wrap="square" lIns="0" rIns="0" tIns="0" bIns="0">
             <a:spAutoFit/>
           </a:bodyPr>
           <a:lstStyle/>
@@ -19257,7 +19096,6 @@
           <a:lstStyle/>
           <a:p>
             <a:pPr algn="ctr"/>
-            <a:endParaRPr/>
           </a:p>
         </p:txBody>
       </p:sp>
@@ -19278,7 +19116,7 @@
           <a:noFill/>
         </p:spPr>
         <p:txBody>
-          <a:bodyPr wrap="square" lIns="0" tIns="0" rIns="0" bIns="0">
+          <a:bodyPr wrap="square" lIns="0" rIns="0" tIns="0" bIns="0">
             <a:spAutoFit/>
           </a:bodyPr>
           <a:lstStyle/>
@@ -19320,7 +19158,7 @@
           <a:noFill/>
         </p:spPr>
         <p:txBody>
-          <a:bodyPr wrap="square" lIns="0" tIns="0" rIns="0" bIns="0">
+          <a:bodyPr wrap="square" lIns="0" rIns="0" tIns="0" bIns="0">
             <a:spAutoFit/>
           </a:bodyPr>
           <a:lstStyle/>
@@ -19362,7 +19200,7 @@
           <a:noFill/>
         </p:spPr>
         <p:txBody>
-          <a:bodyPr wrap="square" lIns="0" tIns="0" rIns="0" bIns="0">
+          <a:bodyPr wrap="square" lIns="0" rIns="0" tIns="0" bIns="0">
             <a:spAutoFit/>
           </a:bodyPr>
           <a:lstStyle/>
@@ -19433,7 +19271,6 @@
           <a:lstStyle/>
           <a:p>
             <a:pPr algn="ctr"/>
-            <a:endParaRPr/>
           </a:p>
         </p:txBody>
       </p:sp>
@@ -19454,7 +19291,7 @@
           <a:noFill/>
         </p:spPr>
         <p:txBody>
-          <a:bodyPr wrap="square" lIns="0" tIns="0" rIns="0" bIns="0">
+          <a:bodyPr wrap="square" lIns="0" rIns="0" tIns="0" bIns="0">
             <a:spAutoFit/>
           </a:bodyPr>
           <a:lstStyle/>
@@ -19496,7 +19333,7 @@
           <a:noFill/>
         </p:spPr>
         <p:txBody>
-          <a:bodyPr wrap="square" lIns="0" tIns="0" rIns="0" bIns="0">
+          <a:bodyPr wrap="square" lIns="0" rIns="0" tIns="0" bIns="0">
             <a:spAutoFit/>
           </a:bodyPr>
           <a:lstStyle/>
@@ -19538,7 +19375,7 @@
           <a:noFill/>
         </p:spPr>
         <p:txBody>
-          <a:bodyPr wrap="square" lIns="0" tIns="0" rIns="0" bIns="0">
+          <a:bodyPr wrap="square" lIns="0" rIns="0" tIns="0" bIns="0">
             <a:spAutoFit/>
           </a:bodyPr>
           <a:lstStyle/>
@@ -19558,8 +19395,8 @@
                 </a:solidFill>
                 <a:latin typeface="Helvetica Neue"/>
               </a:rPr>
-              <a:t>Compared against libm
-at 16 million points.</a:t>
+              <a:t>Every one of the 2^32
+possible inputs checked.</a:t>
             </a:r>
           </a:p>
         </p:txBody>
@@ -19607,7 +19444,6 @@
           <a:lstStyle/>
           <a:p>
             <a:pPr algn="ctr"/>
-            <a:endParaRPr/>
           </a:p>
         </p:txBody>
       </p:sp>
@@ -19628,7 +19464,7 @@
           <a:noFill/>
         </p:spPr>
         <p:txBody>
-          <a:bodyPr wrap="square" lIns="0" tIns="0" rIns="0" bIns="0">
+          <a:bodyPr wrap="square" lIns="0" rIns="0" tIns="0" bIns="0">
             <a:spAutoFit/>
           </a:bodyPr>
           <a:lstStyle/>
@@ -19670,7 +19506,7 @@
           <a:noFill/>
         </p:spPr>
         <p:txBody>
-          <a:bodyPr wrap="square" lIns="0" tIns="0" rIns="0" bIns="0">
+          <a:bodyPr wrap="square" lIns="0" rIns="0" tIns="0" bIns="0">
             <a:spAutoFit/>
           </a:bodyPr>
           <a:lstStyle/>
@@ -19731,7 +19567,7 @@
           <a:noFill/>
         </p:spPr>
         <p:txBody>
-          <a:bodyPr wrap="square" lIns="0" tIns="0" rIns="0" bIns="0">
+          <a:bodyPr wrap="square" lIns="0" rIns="0" tIns="0" bIns="0">
             <a:spAutoFit/>
           </a:bodyPr>
           <a:lstStyle/>
@@ -19773,7 +19609,7 @@
           <a:noFill/>
         </p:spPr>
         <p:txBody>
-          <a:bodyPr wrap="square" lIns="0" tIns="0" rIns="0" bIns="0">
+          <a:bodyPr wrap="square" lIns="0" rIns="0" tIns="0" bIns="0">
             <a:spAutoFit/>
           </a:bodyPr>
           <a:lstStyle/>
@@ -19807,7 +19643,7 @@
 </file>
 
 <file path=ppt/slides/slide9.xml><?xml version="1.0" encoding="utf-8"?>
-<p:sld xmlns:a="http://schemas.openxmlformats.org/drawingml/2006/main" xmlns:r="http://schemas.openxmlformats.org/officeDocument/2006/relationships" xmlns:p="http://schemas.openxmlformats.org/presentationml/2006/main">
+<p:sld xmlns:a="http://schemas.openxmlformats.org/drawingml/2006/main" xmlns:p="http://schemas.openxmlformats.org/presentationml/2006/main" xmlns:r="http://schemas.openxmlformats.org/officeDocument/2006/relationships">
   <p:cSld>
     <p:spTree>
       <p:nvGrpSpPr>
@@ -19815,14 +19651,7 @@
         <p:cNvGrpSpPr/>
         <p:nvPr/>
       </p:nvGrpSpPr>
-      <p:grpSpPr>
-        <a:xfrm>
-          <a:off x="0" y="0"/>
-          <a:ext cx="0" cy="0"/>
-          <a:chOff x="0" y="0"/>
-          <a:chExt cx="0" cy="0"/>
-        </a:xfrm>
-      </p:grpSpPr>
+      <p:grpSpPr/>
       <p:sp>
         <p:nvSpPr>
           <p:cNvPr id="2" name="Rectangle 1"/>
@@ -19864,7 +19693,6 @@
           <a:lstStyle/>
           <a:p>
             <a:pPr algn="ctr"/>
-            <a:endParaRPr/>
           </a:p>
         </p:txBody>
       </p:sp>
@@ -19885,7 +19713,7 @@
           <a:noFill/>
         </p:spPr>
         <p:txBody>
-          <a:bodyPr wrap="square" lIns="0" tIns="0" rIns="0" bIns="0">
+          <a:bodyPr wrap="square" lIns="0" rIns="0" tIns="0" bIns="0">
             <a:spAutoFit/>
           </a:bodyPr>
           <a:lstStyle/>
@@ -19953,7 +19781,6 @@
           <a:lstStyle/>
           <a:p>
             <a:pPr algn="ctr"/>
-            <a:endParaRPr/>
           </a:p>
         </p:txBody>
       </p:sp>
@@ -19998,7 +19825,6 @@
           <a:lstStyle/>
           <a:p>
             <a:pPr algn="ctr"/>
-            <a:endParaRPr/>
           </a:p>
         </p:txBody>
       </p:sp>
@@ -20019,7 +19845,7 @@
           <a:noFill/>
         </p:spPr>
         <p:txBody>
-          <a:bodyPr wrap="square" lIns="0" tIns="0" rIns="0" bIns="0">
+          <a:bodyPr wrap="square" lIns="0" rIns="0" tIns="0" bIns="0">
             <a:spAutoFit/>
           </a:bodyPr>
           <a:lstStyle/>
@@ -20061,7 +19887,7 @@
           <a:noFill/>
         </p:spPr>
         <p:txBody>
-          <a:bodyPr wrap="square" lIns="0" tIns="0" rIns="0" bIns="0">
+          <a:bodyPr wrap="square" lIns="0" rIns="0" tIns="0" bIns="0">
             <a:spAutoFit/>
           </a:bodyPr>
           <a:lstStyle/>
@@ -20129,7 +19955,6 @@
           <a:lstStyle/>
           <a:p>
             <a:pPr algn="ctr"/>
-            <a:endParaRPr/>
           </a:p>
         </p:txBody>
       </p:sp>
@@ -20174,7 +19999,6 @@
           <a:lstStyle/>
           <a:p>
             <a:pPr algn="ctr"/>
-            <a:endParaRPr/>
           </a:p>
         </p:txBody>
       </p:sp>
@@ -20195,7 +20019,7 @@
           <a:noFill/>
         </p:spPr>
         <p:txBody>
-          <a:bodyPr wrap="square" lIns="0" tIns="0" rIns="0" bIns="0">
+          <a:bodyPr wrap="square" lIns="0" rIns="0" tIns="0" bIns="0">
             <a:spAutoFit/>
           </a:bodyPr>
           <a:lstStyle/>
@@ -20237,7 +20061,7 @@
           <a:noFill/>
         </p:spPr>
         <p:txBody>
-          <a:bodyPr wrap="square" lIns="0" tIns="0" rIns="0" bIns="0">
+          <a:bodyPr wrap="square" lIns="0" rIns="0" tIns="0" bIns="0">
             <a:spAutoFit/>
           </a:bodyPr>
           <a:lstStyle/>
@@ -20305,7 +20129,6 @@
           <a:lstStyle/>
           <a:p>
             <a:pPr algn="ctr"/>
-            <a:endParaRPr/>
           </a:p>
         </p:txBody>
       </p:sp>
@@ -20350,7 +20173,6 @@
           <a:lstStyle/>
           <a:p>
             <a:pPr algn="ctr"/>
-            <a:endParaRPr/>
           </a:p>
         </p:txBody>
       </p:sp>
@@ -20371,7 +20193,7 @@
           <a:noFill/>
         </p:spPr>
         <p:txBody>
-          <a:bodyPr wrap="square" lIns="0" tIns="0" rIns="0" bIns="0">
+          <a:bodyPr wrap="square" lIns="0" rIns="0" tIns="0" bIns="0">
             <a:spAutoFit/>
           </a:bodyPr>
           <a:lstStyle/>
@@ -20413,7 +20235,7 @@
           <a:noFill/>
         </p:spPr>
         <p:txBody>
-          <a:bodyPr wrap="square" lIns="0" tIns="0" rIns="0" bIns="0">
+          <a:bodyPr wrap="square" lIns="0" rIns="0" tIns="0" bIns="0">
             <a:spAutoFit/>
           </a:bodyPr>
           <a:lstStyle/>
@@ -20481,7 +20303,6 @@
           <a:lstStyle/>
           <a:p>
             <a:pPr algn="ctr"/>
-            <a:endParaRPr/>
           </a:p>
         </p:txBody>
       </p:sp>
@@ -20526,7 +20347,6 @@
           <a:lstStyle/>
           <a:p>
             <a:pPr algn="ctr"/>
-            <a:endParaRPr/>
           </a:p>
         </p:txBody>
       </p:sp>
@@ -20547,7 +20367,7 @@
           <a:noFill/>
         </p:spPr>
         <p:txBody>
-          <a:bodyPr wrap="square" lIns="0" tIns="0" rIns="0" bIns="0">
+          <a:bodyPr wrap="square" lIns="0" rIns="0" tIns="0" bIns="0">
             <a:spAutoFit/>
           </a:bodyPr>
           <a:lstStyle/>
@@ -20589,7 +20409,7 @@
           <a:noFill/>
         </p:spPr>
         <p:txBody>
-          <a:bodyPr wrap="square" lIns="0" tIns="0" rIns="0" bIns="0">
+          <a:bodyPr wrap="square" lIns="0" rIns="0" tIns="0" bIns="0">
             <a:spAutoFit/>
           </a:bodyPr>
           <a:lstStyle/>
@@ -20657,7 +20477,6 @@
           <a:lstStyle/>
           <a:p>
             <a:pPr algn="ctr"/>
-            <a:endParaRPr/>
           </a:p>
         </p:txBody>
       </p:sp>
@@ -20702,7 +20521,6 @@
           <a:lstStyle/>
           <a:p>
             <a:pPr algn="ctr"/>
-            <a:endParaRPr/>
           </a:p>
         </p:txBody>
       </p:sp>
@@ -20723,7 +20541,7 @@
           <a:noFill/>
         </p:spPr>
         <p:txBody>
-          <a:bodyPr wrap="square" lIns="0" tIns="0" rIns="0" bIns="0">
+          <a:bodyPr wrap="square" lIns="0" rIns="0" tIns="0" bIns="0">
             <a:spAutoFit/>
           </a:bodyPr>
           <a:lstStyle/>
@@ -20765,7 +20583,7 @@
           <a:noFill/>
         </p:spPr>
         <p:txBody>
-          <a:bodyPr wrap="square" lIns="0" tIns="0" rIns="0" bIns="0">
+          <a:bodyPr wrap="square" lIns="0" rIns="0" tIns="0" bIns="0">
             <a:spAutoFit/>
           </a:bodyPr>
           <a:lstStyle/>
@@ -20833,7 +20651,6 @@
           <a:lstStyle/>
           <a:p>
             <a:pPr algn="ctr"/>
-            <a:endParaRPr/>
           </a:p>
         </p:txBody>
       </p:sp>
@@ -20878,7 +20695,6 @@
           <a:lstStyle/>
           <a:p>
             <a:pPr algn="ctr"/>
-            <a:endParaRPr/>
           </a:p>
         </p:txBody>
       </p:sp>
@@ -20899,7 +20715,7 @@
           <a:noFill/>
         </p:spPr>
         <p:txBody>
-          <a:bodyPr wrap="square" lIns="0" tIns="0" rIns="0" bIns="0">
+          <a:bodyPr wrap="square" lIns="0" rIns="0" tIns="0" bIns="0">
             <a:spAutoFit/>
           </a:bodyPr>
           <a:lstStyle/>
@@ -20941,7 +20757,7 @@
           <a:noFill/>
         </p:spPr>
         <p:txBody>
-          <a:bodyPr wrap="square" lIns="0" tIns="0" rIns="0" bIns="0">
+          <a:bodyPr wrap="square" lIns="0" rIns="0" tIns="0" bIns="0">
             <a:spAutoFit/>
           </a:bodyPr>
           <a:lstStyle/>
@@ -20983,7 +20799,7 @@
           <a:noFill/>
         </p:spPr>
         <p:txBody>
-          <a:bodyPr wrap="square" lIns="0" tIns="0" rIns="0" bIns="0">
+          <a:bodyPr wrap="square" lIns="0" rIns="0" tIns="0" bIns="0">
             <a:spAutoFit/>
           </a:bodyPr>
           <a:lstStyle/>
@@ -21025,7 +20841,7 @@
           <a:noFill/>
         </p:spPr>
         <p:txBody>
-          <a:bodyPr wrap="square" lIns="0" tIns="0" rIns="0" bIns="0">
+          <a:bodyPr wrap="square" lIns="0" rIns="0" tIns="0" bIns="0">
             <a:spAutoFit/>
           </a:bodyPr>
           <a:lstStyle/>
@@ -21376,10 +21192,4 @@
   </a:objectDefaults>
   <a:extraClrSchemeLst/>
 </a:theme>
-</file>
-
-<file path=docMetadata/LabelInfo.xml><?xml version="1.0" encoding="utf-8"?>
-<clbl:labelList xmlns:clbl="http://schemas.microsoft.com/office/2020/mipLabelMetadata">
-  <clbl:label id="{af611b9f-07f9-4735-9f2f-45a599566f6b}" enabled="1" method="Standard" siteId="{261bc682-cd4a-4ee7-8ae4-9e82e1342e72}" contentBits="0" removed="0"/>
-</clbl:labelList>
 </file>
--- a/documentation/muinference-deck.pptx
+++ b/documentation/muinference-deck.pptx
@@ -3741,6 +3741,25 @@
                 </a:solidFill>
                 <a:latin typeface="Helvetica Neue"/>
               </a:rPr>
+              <a:t>·  Proved: the dot product bound</a:t>
+            </a:r>
+          </a:p>
+          <a:p>
+            <a:pPr algn="l">
+              <a:lnSpc>
+                <a:spcPct val="130000"/>
+              </a:lnSpc>
+              <a:spcAft>
+                <a:spcPts val="1100"/>
+              </a:spcAft>
+            </a:pPr>
+            <a:r>
+              <a:rPr sz="1300" b="0">
+                <a:solidFill>
+                  <a:srgbClr val="E8ECF1"/>
+                </a:solidFill>
+                <a:latin typeface="Helvetica Neue"/>
+              </a:rPr>
               <a:t>·  All of it checked in CI</a:t>
             </a:r>
           </a:p>
@@ -3874,6 +3893,25 @@
                 <a:latin typeface="Helvetica Neue"/>
               </a:rPr>
               <a:t>·  Prove reproducibility (CompCert)</a:t>
+            </a:r>
+          </a:p>
+          <a:p>
+            <a:pPr algn="l">
+              <a:lnSpc>
+                <a:spcPct val="130000"/>
+              </a:lnSpc>
+              <a:spcAft>
+                <a:spcPts val="1100"/>
+              </a:spcAft>
+            </a:pPr>
+            <a:r>
+              <a:rPr sz="1300" b="0">
+                <a:solidFill>
+                  <a:srgbClr val="E8ECF1"/>
+                </a:solidFill>
+                <a:latin typeface="Helvetica Neue"/>
+              </a:rPr>
+              <a:t>·  Total error for one token</a:t>
             </a:r>
           </a:p>
           <a:p>
@@ -6262,7 +6300,7 @@
             <a:r>
               <a:rPr sz="1300" b="1">
                 <a:solidFill>
-                  <a:srgbClr val="9B8CF0"/>
+                  <a:srgbClr val="36D3C4"/>
                 </a:solidFill>
                 <a:latin typeface="Menlo"/>
               </a:rPr>
@@ -6308,7 +6346,7 @@
                 </a:solidFill>
                 <a:latin typeface="Helvetica Neue"/>
               </a:rPr>
-              <a:t>The matrix multiply error bound</a:t>
+              <a:t>The dot product error bound</a:t>
             </a:r>
           </a:p>
         </p:txBody>
@@ -6350,7 +6388,7 @@
                 </a:solidFill>
                 <a:latin typeface="Menlo"/>
               </a:rPr>
-              <a:t>LAProof</a:t>
+              <a:t>Rocq proof</a:t>
             </a:r>
           </a:p>
         </p:txBody>
@@ -6388,11 +6426,11 @@
             <a:r>
               <a:rPr sz="1200" b="0">
                 <a:solidFill>
-                  <a:srgbClr val="9B8CF0"/>
-                </a:solidFill>
-                <a:latin typeface="Helvetica Neue"/>
-              </a:rPr>
-              <a:t>open</a:t>
+                  <a:srgbClr val="36D3C4"/>
+                </a:solidFill>
+                <a:latin typeface="Helvetica Neue"/>
+              </a:rPr>
+              <a:t>DONE   no axioms added</a:t>
             </a:r>
           </a:p>
         </p:txBody>
@@ -6862,7 +6900,7 @@
                 </a:solidFill>
                 <a:latin typeface="Helvetica Neue"/>
               </a:rPr>
-              <a:t>9 of 9 checks pass. None of it needed a hand-written proof.</a:t>
+              <a:t>10 of 10 checks pass. Four of the eight parts are done.</a:t>
             </a:r>
           </a:p>
         </p:txBody>
@@ -8200,7 +8238,7 @@
             </a:avLst>
           </a:prstGeom>
           <a:solidFill>
-            <a:srgbClr val="9B8CF0"/>
+            <a:srgbClr val="36D3C4"/>
           </a:solidFill>
           <a:ln>
             <a:noFill/>
@@ -8308,7 +8346,7 @@
                 </a:solidFill>
                 <a:latin typeface="Helvetica Neue"/>
               </a:rPr>
-              <a:t>Build with CompCert (S3b)</a:t>
+              <a:t>Dot product error bound (S4b)</a:t>
             </a:r>
           </a:p>
         </p:txBody>
@@ -8350,7 +8388,7 @@
                 </a:solidFill>
                 <a:latin typeface="Menlo"/>
               </a:rPr>
-              <a:t>2-4 weeks</a:t>
+              <a:t>done</a:t>
             </a:r>
           </a:p>
         </p:txBody>
@@ -8388,11 +8426,11 @@
             <a:r>
               <a:rPr sz="1200" b="0">
                 <a:solidFill>
-                  <a:srgbClr val="9B8CF0"/>
-                </a:solidFill>
-                <a:latin typeface="Helvetica Neue"/>
-              </a:rPr>
-              <a:t>REPRODUCIBILITY PROVEN</a:t>
+                  <a:srgbClr val="36D3C4"/>
+                </a:solidFill>
+                <a:latin typeface="Helvetica Neue"/>
+              </a:rPr>
+              <a:t>Rocq, no added axioms</a:t>
             </a:r>
           </a:p>
         </p:txBody>
@@ -8460,7 +8498,7 @@
             </a:avLst>
           </a:prstGeom>
           <a:solidFill>
-            <a:srgbClr val="F2B037"/>
+            <a:srgbClr val="9B8CF0"/>
           </a:solidFill>
           <a:ln>
             <a:noFill/>
@@ -8568,7 +8606,7 @@
                 </a:solidFill>
                 <a:latin typeface="Helvetica Neue"/>
               </a:rPr>
-              <a:t>Cover the last two functions (S1)</a:t>
+              <a:t>Build with CompCert (S3b)</a:t>
             </a:r>
           </a:p>
         </p:txBody>
@@ -8610,7 +8648,7 @@
                 </a:solidFill>
                 <a:latin typeface="Menlo"/>
               </a:rPr>
-              <a:t>weeks</a:t>
+              <a:t>2-4 weeks</a:t>
             </a:r>
           </a:p>
         </p:txBody>
@@ -8648,11 +8686,11 @@
             <a:r>
               <a:rPr sz="1200" b="0">
                 <a:solidFill>
-                  <a:srgbClr val="F2B037"/>
-                </a:solidFill>
-                <a:latin typeface="Helvetica Neue"/>
-              </a:rPr>
-              <a:t>needs Frama-C</a:t>
+                  <a:srgbClr val="9B8CF0"/>
+                </a:solidFill>
+                <a:latin typeface="Helvetica Neue"/>
+              </a:rPr>
+              <a:t>REPRODUCIBILITY PROVEN</a:t>
             </a:r>
           </a:p>
         </p:txBody>
@@ -8828,7 +8866,7 @@
                 </a:solidFill>
                 <a:latin typeface="Helvetica Neue"/>
               </a:rPr>
-              <a:t>Matrix multiply bound (S4b)</a:t>
+              <a:t>Total error for one token (S4c)</a:t>
             </a:r>
           </a:p>
         </p:txBody>
@@ -8870,7 +8908,7 @@
                 </a:solidFill>
                 <a:latin typeface="Menlo"/>
               </a:rPr>
-              <a:t>1-2 months</a:t>
+              <a:t>weeks</a:t>
             </a:r>
           </a:p>
         </p:txBody>
@@ -8912,7 +8950,7 @@
                 </a:solidFill>
                 <a:latin typeface="Helvetica Neue"/>
               </a:rPr>
-              <a:t>needs LAProof</a:t>
+              <a:t>combine S4a and S4b</a:t>
             </a:r>
           </a:p>
         </p:txBody>
@@ -9262,7 +9300,7 @@
                 </a:solidFill>
                 <a:latin typeface="Helvetica Neue"/>
               </a:rPr>
-              <a:t>Steps 0 to 3 are finished. They took one session, not two months.</a:t>
+              <a:t>Steps 0 to 4 are finished, including a hand-written Rocq proof.</a:t>
             </a:r>
           </a:p>
         </p:txBody>
@@ -9450,7 +9488,7 @@
                 </a:solidFill>
                 <a:latin typeface="Helvetica Neue"/>
               </a:rPr>
-              <a:t>AI cannot write the proofs yet</a:t>
+              <a:t>What the benchmark does and does not say</a:t>
             </a:r>
           </a:p>
         </p:txBody>
@@ -9492,7 +9530,7 @@
                 </a:solidFill>
                 <a:latin typeface="Helvetica Neue"/>
               </a:rPr>
-              <a:t>Measured by VERINA. Best model tested was o3, writing Lean.</a:t>
+              <a:t>VERINA measures one-shot proof writing on unseen problems. That is not this task.</a:t>
             </a:r>
           </a:p>
         </p:txBody>
@@ -10022,7 +10060,7 @@
         <p:spPr>
           <a:xfrm>
             <a:off x="777240" y="4434840"/>
-            <a:ext cx="5120640" cy="1371600"/>
+            <a:ext cx="5120640" cy="1463040"/>
           </a:xfrm>
           <a:prstGeom prst="roundRect">
             <a:avLst>
@@ -10034,7 +10072,7 @@
           </a:solidFill>
           <a:ln w="15875">
             <a:solidFill>
-              <a:srgbClr val="E55C5C"/>
+              <a:srgbClr val="F2B037"/>
             </a:solidFill>
           </a:ln>
           <a:effectLst/>
@@ -10094,11 +10132,11 @@
             <a:r>
               <a:rPr sz="1400" b="1">
                 <a:solidFill>
-                  <a:srgbClr val="E55C5C"/>
-                </a:solidFill>
-                <a:latin typeface="Helvetica Neue"/>
-              </a:rPr>
-              <a:t>So do not plan on it</a:t>
+                  <a:srgbClr val="F2B037"/>
+                </a:solidFill>
+                <a:latin typeface="Helvetica Neue"/>
+              </a:rPr>
+              <a:t>Why the number is low</a:t>
             </a:r>
           </a:p>
         </p:txBody>
@@ -10112,7 +10150,7 @@
         <p:spPr>
           <a:xfrm>
             <a:off x="1051560" y="5010912"/>
-            <a:ext cx="4572000" cy="731520"/>
+            <a:ext cx="4572000" cy="822960"/>
           </a:xfrm>
           <a:prstGeom prst="rect">
             <a:avLst/>
@@ -10140,7 +10178,7 @@
                 </a:solidFill>
                 <a:latin typeface="Helvetica Neue"/>
               </a:rPr>
-              <a:t>A 5% success rate cannot be the main path.</a:t>
+              <a:t>One attempt. Unseen problem. No compiler feedback. No choice of how to state the theorem.</a:t>
             </a:r>
           </a:p>
         </p:txBody>
@@ -10154,7 +10192,7 @@
         <p:spPr>
           <a:xfrm>
             <a:off x="6263640" y="4434840"/>
-            <a:ext cx="5120640" cy="1371600"/>
+            <a:ext cx="5120640" cy="1463040"/>
           </a:xfrm>
           <a:prstGeom prst="roundRect">
             <a:avLst>
@@ -10230,7 +10268,7 @@
                 </a:solidFill>
                 <a:latin typeface="Helvetica Neue"/>
               </a:rPr>
-              <a:t>What the plan does</a:t>
+              <a:t>S4b was written anyway</a:t>
             </a:r>
           </a:p>
         </p:txBody>
@@ -10244,7 +10282,7 @@
         <p:spPr>
           <a:xfrm>
             <a:off x="6537960" y="5010912"/>
-            <a:ext cx="4572000" cy="731520"/>
+            <a:ext cx="4572000" cy="822960"/>
           </a:xfrm>
           <a:prstGeom prst="rect">
             <a:avLst/>
@@ -10272,7 +10310,7 @@
                 </a:solidFill>
                 <a:latin typeface="Helvetica Neue"/>
               </a:rPr>
-              <a:t>Use tools that prove things automatically. Only about 100 lines need real proof work.</a:t>
+              <a:t>Rocq proof, no added axioms. Took about eight compile-and-fix rounds, and it caught a real error in the bound.</a:t>
             </a:r>
           </a:p>
         </p:txBody>
@@ -10638,7 +10676,7 @@
                 </a:solidFill>
                 <a:latin typeface="Helvetica Neue"/>
               </a:rPr>
-              <a:t>Approve step 4: CompCert</a:t>
+              <a:t>Approve step 5: CompCert</a:t>
             </a:r>
           </a:p>
         </p:txBody>

--- a/documentation/muinference-deck.pptx
+++ b/documentation/muinference-deck.pptx
@@ -3330,7 +3330,7 @@
                 </a:solidFill>
                 <a:latin typeface="Helvetica Neue"/>
               </a:rPr>
-              <a:t>Same output on seven different systems, bit for bit.</a:t>
+              <a:t>Same output on eight different builds, bit for bit.</a:t>
             </a:r>
           </a:p>
           <a:p>
@@ -3646,7 +3646,7 @@
                 </a:solidFill>
                 <a:latin typeface="Helvetica Neue"/>
               </a:rPr>
-              <a:t>·  Same output on seven systems</a:t>
+              <a:t>·  Same output on eight builds</a:t>
             </a:r>
           </a:p>
           <a:p>
@@ -15847,7 +15847,7 @@
                 </a:solidFill>
                 <a:latin typeface="Helvetica Neue"/>
               </a:rPr>
-              <a:t>Result: seven systems, one hash</a:t>
+              <a:t>Result: eight builds, one hash</a:t>
             </a:r>
           </a:p>
         </p:txBody>
@@ -19083,7 +19083,7 @@
                 </a:solidFill>
                 <a:latin typeface="Helvetica Neue"/>
               </a:rPr>
-              <a:t>Same on all seven systems.
+              <a:t>Same on all eight builds.
 Fixed at build time.</a:t>
             </a:r>
           </a:p>

--- a/documentation/muinference-deck.pptx
+++ b/documentation/muinference-deck.pptx
@@ -3330,7 +3330,7 @@
                 </a:solidFill>
                 <a:latin typeface="Helvetica Neue"/>
               </a:rPr>
-              <a:t>Same output on eight different builds, bit for bit.</a:t>
+              <a:t>Same output on nine different builds, bit for bit.</a:t>
             </a:r>
           </a:p>
           <a:p>
@@ -3646,7 +3646,7 @@
                 </a:solidFill>
                 <a:latin typeface="Helvetica Neue"/>
               </a:rPr>
-              <a:t>·  Same output on eight builds</a:t>
+              <a:t>·  Same output on nine builds</a:t>
             </a:r>
           </a:p>
           <a:p>
@@ -3742,6 +3742,25 @@
                 <a:latin typeface="Helvetica Neue"/>
               </a:rPr>
               <a:t>·  Proved: the dot product bound</a:t>
+            </a:r>
+          </a:p>
+          <a:p>
+            <a:pPr algn="l">
+              <a:lnSpc>
+                <a:spcPct val="130000"/>
+              </a:lnSpc>
+              <a:spcAft>
+                <a:spcPts val="1100"/>
+              </a:spcAft>
+            </a:pPr>
+            <a:r>
+              <a:rPr sz="1300" b="0">
+                <a:solidFill>
+                  <a:srgbClr val="E8ECF1"/>
+                </a:solidFill>
+                <a:latin typeface="Helvetica Neue"/>
+              </a:rPr>
+              <a:t>·  Proved: reproducibility (CompCert)</a:t>
             </a:r>
           </a:p>
           <a:p>
@@ -3892,25 +3911,6 @@
                 </a:solidFill>
                 <a:latin typeface="Helvetica Neue"/>
               </a:rPr>
-              <a:t>·  Prove reproducibility (CompCert)</a:t>
-            </a:r>
-          </a:p>
-          <a:p>
-            <a:pPr algn="l">
-              <a:lnSpc>
-                <a:spcPct val="130000"/>
-              </a:lnSpc>
-              <a:spcAft>
-                <a:spcPts val="1100"/>
-              </a:spcAft>
-            </a:pPr>
-            <a:r>
-              <a:rPr sz="1300" b="0">
-                <a:solidFill>
-                  <a:srgbClr val="E8ECF1"/>
-                </a:solidFill>
-                <a:latin typeface="Helvetica Neue"/>
-              </a:rPr>
               <a:t>·  Total error for one token</a:t>
             </a:r>
           </a:p>
@@ -4084,25 +4084,6 @@
             <a:spAutoFit/>
           </a:bodyPr>
           <a:lstStyle/>
-          <a:p>
-            <a:pPr algn="l">
-              <a:lnSpc>
-                <a:spcPct val="130000"/>
-              </a:lnSpc>
-              <a:spcAft>
-                <a:spcPts val="1100"/>
-              </a:spcAft>
-            </a:pPr>
-            <a:r>
-              <a:rPr sz="1300" b="0">
-                <a:solidFill>
-                  <a:srgbClr val="E8ECF1"/>
-                </a:solidFill>
-                <a:latin typeface="Helvetica Neue"/>
-              </a:rPr>
-              <a:t>·  Prove reproducibility as a theorem</a:t>
-            </a:r>
-          </a:p>
           <a:p>
             <a:pPr algn="l">
               <a:lnSpc>
@@ -4406,7 +4387,7 @@
                 </a:solidFill>
                 <a:latin typeface="Helvetica Neue"/>
               </a:rPr>
-              <a:t>Tests check some inputs. A proof covers all of them. Both are now in use.</a:t>
+              <a:t>Tests check some inputs. A proof covers all of them.</a:t>
             </a:r>
           </a:p>
         </p:txBody>
@@ -4538,7 +4519,7 @@
                 </a:solidFill>
                 <a:latin typeface="Menlo"/>
               </a:rPr>
-              <a:t>Reproducibility: 7 systems, 1 prompt.</a:t>
+              <a:t>Real hardware. Larger models.</a:t>
             </a:r>
           </a:p>
           <a:p>
@@ -4557,7 +4538,7 @@
                 </a:solidFill>
                 <a:latin typeface="Helvetica Neue"/>
               </a:rPr>
-              <a:t>A good sample. Still a sample.</a:t>
+              <a:t>One checkpoint, one prompt.</a:t>
             </a:r>
           </a:p>
           <a:p>
@@ -4576,7 +4557,7 @@
                 </a:solidFill>
                 <a:latin typeface="Helvetica Neue"/>
               </a:rPr>
-              <a:t>CompCert would make it a proof.</a:t>
+              <a:t>The total error bound (S4c).</a:t>
             </a:r>
           </a:p>
         </p:txBody>
@@ -4708,7 +4689,7 @@
                 </a:solidFill>
                 <a:latin typeface="Menlo"/>
               </a:rPr>
-              <a:t>Memory safety. The exp bound.</a:t>
+              <a:t>Memory safety. Both error bounds.</a:t>
             </a:r>
           </a:p>
           <a:p>
@@ -4727,7 +4708,7 @@
                 </a:solidFill>
                 <a:latin typeface="Helvetica Neue"/>
               </a:rPr>
-              <a:t>Checked by machine, all inputs.</a:t>
+              <a:t>Reproducibility, via CompCert.</a:t>
             </a:r>
           </a:p>
           <a:p>
@@ -6086,7 +6067,7 @@
             <a:r>
               <a:rPr sz="1300" b="1">
                 <a:solidFill>
-                  <a:srgbClr val="9B8CF0"/>
+                  <a:srgbClr val="36D3C4"/>
                 </a:solidFill>
                 <a:latin typeface="Menlo"/>
               </a:rPr>
@@ -6212,11 +6193,11 @@
             <a:r>
               <a:rPr sz="1200" b="0">
                 <a:solidFill>
-                  <a:srgbClr val="9B8CF0"/>
-                </a:solidFill>
-                <a:latin typeface="Helvetica Neue"/>
-              </a:rPr>
-              <a:t>open</a:t>
+                  <a:srgbClr val="36D3C4"/>
+                </a:solidFill>
+                <a:latin typeface="Helvetica Neue"/>
+              </a:rPr>
+              <a:t>DONE   verified compiler</a:t>
             </a:r>
           </a:p>
         </p:txBody>
@@ -6900,7 +6881,7 @@
                 </a:solidFill>
                 <a:latin typeface="Helvetica Neue"/>
               </a:rPr>
-              <a:t>10 of 10 checks pass. Four of the eight parts are done.</a:t>
+              <a:t>13 of 13 checks pass. Five of the eight parts are done.</a:t>
             </a:r>
           </a:p>
         </p:txBody>
@@ -8498,7 +8479,7 @@
             </a:avLst>
           </a:prstGeom>
           <a:solidFill>
-            <a:srgbClr val="9B8CF0"/>
+            <a:srgbClr val="36D3C4"/>
           </a:solidFill>
           <a:ln>
             <a:noFill/>
@@ -8648,7 +8629,7 @@
                 </a:solidFill>
                 <a:latin typeface="Menlo"/>
               </a:rPr>
-              <a:t>2-4 weeks</a:t>
+              <a:t>done</a:t>
             </a:r>
           </a:p>
         </p:txBody>
@@ -8686,7 +8667,7 @@
             <a:r>
               <a:rPr sz="1200" b="0">
                 <a:solidFill>
-                  <a:srgbClr val="9B8CF0"/>
+                  <a:srgbClr val="36D3C4"/>
                 </a:solidFill>
                 <a:latin typeface="Helvetica Neue"/>
               </a:rPr>
@@ -9300,7 +9281,7 @@
                 </a:solidFill>
                 <a:latin typeface="Helvetica Neue"/>
               </a:rPr>
-              <a:t>Steps 0 to 4 are finished, including a hand-written Rocq proof.</a:t>
+              <a:t>Steps 0 to 5 are finished. Reproducibility is now proven, not tested.</a:t>
             </a:r>
           </a:p>
         </p:txBody>
@@ -10676,7 +10657,7 @@
                 </a:solidFill>
                 <a:latin typeface="Helvetica Neue"/>
               </a:rPr>
-              <a:t>Approve step 5: CompCert</a:t>
+              <a:t>Write it up</a:t>
             </a:r>
           </a:p>
         </p:txBody>
@@ -10718,7 +10699,7 @@
                 </a:solidFill>
                 <a:latin typeface="Helvetica Neue"/>
               </a:rPr>
-              <a:t>Two to four weeks. Turns reproducibility from something tested on 7 systems into something proven for all of them. This is the publishable one.</a:t>
+              <a:t>Five of eight parts are proven, including reproducibility via a verified compiler. No inference engine has this. That is a paper.</a:t>
             </a:r>
           </a:p>
         </p:txBody>
@@ -15847,7 +15828,7 @@
                 </a:solidFill>
                 <a:latin typeface="Helvetica Neue"/>
               </a:rPr>
-              <a:t>Result: eight builds, one hash</a:t>
+              <a:t>Result: nine builds, one hash</a:t>
             </a:r>
           </a:p>
         </p:txBody>
@@ -15992,8 +15973,8 @@
         </p:nvSpPr>
         <p:spPr>
           <a:xfrm>
-            <a:off x="777240" y="2578608"/>
-            <a:ext cx="10607040" cy="402336"/>
+            <a:off x="777240" y="2523744"/>
+            <a:ext cx="10607040" cy="365760"/>
           </a:xfrm>
           <a:prstGeom prst="roundRect">
             <a:avLst>
@@ -16038,7 +16019,7 @@
         </p:nvSpPr>
         <p:spPr>
           <a:xfrm>
-            <a:off x="1005840" y="2660904"/>
+            <a:off x="1005840" y="2587752"/>
             <a:ext cx="274320" cy="274320"/>
           </a:xfrm>
           <a:prstGeom prst="rect">
@@ -16080,7 +16061,7 @@
         </p:nvSpPr>
         <p:spPr>
           <a:xfrm>
-            <a:off x="1371600" y="2660904"/>
+            <a:off x="1371600" y="2587752"/>
             <a:ext cx="3017520" cy="274320"/>
           </a:xfrm>
           <a:prstGeom prst="rect">
@@ -16103,7 +16084,7 @@
               </a:spcAft>
             </a:pPr>
             <a:r>
-              <a:rPr sz="1300" b="0">
+              <a:rPr sz="1250" b="0">
                 <a:solidFill>
                   <a:srgbClr val="E8ECF1"/>
                 </a:solidFill>
@@ -16122,7 +16103,7 @@
         </p:nvSpPr>
         <p:spPr>
           <a:xfrm>
-            <a:off x="4480560" y="2660904"/>
+            <a:off x="4480560" y="2587752"/>
             <a:ext cx="1280160" cy="274320"/>
           </a:xfrm>
           <a:prstGeom prst="rect">
@@ -16145,7 +16126,7 @@
               </a:spcAft>
             </a:pPr>
             <a:r>
-              <a:rPr sz="1200" b="0">
+              <a:rPr sz="1150" b="0">
                 <a:solidFill>
                   <a:srgbClr val="8B99A8"/>
                 </a:solidFill>
@@ -16164,7 +16145,7 @@
         </p:nvSpPr>
         <p:spPr>
           <a:xfrm>
-            <a:off x="5943600" y="2660904"/>
+            <a:off x="5943600" y="2587752"/>
             <a:ext cx="5303520" cy="274320"/>
           </a:xfrm>
           <a:prstGeom prst="rect">
@@ -16187,7 +16168,7 @@
               </a:spcAft>
             </a:pPr>
             <a:r>
-              <a:rPr sz="1200" b="0">
+              <a:rPr sz="1150" b="0">
                 <a:solidFill>
                   <a:srgbClr val="8B99A8"/>
                 </a:solidFill>
@@ -16206,8 +16187,8 @@
         </p:nvSpPr>
         <p:spPr>
           <a:xfrm>
-            <a:off x="777240" y="3035808"/>
-            <a:ext cx="10607040" cy="402336"/>
+            <a:off x="777240" y="2939796"/>
+            <a:ext cx="10607040" cy="365760"/>
           </a:xfrm>
           <a:prstGeom prst="roundRect">
             <a:avLst>
@@ -16252,7 +16233,7 @@
         </p:nvSpPr>
         <p:spPr>
           <a:xfrm>
-            <a:off x="1005840" y="3118104"/>
+            <a:off x="1005840" y="3003804"/>
             <a:ext cx="274320" cy="274320"/>
           </a:xfrm>
           <a:prstGeom prst="rect">
@@ -16294,7 +16275,7 @@
         </p:nvSpPr>
         <p:spPr>
           <a:xfrm>
-            <a:off x="1371600" y="3118104"/>
+            <a:off x="1371600" y="3003804"/>
             <a:ext cx="3017520" cy="274320"/>
           </a:xfrm>
           <a:prstGeom prst="rect">
@@ -16317,7 +16298,7 @@
               </a:spcAft>
             </a:pPr>
             <a:r>
-              <a:rPr sz="1300" b="0">
+              <a:rPr sz="1250" b="0">
                 <a:solidFill>
                   <a:srgbClr val="E8ECF1"/>
                 </a:solidFill>
@@ -16336,7 +16317,7 @@
         </p:nvSpPr>
         <p:spPr>
           <a:xfrm>
-            <a:off x="4480560" y="3118104"/>
+            <a:off x="4480560" y="3003804"/>
             <a:ext cx="1280160" cy="274320"/>
           </a:xfrm>
           <a:prstGeom prst="rect">
@@ -16359,7 +16340,7 @@
               </a:spcAft>
             </a:pPr>
             <a:r>
-              <a:rPr sz="1200" b="0">
+              <a:rPr sz="1150" b="0">
                 <a:solidFill>
                   <a:srgbClr val="8B99A8"/>
                 </a:solidFill>
@@ -16378,7 +16359,7 @@
         </p:nvSpPr>
         <p:spPr>
           <a:xfrm>
-            <a:off x="5943600" y="3118104"/>
+            <a:off x="5943600" y="3003804"/>
             <a:ext cx="5303520" cy="274320"/>
           </a:xfrm>
           <a:prstGeom prst="rect">
@@ -16401,7 +16382,7 @@
               </a:spcAft>
             </a:pPr>
             <a:r>
-              <a:rPr sz="1200" b="0">
+              <a:rPr sz="1150" b="0">
                 <a:solidFill>
                   <a:srgbClr val="8B99A8"/>
                 </a:solidFill>
@@ -16420,8 +16401,8 @@
         </p:nvSpPr>
         <p:spPr>
           <a:xfrm>
-            <a:off x="777240" y="3493008"/>
-            <a:ext cx="10607040" cy="402336"/>
+            <a:off x="777240" y="3355848"/>
+            <a:ext cx="10607040" cy="365760"/>
           </a:xfrm>
           <a:prstGeom prst="roundRect">
             <a:avLst>
@@ -16466,7 +16447,7 @@
         </p:nvSpPr>
         <p:spPr>
           <a:xfrm>
-            <a:off x="1005840" y="3575304"/>
+            <a:off x="1005840" y="3419856"/>
             <a:ext cx="274320" cy="274320"/>
           </a:xfrm>
           <a:prstGeom prst="rect">
@@ -16508,7 +16489,7 @@
         </p:nvSpPr>
         <p:spPr>
           <a:xfrm>
-            <a:off x="1371600" y="3575304"/>
+            <a:off x="1371600" y="3419856"/>
             <a:ext cx="3017520" cy="274320"/>
           </a:xfrm>
           <a:prstGeom prst="rect">
@@ -16531,7 +16512,7 @@
               </a:spcAft>
             </a:pPr>
             <a:r>
-              <a:rPr sz="1300" b="0">
+              <a:rPr sz="1250" b="0">
                 <a:solidFill>
                   <a:srgbClr val="E8ECF1"/>
                 </a:solidFill>
@@ -16550,7 +16531,7 @@
         </p:nvSpPr>
         <p:spPr>
           <a:xfrm>
-            <a:off x="4480560" y="3575304"/>
+            <a:off x="4480560" y="3419856"/>
             <a:ext cx="1280160" cy="274320"/>
           </a:xfrm>
           <a:prstGeom prst="rect">
@@ -16573,7 +16554,7 @@
               </a:spcAft>
             </a:pPr>
             <a:r>
-              <a:rPr sz="1200" b="0">
+              <a:rPr sz="1150" b="0">
                 <a:solidFill>
                   <a:srgbClr val="8B99A8"/>
                 </a:solidFill>
@@ -16592,7 +16573,7 @@
         </p:nvSpPr>
         <p:spPr>
           <a:xfrm>
-            <a:off x="5943600" y="3575304"/>
+            <a:off x="5943600" y="3419856"/>
             <a:ext cx="5303520" cy="274320"/>
           </a:xfrm>
           <a:prstGeom prst="rect">
@@ -16615,7 +16596,7 @@
               </a:spcAft>
             </a:pPr>
             <a:r>
-              <a:rPr sz="1200" b="0">
+              <a:rPr sz="1150" b="0">
                 <a:solidFill>
                   <a:srgbClr val="8B99A8"/>
                 </a:solidFill>
@@ -16634,8 +16615,8 @@
         </p:nvSpPr>
         <p:spPr>
           <a:xfrm>
-            <a:off x="777240" y="3950208"/>
-            <a:ext cx="10607040" cy="402336"/>
+            <a:off x="777240" y="3771900"/>
+            <a:ext cx="10607040" cy="365760"/>
           </a:xfrm>
           <a:prstGeom prst="roundRect">
             <a:avLst>
@@ -16680,7 +16661,7 @@
         </p:nvSpPr>
         <p:spPr>
           <a:xfrm>
-            <a:off x="1005840" y="4032504"/>
+            <a:off x="1005840" y="3835908"/>
             <a:ext cx="274320" cy="274320"/>
           </a:xfrm>
           <a:prstGeom prst="rect">
@@ -16722,7 +16703,7 @@
         </p:nvSpPr>
         <p:spPr>
           <a:xfrm>
-            <a:off x="1371600" y="4032504"/>
+            <a:off x="1371600" y="3835908"/>
             <a:ext cx="3017520" cy="274320"/>
           </a:xfrm>
           <a:prstGeom prst="rect">
@@ -16745,7 +16726,7 @@
               </a:spcAft>
             </a:pPr>
             <a:r>
-              <a:rPr sz="1300" b="0">
+              <a:rPr sz="1250" b="0">
                 <a:solidFill>
                   <a:srgbClr val="E8ECF1"/>
                 </a:solidFill>
@@ -16764,7 +16745,7 @@
         </p:nvSpPr>
         <p:spPr>
           <a:xfrm>
-            <a:off x="4480560" y="4032504"/>
+            <a:off x="4480560" y="3835908"/>
             <a:ext cx="1280160" cy="274320"/>
           </a:xfrm>
           <a:prstGeom prst="rect">
@@ -16787,7 +16768,7 @@
               </a:spcAft>
             </a:pPr>
             <a:r>
-              <a:rPr sz="1200" b="0">
+              <a:rPr sz="1150" b="0">
                 <a:solidFill>
                   <a:srgbClr val="8B99A8"/>
                 </a:solidFill>
@@ -16806,7 +16787,7 @@
         </p:nvSpPr>
         <p:spPr>
           <a:xfrm>
-            <a:off x="5943600" y="4032504"/>
+            <a:off x="5943600" y="3835908"/>
             <a:ext cx="5303520" cy="274320"/>
           </a:xfrm>
           <a:prstGeom prst="rect">
@@ -16829,7 +16810,7 @@
               </a:spcAft>
             </a:pPr>
             <a:r>
-              <a:rPr sz="1200" b="0">
+              <a:rPr sz="1150" b="0">
                 <a:solidFill>
                   <a:srgbClr val="9B8CF0"/>
                 </a:solidFill>
@@ -16848,8 +16829,8 @@
         </p:nvSpPr>
         <p:spPr>
           <a:xfrm>
-            <a:off x="777240" y="4407408"/>
-            <a:ext cx="10607040" cy="402336"/>
+            <a:off x="777240" y="4187952"/>
+            <a:ext cx="10607040" cy="365760"/>
           </a:xfrm>
           <a:prstGeom prst="roundRect">
             <a:avLst>
@@ -16894,7 +16875,7 @@
         </p:nvSpPr>
         <p:spPr>
           <a:xfrm>
-            <a:off x="1005840" y="4489704"/>
+            <a:off x="1005840" y="4251960"/>
             <a:ext cx="274320" cy="274320"/>
           </a:xfrm>
           <a:prstGeom prst="rect">
@@ -16936,7 +16917,7 @@
         </p:nvSpPr>
         <p:spPr>
           <a:xfrm>
-            <a:off x="1371600" y="4489704"/>
+            <a:off x="1371600" y="4251960"/>
             <a:ext cx="3017520" cy="274320"/>
           </a:xfrm>
           <a:prstGeom prst="rect">
@@ -16959,13 +16940,13 @@
               </a:spcAft>
             </a:pPr>
             <a:r>
-              <a:rPr sz="1300" b="0">
+              <a:rPr sz="1250" b="0">
                 <a:solidFill>
                   <a:srgbClr val="E8ECF1"/>
                 </a:solidFill>
                 <a:latin typeface="Helvetica Neue"/>
               </a:rPr>
-              <a:t>clang 18, -O2</a:t>
+              <a:t>CompCert 3.17</a:t>
             </a:r>
           </a:p>
         </p:txBody>
@@ -16978,7 +16959,7 @@
         </p:nvSpPr>
         <p:spPr>
           <a:xfrm>
-            <a:off x="4480560" y="4489704"/>
+            <a:off x="4480560" y="4251960"/>
             <a:ext cx="1280160" cy="274320"/>
           </a:xfrm>
           <a:prstGeom prst="rect">
@@ -17001,13 +16982,13 @@
               </a:spcAft>
             </a:pPr>
             <a:r>
-              <a:rPr sz="1200" b="0">
+              <a:rPr sz="1150" b="0">
                 <a:solidFill>
                   <a:srgbClr val="8B99A8"/>
                 </a:solidFill>
                 <a:latin typeface="Menlo"/>
               </a:rPr>
-              <a:t>Linux</a:t>
+              <a:t>macOS</a:t>
             </a:r>
           </a:p>
         </p:txBody>
@@ -17020,7 +17001,7 @@
         </p:nvSpPr>
         <p:spPr>
           <a:xfrm>
-            <a:off x="5943600" y="4489704"/>
+            <a:off x="5943600" y="4251960"/>
             <a:ext cx="5303520" cy="274320"/>
           </a:xfrm>
           <a:prstGeom prst="rect">
@@ -17043,13 +17024,13 @@
               </a:spcAft>
             </a:pPr>
             <a:r>
-              <a:rPr sz="1200" b="0">
-                <a:solidFill>
-                  <a:srgbClr val="9B8CF0"/>
-                </a:solidFill>
-                <a:latin typeface="Helvetica Neue"/>
-              </a:rPr>
-              <a:t>different OS and CPU (CI)</a:t>
+              <a:rPr sz="1150" b="0">
+                <a:solidFill>
+                  <a:srgbClr val="36D3C4"/>
+                </a:solidFill>
+                <a:latin typeface="Helvetica Neue"/>
+              </a:rPr>
+              <a:t>FORMALLY VERIFIED compiler</a:t>
             </a:r>
           </a:p>
         </p:txBody>
@@ -17062,8 +17043,8 @@
         </p:nvSpPr>
         <p:spPr>
           <a:xfrm>
-            <a:off x="777240" y="4864608"/>
-            <a:ext cx="10607040" cy="402336"/>
+            <a:off x="777240" y="4604004"/>
+            <a:ext cx="10607040" cy="365760"/>
           </a:xfrm>
           <a:prstGeom prst="roundRect">
             <a:avLst>
@@ -17108,7 +17089,7 @@
         </p:nvSpPr>
         <p:spPr>
           <a:xfrm>
-            <a:off x="1005840" y="4946904"/>
+            <a:off x="1005840" y="4668012"/>
             <a:ext cx="274320" cy="274320"/>
           </a:xfrm>
           <a:prstGeom prst="rect">
@@ -17150,7 +17131,7 @@
         </p:nvSpPr>
         <p:spPr>
           <a:xfrm>
-            <a:off x="1371600" y="4946904"/>
+            <a:off x="1371600" y="4668012"/>
             <a:ext cx="3017520" cy="274320"/>
           </a:xfrm>
           <a:prstGeom prst="rect">
@@ -17173,13 +17154,13 @@
               </a:spcAft>
             </a:pPr>
             <a:r>
-              <a:rPr sz="1300" b="0">
+              <a:rPr sz="1250" b="0">
                 <a:solidFill>
                   <a:srgbClr val="E8ECF1"/>
                 </a:solidFill>
                 <a:latin typeface="Helvetica Neue"/>
               </a:rPr>
-              <a:t>ARM, no OS</a:t>
+              <a:t>clang 18, -O2</a:t>
             </a:r>
           </a:p>
         </p:txBody>
@@ -17192,7 +17173,7 @@
         </p:nvSpPr>
         <p:spPr>
           <a:xfrm>
-            <a:off x="4480560" y="4946904"/>
+            <a:off x="4480560" y="4668012"/>
             <a:ext cx="1280160" cy="274320"/>
           </a:xfrm>
           <a:prstGeom prst="rect">
@@ -17215,13 +17196,13 @@
               </a:spcAft>
             </a:pPr>
             <a:r>
-              <a:rPr sz="1200" b="0">
+              <a:rPr sz="1150" b="0">
                 <a:solidFill>
                   <a:srgbClr val="8B99A8"/>
                 </a:solidFill>
                 <a:latin typeface="Menlo"/>
               </a:rPr>
-              <a:t>QEMU</a:t>
+              <a:t>Linux</a:t>
             </a:r>
           </a:p>
         </p:txBody>
@@ -17234,7 +17215,7 @@
         </p:nvSpPr>
         <p:spPr>
           <a:xfrm>
-            <a:off x="5943600" y="4946904"/>
+            <a:off x="5943600" y="4668012"/>
             <a:ext cx="5303520" cy="274320"/>
           </a:xfrm>
           <a:prstGeom prst="rect">
@@ -17257,13 +17238,13 @@
               </a:spcAft>
             </a:pPr>
             <a:r>
-              <a:rPr sz="1200" b="0">
+              <a:rPr sz="1150" b="0">
                 <a:solidFill>
                   <a:srgbClr val="9B8CF0"/>
                 </a:solidFill>
                 <a:latin typeface="Helvetica Neue"/>
               </a:rPr>
-              <a:t>no C library at all</a:t>
+              <a:t>different OS and CPU (CI)</a:t>
             </a:r>
           </a:p>
         </p:txBody>
@@ -17276,8 +17257,8 @@
         </p:nvSpPr>
         <p:spPr>
           <a:xfrm>
-            <a:off x="777240" y="5321808"/>
-            <a:ext cx="10607040" cy="402336"/>
+            <a:off x="777240" y="5020056"/>
+            <a:ext cx="10607040" cy="365760"/>
           </a:xfrm>
           <a:prstGeom prst="roundRect">
             <a:avLst>
@@ -17322,7 +17303,7 @@
         </p:nvSpPr>
         <p:spPr>
           <a:xfrm>
-            <a:off x="1005840" y="5404104"/>
+            <a:off x="1005840" y="5084064"/>
             <a:ext cx="274320" cy="274320"/>
           </a:xfrm>
           <a:prstGeom prst="rect">
@@ -17364,7 +17345,7 @@
         </p:nvSpPr>
         <p:spPr>
           <a:xfrm>
-            <a:off x="1371600" y="5404104"/>
+            <a:off x="1371600" y="5084064"/>
             <a:ext cx="3017520" cy="274320"/>
           </a:xfrm>
           <a:prstGeom prst="rect">
@@ -17387,13 +17368,13 @@
               </a:spcAft>
             </a:pPr>
             <a:r>
-              <a:rPr sz="1300" b="0">
+              <a:rPr sz="1250" b="0">
                 <a:solidFill>
                   <a:srgbClr val="E8ECF1"/>
                 </a:solidFill>
                 <a:latin typeface="Helvetica Neue"/>
               </a:rPr>
-              <a:t>Intel, no OS</a:t>
+              <a:t>ARM, no OS</a:t>
             </a:r>
           </a:p>
         </p:txBody>
@@ -17406,7 +17387,7 @@
         </p:nvSpPr>
         <p:spPr>
           <a:xfrm>
-            <a:off x="4480560" y="5404104"/>
+            <a:off x="4480560" y="5084064"/>
             <a:ext cx="1280160" cy="274320"/>
           </a:xfrm>
           <a:prstGeom prst="rect">
@@ -17429,7 +17410,7 @@
               </a:spcAft>
             </a:pPr>
             <a:r>
-              <a:rPr sz="1200" b="0">
+              <a:rPr sz="1150" b="0">
                 <a:solidFill>
                   <a:srgbClr val="8B99A8"/>
                 </a:solidFill>
@@ -17448,7 +17429,7 @@
         </p:nvSpPr>
         <p:spPr>
           <a:xfrm>
-            <a:off x="5943600" y="5404104"/>
+            <a:off x="5943600" y="5084064"/>
             <a:ext cx="5303520" cy="274320"/>
           </a:xfrm>
           <a:prstGeom prst="rect">
@@ -17471,13 +17452,13 @@
               </a:spcAft>
             </a:pPr>
             <a:r>
-              <a:rPr sz="1200" b="0">
-                <a:solidFill>
-                  <a:srgbClr val="36D3C4"/>
-                </a:solidFill>
-                <a:latin typeface="Helvetica Neue"/>
-              </a:rPr>
-              <a:t>different CPU maths implementation</a:t>
+              <a:rPr sz="1150" b="0">
+                <a:solidFill>
+                  <a:srgbClr val="9B8CF0"/>
+                </a:solidFill>
+                <a:latin typeface="Helvetica Neue"/>
+              </a:rPr>
+              <a:t>no C library at all</a:t>
             </a:r>
           </a:p>
         </p:txBody>
@@ -17490,8 +17471,8 @@
         </p:nvSpPr>
         <p:spPr>
           <a:xfrm>
-            <a:off x="777240" y="5779008"/>
-            <a:ext cx="10607040" cy="402336"/>
+            <a:off x="777240" y="5436108"/>
+            <a:ext cx="10607040" cy="365760"/>
           </a:xfrm>
           <a:prstGeom prst="roundRect">
             <a:avLst>
@@ -17536,7 +17517,7 @@
         </p:nvSpPr>
         <p:spPr>
           <a:xfrm>
-            <a:off x="1005840" y="5861304"/>
+            <a:off x="1005840" y="5500116"/>
             <a:ext cx="274320" cy="274320"/>
           </a:xfrm>
           <a:prstGeom prst="rect">
@@ -17578,7 +17559,7 @@
         </p:nvSpPr>
         <p:spPr>
           <a:xfrm>
-            <a:off x="1371600" y="5861304"/>
+            <a:off x="1371600" y="5500116"/>
             <a:ext cx="3017520" cy="274320"/>
           </a:xfrm>
           <a:prstGeom prst="rect">
@@ -17601,12 +17582,226 @@
               </a:spcAft>
             </a:pPr>
             <a:r>
-              <a:rPr sz="1300" b="0">
+              <a:rPr sz="1250" b="0">
                 <a:solidFill>
                   <a:srgbClr val="E8ECF1"/>
                 </a:solidFill>
                 <a:latin typeface="Helvetica Neue"/>
               </a:rPr>
+              <a:t>Intel, no OS</a:t>
+            </a:r>
+          </a:p>
+        </p:txBody>
+      </p:sp>
+      <p:sp>
+        <p:nvSpPr>
+          <p:cNvPr id="45" name="TextBox 44"/>
+          <p:cNvSpPr txBox="1"/>
+          <p:nvPr/>
+        </p:nvSpPr>
+        <p:spPr>
+          <a:xfrm>
+            <a:off x="4480560" y="5500116"/>
+            <a:ext cx="1280160" cy="274320"/>
+          </a:xfrm>
+          <a:prstGeom prst="rect">
+            <a:avLst/>
+          </a:prstGeom>
+          <a:noFill/>
+        </p:spPr>
+        <p:txBody>
+          <a:bodyPr wrap="square" lIns="0" rIns="0" tIns="0" bIns="0">
+            <a:spAutoFit/>
+          </a:bodyPr>
+          <a:lstStyle/>
+          <a:p>
+            <a:pPr algn="l">
+              <a:lnSpc>
+                <a:spcPct val="125000"/>
+              </a:lnSpc>
+              <a:spcAft>
+                <a:spcPts val="600"/>
+              </a:spcAft>
+            </a:pPr>
+            <a:r>
+              <a:rPr sz="1150" b="0">
+                <a:solidFill>
+                  <a:srgbClr val="8B99A8"/>
+                </a:solidFill>
+                <a:latin typeface="Menlo"/>
+              </a:rPr>
+              <a:t>QEMU</a:t>
+            </a:r>
+          </a:p>
+        </p:txBody>
+      </p:sp>
+      <p:sp>
+        <p:nvSpPr>
+          <p:cNvPr id="46" name="TextBox 45"/>
+          <p:cNvSpPr txBox="1"/>
+          <p:nvPr/>
+        </p:nvSpPr>
+        <p:spPr>
+          <a:xfrm>
+            <a:off x="5943600" y="5500116"/>
+            <a:ext cx="5303520" cy="274320"/>
+          </a:xfrm>
+          <a:prstGeom prst="rect">
+            <a:avLst/>
+          </a:prstGeom>
+          <a:noFill/>
+        </p:spPr>
+        <p:txBody>
+          <a:bodyPr wrap="square" lIns="0" rIns="0" tIns="0" bIns="0">
+            <a:spAutoFit/>
+          </a:bodyPr>
+          <a:lstStyle/>
+          <a:p>
+            <a:pPr algn="l">
+              <a:lnSpc>
+                <a:spcPct val="125000"/>
+              </a:lnSpc>
+              <a:spcAft>
+                <a:spcPts val="600"/>
+              </a:spcAft>
+            </a:pPr>
+            <a:r>
+              <a:rPr sz="1150" b="0">
+                <a:solidFill>
+                  <a:srgbClr val="36D3C4"/>
+                </a:solidFill>
+                <a:latin typeface="Helvetica Neue"/>
+              </a:rPr>
+              <a:t>different CPU maths implementation</a:t>
+            </a:r>
+          </a:p>
+        </p:txBody>
+      </p:sp>
+      <p:sp>
+        <p:nvSpPr>
+          <p:cNvPr id="47" name="Rounded Rectangle 46"/>
+          <p:cNvSpPr/>
+          <p:nvPr/>
+        </p:nvSpPr>
+        <p:spPr>
+          <a:xfrm>
+            <a:off x="777240" y="5852160"/>
+            <a:ext cx="10607040" cy="365760"/>
+          </a:xfrm>
+          <a:prstGeom prst="roundRect">
+            <a:avLst>
+              <a:gd name="adj" fmla="val 6000"/>
+            </a:avLst>
+          </a:prstGeom>
+          <a:solidFill>
+            <a:srgbClr val="1A212B"/>
+          </a:solidFill>
+          <a:ln>
+            <a:noFill/>
+          </a:ln>
+          <a:effectLst/>
+        </p:spPr>
+        <p:style>
+          <a:lnRef idx="1">
+            <a:schemeClr val="accent1"/>
+          </a:lnRef>
+          <a:fillRef idx="3">
+            <a:schemeClr val="accent1"/>
+          </a:fillRef>
+          <a:effectRef idx="2">
+            <a:schemeClr val="accent1"/>
+          </a:effectRef>
+          <a:fontRef idx="minor">
+            <a:schemeClr val="lt1"/>
+          </a:fontRef>
+        </p:style>
+        <p:txBody>
+          <a:bodyPr rtlCol="0" anchor="ctr"/>
+          <a:lstStyle/>
+          <a:p>
+            <a:pPr algn="ctr"/>
+          </a:p>
+        </p:txBody>
+      </p:sp>
+      <p:sp>
+        <p:nvSpPr>
+          <p:cNvPr id="48" name="TextBox 47"/>
+          <p:cNvSpPr txBox="1"/>
+          <p:nvPr/>
+        </p:nvSpPr>
+        <p:spPr>
+          <a:xfrm>
+            <a:off x="1005840" y="5916168"/>
+            <a:ext cx="274320" cy="274320"/>
+          </a:xfrm>
+          <a:prstGeom prst="rect">
+            <a:avLst/>
+          </a:prstGeom>
+          <a:noFill/>
+        </p:spPr>
+        <p:txBody>
+          <a:bodyPr wrap="square" lIns="0" rIns="0" tIns="0" bIns="0">
+            <a:spAutoFit/>
+          </a:bodyPr>
+          <a:lstStyle/>
+          <a:p>
+            <a:pPr algn="l">
+              <a:lnSpc>
+                <a:spcPct val="125000"/>
+              </a:lnSpc>
+              <a:spcAft>
+                <a:spcPts val="600"/>
+              </a:spcAft>
+            </a:pPr>
+            <a:r>
+              <a:rPr sz="1300" b="1">
+                <a:solidFill>
+                  <a:srgbClr val="36D3C4"/>
+                </a:solidFill>
+                <a:latin typeface="Helvetica Neue"/>
+              </a:rPr>
+              <a:t>✓</a:t>
+            </a:r>
+          </a:p>
+        </p:txBody>
+      </p:sp>
+      <p:sp>
+        <p:nvSpPr>
+          <p:cNvPr id="49" name="TextBox 48"/>
+          <p:cNvSpPr txBox="1"/>
+          <p:nvPr/>
+        </p:nvSpPr>
+        <p:spPr>
+          <a:xfrm>
+            <a:off x="1371600" y="5916168"/>
+            <a:ext cx="3017520" cy="274320"/>
+          </a:xfrm>
+          <a:prstGeom prst="rect">
+            <a:avLst/>
+          </a:prstGeom>
+          <a:noFill/>
+        </p:spPr>
+        <p:txBody>
+          <a:bodyPr wrap="square" lIns="0" rIns="0" tIns="0" bIns="0">
+            <a:spAutoFit/>
+          </a:bodyPr>
+          <a:lstStyle/>
+          <a:p>
+            <a:pPr algn="l">
+              <a:lnSpc>
+                <a:spcPct val="125000"/>
+              </a:lnSpc>
+              <a:spcAft>
+                <a:spcPts val="600"/>
+              </a:spcAft>
+            </a:pPr>
+            <a:r>
+              <a:rPr sz="1250" b="0">
+                <a:solidFill>
+                  <a:srgbClr val="E8ECF1"/>
+                </a:solidFill>
+                <a:latin typeface="Helvetica Neue"/>
+              </a:rPr>
               <a:t>seL4 / Microkit</a:t>
             </a:r>
           </a:p>
@@ -17614,13 +17809,13 @@
       </p:sp>
       <p:sp>
         <p:nvSpPr>
-          <p:cNvPr id="45" name="TextBox 44"/>
-          <p:cNvSpPr txBox="1"/>
-          <p:nvPr/>
-        </p:nvSpPr>
-        <p:spPr>
-          <a:xfrm>
-            <a:off x="4480560" y="5861304"/>
+          <p:cNvPr id="50" name="TextBox 49"/>
+          <p:cNvSpPr txBox="1"/>
+          <p:nvPr/>
+        </p:nvSpPr>
+        <p:spPr>
+          <a:xfrm>
+            <a:off x="4480560" y="5916168"/>
             <a:ext cx="1280160" cy="274320"/>
           </a:xfrm>
           <a:prstGeom prst="rect">
@@ -17643,7 +17838,7 @@
               </a:spcAft>
             </a:pPr>
             <a:r>
-              <a:rPr sz="1200" b="0">
+              <a:rPr sz="1150" b="0">
                 <a:solidFill>
                   <a:srgbClr val="8B99A8"/>
                 </a:solidFill>
@@ -17656,13 +17851,13 @@
       </p:sp>
       <p:sp>
         <p:nvSpPr>
-          <p:cNvPr id="46" name="TextBox 45"/>
-          <p:cNvSpPr txBox="1"/>
-          <p:nvPr/>
-        </p:nvSpPr>
-        <p:spPr>
-          <a:xfrm>
-            <a:off x="5943600" y="5861304"/>
+          <p:cNvPr id="51" name="TextBox 50"/>
+          <p:cNvSpPr txBox="1"/>
+          <p:nvPr/>
+        </p:nvSpPr>
+        <p:spPr>
+          <a:xfrm>
+            <a:off x="5943600" y="5916168"/>
             <a:ext cx="5303520" cy="274320"/>
           </a:xfrm>
           <a:prstGeom prst="rect">
@@ -17685,7 +17880,7 @@
               </a:spcAft>
             </a:pPr>
             <a:r>
-              <a:rPr sz="1200" b="0">
+              <a:rPr sz="1150" b="0">
                 <a:solidFill>
                   <a:srgbClr val="36D3C4"/>
                 </a:solidFill>
@@ -17698,7 +17893,7 @@
       </p:sp>
       <p:sp>
         <p:nvSpPr>
-          <p:cNvPr id="47" name="TextBox 46"/>
+          <p:cNvPr id="52" name="TextBox 51"/>
           <p:cNvSpPr txBox="1"/>
           <p:nvPr/>
         </p:nvSpPr>
@@ -17740,7 +17935,7 @@
       </p:sp>
       <p:sp>
         <p:nvSpPr>
-          <p:cNvPr id="48" name="TextBox 47"/>
+          <p:cNvPr id="53" name="TextBox 52"/>
           <p:cNvSpPr txBox="1"/>
           <p:nvPr/>
         </p:nvSpPr>
@@ -19083,7 +19278,7 @@
                 </a:solidFill>
                 <a:latin typeface="Helvetica Neue"/>
               </a:rPr>
-              <a:t>Same on all eight builds.
+              <a:t>Same on all nine builds.
 Fixed at build time.</a:t>
             </a:r>
           </a:p>

--- a/documentation/muinference-deck.pptx
+++ b/documentation/muinference-deck.pptx
@@ -3779,6 +3779,25 @@
                 </a:solidFill>
                 <a:latin typeface="Helvetica Neue"/>
               </a:rPr>
+              <a:t>·  Proved: error linear in depth</a:t>
+            </a:r>
+          </a:p>
+          <a:p>
+            <a:pPr algn="l">
+              <a:lnSpc>
+                <a:spcPct val="130000"/>
+              </a:lnSpc>
+              <a:spcAft>
+                <a:spcPts val="1100"/>
+              </a:spcAft>
+            </a:pPr>
+            <a:r>
+              <a:rPr sz="1300" b="0">
+                <a:solidFill>
+                  <a:srgbClr val="E8ECF1"/>
+                </a:solidFill>
+                <a:latin typeface="Helvetica Neue"/>
+              </a:rPr>
               <a:t>·  All of it checked in CI</a:t>
             </a:r>
           </a:p>
@@ -3911,25 +3930,6 @@
                 </a:solidFill>
                 <a:latin typeface="Helvetica Neue"/>
               </a:rPr>
-              <a:t>·  Total error for one token</a:t>
-            </a:r>
-          </a:p>
-          <a:p>
-            <a:pPr algn="l">
-              <a:lnSpc>
-                <a:spcPct val="130000"/>
-              </a:lnSpc>
-              <a:spcAft>
-                <a:spcPts val="1100"/>
-              </a:spcAft>
-            </a:pPr>
-            <a:r>
-              <a:rPr sz="1300" b="0">
-                <a:solidFill>
-                  <a:srgbClr val="E8ECF1"/>
-                </a:solidFill>
-                <a:latin typeface="Helvetica Neue"/>
-              </a:rPr>
               <a:t>·  Cover the last two functions</a:t>
             </a:r>
           </a:p>
@@ -4100,7 +4100,7 @@
                 </a:solidFill>
                 <a:latin typeface="Helvetica Neue"/>
               </a:rPr>
-              <a:t>·  Prove the total error bound</a:t>
+              <a:t>·  Link the C code to a Coq spec (VST)</a:t>
             </a:r>
           </a:p>
           <a:p>
@@ -6495,7 +6495,7 @@
             <a:r>
               <a:rPr sz="1300" b="1">
                 <a:solidFill>
-                  <a:srgbClr val="F2B037"/>
+                  <a:srgbClr val="36D3C4"/>
                 </a:solidFill>
                 <a:latin typeface="Menlo"/>
               </a:rPr>
@@ -6541,7 +6541,7 @@
                 </a:solidFill>
                 <a:latin typeface="Helvetica Neue"/>
               </a:rPr>
-              <a:t>The total error for one token</a:t>
+              <a:t>Error is linear in depth, not exponential</a:t>
             </a:r>
           </a:p>
         </p:txBody>
@@ -6583,7 +6583,7 @@
                 </a:solidFill>
                 <a:latin typeface="Menlo"/>
               </a:rPr>
-              <a:t>combine S4a, S4b</a:t>
+              <a:t>Rocq proof</a:t>
             </a:r>
           </a:p>
         </p:txBody>
@@ -6621,11 +6621,11 @@
             <a:r>
               <a:rPr sz="1200" b="0">
                 <a:solidFill>
-                  <a:srgbClr val="F2B037"/>
-                </a:solidFill>
-                <a:latin typeface="Helvetica Neue"/>
-              </a:rPr>
-              <a:t>open</a:t>
+                  <a:srgbClr val="36D3C4"/>
+                </a:solidFill>
+                <a:latin typeface="Helvetica Neue"/>
+              </a:rPr>
+              <a:t>DONE   no axioms added</a:t>
             </a:r>
           </a:p>
         </p:txBody>
@@ -6881,7 +6881,7 @@
                 </a:solidFill>
                 <a:latin typeface="Helvetica Neue"/>
               </a:rPr>
-              <a:t>13 of 13 checks pass. Five of the eight parts are done.</a:t>
+              <a:t>14 of 14 checks pass. Six of the eight parts are done.</a:t>
             </a:r>
           </a:p>
         </p:txBody>
@@ -8739,7 +8739,7 @@
             </a:avLst>
           </a:prstGeom>
           <a:solidFill>
-            <a:srgbClr val="F2B037"/>
+            <a:srgbClr val="36D3C4"/>
           </a:solidFill>
           <a:ln>
             <a:noFill/>
@@ -8847,7 +8847,7 @@
                 </a:solidFill>
                 <a:latin typeface="Helvetica Neue"/>
               </a:rPr>
-              <a:t>Total error for one token (S4c)</a:t>
+              <a:t>Composition, linear in depth (S4c)</a:t>
             </a:r>
           </a:p>
         </p:txBody>
@@ -8889,7 +8889,7 @@
                 </a:solidFill>
                 <a:latin typeface="Menlo"/>
               </a:rPr>
-              <a:t>weeks</a:t>
+              <a:t>done</a:t>
             </a:r>
           </a:p>
         </p:txBody>
@@ -8927,11 +8927,11 @@
             <a:r>
               <a:rPr sz="1200" b="0">
                 <a:solidFill>
-                  <a:srgbClr val="F2B037"/>
-                </a:solidFill>
-                <a:latin typeface="Helvetica Neue"/>
-              </a:rPr>
-              <a:t>combine S4a and S4b</a:t>
+                  <a:srgbClr val="36D3C4"/>
+                </a:solidFill>
+                <a:latin typeface="Helvetica Neue"/>
+              </a:rPr>
+              <a:t>Rocq, no added axioms</a:t>
             </a:r>
           </a:p>
         </p:txBody>
@@ -9281,7 +9281,7 @@
                 </a:solidFill>
                 <a:latin typeface="Helvetica Neue"/>
               </a:rPr>
-              <a:t>Steps 0 to 5 are finished. Reproducibility is now proven, not tested.</a:t>
+              <a:t>Steps 0 to 6 done. Only full correctness (S5) is left, and it needs VST.</a:t>
             </a:r>
           </a:p>
         </p:txBody>
